--- a/defense_ppt/决赛答辩PPT.pptx
+++ b/defense_ppt/决赛答辩PPT.pptx
@@ -17,6 +17,9 @@
     <p:sldId id="265" r:id="rId16"/>
     <p:sldId id="266" r:id="rId17"/>
     <p:sldId id="267" r:id="rId18"/>
+    <p:sldId id="268" r:id="rId19"/>
+    <p:sldId id="269" r:id="rId20"/>
+    <p:sldId id="270" r:id="rId21"/>
   </p:sldIdLst>
   <p:sldSz cx="12191695" cy="6858000" type="screen4x3"/>
   <p:notesSz cx="6858000" cy="9144000"/>
@@ -3370,7 +3373,7 @@
         </p:nvSpPr>
         <p:spPr>
           <a:xfrm>
-            <a:off x="777240" y="1600200"/>
+            <a:off x="777240" y="1554480"/>
             <a:ext cx="11155680" cy="1005840"/>
           </a:xfrm>
           <a:prstGeom prst="rect">
@@ -3393,7 +3396,7 @@
               </a:spcAft>
             </a:pPr>
             <a:r>
-              <a:rPr sz="4000" b="1">
+              <a:rPr sz="3800" b="1">
                 <a:solidFill>
                   <a:srgbClr val="0F172A"/>
                 </a:solidFill>
@@ -3413,7 +3416,7 @@
         </p:nvSpPr>
         <p:spPr>
           <a:xfrm>
-            <a:off x="822960" y="2606040"/>
+            <a:off x="822960" y="2514600"/>
             <a:ext cx="10789920" cy="502920"/>
           </a:xfrm>
           <a:prstGeom prst="rect">
@@ -3456,7 +3459,7 @@
         </p:nvSpPr>
         <p:spPr>
           <a:xfrm>
-            <a:off x="822960" y="3200400"/>
+            <a:off x="822960" y="3108960"/>
             <a:ext cx="10789920" cy="320040"/>
           </a:xfrm>
           <a:prstGeom prst="rect">
@@ -3499,7 +3502,7 @@
         </p:nvSpPr>
         <p:spPr>
           <a:xfrm>
-            <a:off x="822960" y="3977639"/>
+            <a:off x="822960" y="3840480"/>
             <a:ext cx="1600200" cy="384048"/>
           </a:xfrm>
           <a:prstGeom prst="roundRect">
@@ -3545,7 +3548,7 @@
         </p:nvSpPr>
         <p:spPr>
           <a:xfrm>
-            <a:off x="822960" y="4023359"/>
+            <a:off x="822960" y="3886200"/>
             <a:ext cx="1600200" cy="292608"/>
           </a:xfrm>
           <a:prstGeom prst="rect">
@@ -3588,7 +3591,7 @@
         </p:nvSpPr>
         <p:spPr>
           <a:xfrm>
-            <a:off x="2606040" y="3977639"/>
+            <a:off x="2606040" y="3840480"/>
             <a:ext cx="1600200" cy="384048"/>
           </a:xfrm>
           <a:prstGeom prst="roundRect">
@@ -3634,7 +3637,7 @@
         </p:nvSpPr>
         <p:spPr>
           <a:xfrm>
-            <a:off x="2606040" y="4023359"/>
+            <a:off x="2606040" y="3886200"/>
             <a:ext cx="1600200" cy="292608"/>
           </a:xfrm>
           <a:prstGeom prst="rect">
@@ -3677,7 +3680,7 @@
         </p:nvSpPr>
         <p:spPr>
           <a:xfrm>
-            <a:off x="4389120" y="3977639"/>
+            <a:off x="4389120" y="3840480"/>
             <a:ext cx="1600200" cy="384048"/>
           </a:xfrm>
           <a:prstGeom prst="roundRect">
@@ -3723,7 +3726,7 @@
         </p:nvSpPr>
         <p:spPr>
           <a:xfrm>
-            <a:off x="4389120" y="4023359"/>
+            <a:off x="4389120" y="3886200"/>
             <a:ext cx="1600200" cy="292608"/>
           </a:xfrm>
           <a:prstGeom prst="rect">
@@ -3766,7 +3769,7 @@
         </p:nvSpPr>
         <p:spPr>
           <a:xfrm>
-            <a:off x="6172200" y="3977639"/>
+            <a:off x="6172200" y="3840480"/>
             <a:ext cx="1600200" cy="384048"/>
           </a:xfrm>
           <a:prstGeom prst="roundRect">
@@ -3812,7 +3815,7 @@
         </p:nvSpPr>
         <p:spPr>
           <a:xfrm>
-            <a:off x="6172200" y="4023359"/>
+            <a:off x="6172200" y="3886200"/>
             <a:ext cx="1600200" cy="292608"/>
           </a:xfrm>
           <a:prstGeom prst="rect">
@@ -3855,8 +3858,8 @@
         </p:nvSpPr>
         <p:spPr>
           <a:xfrm>
-            <a:off x="822960" y="4754880"/>
-            <a:ext cx="10789920" cy="320040"/>
+            <a:off x="822960" y="4572000"/>
+            <a:ext cx="7315200" cy="548640"/>
           </a:xfrm>
           <a:prstGeom prst="rect">
             <a:avLst/>
@@ -3878,28 +3881,71 @@
               </a:spcAft>
             </a:pPr>
             <a:r>
-              <a:rPr sz="1400" b="1">
+              <a:rPr sz="2200" b="1">
                 <a:solidFill>
                   <a:srgbClr val="0F172A"/>
+                </a:solidFill>
+                <a:latin typeface="Ma Shan Zheng"/>
+                <a:ea typeface="Ma Shan Zheng"/>
+              </a:rPr>
+              <a:t>决赛答辩</a:t>
+            </a:r>
+          </a:p>
+        </p:txBody>
+      </p:sp>
+      <p:sp>
+        <p:nvSpPr>
+          <p:cNvPr id="20" name="TextBox 19"/>
+          <p:cNvSpPr txBox="1"/>
+          <p:nvPr/>
+        </p:nvSpPr>
+        <p:spPr>
+          <a:xfrm>
+            <a:off x="822960" y="5166360"/>
+            <a:ext cx="10789920" cy="320040"/>
+          </a:xfrm>
+          <a:prstGeom prst="rect">
+            <a:avLst/>
+          </a:prstGeom>
+          <a:noFill/>
+        </p:spPr>
+        <p:txBody>
+          <a:bodyPr wrap="square" anchor="t">
+            <a:spAutoFit/>
+          </a:bodyPr>
+          <a:lstStyle/>
+          <a:p>
+            <a:pPr algn="l">
+              <a:lnSpc>
+                <a:spcPct val="100000"/>
+              </a:lnSpc>
+              <a:spcAft>
+                <a:spcPts val="200"/>
+              </a:spcAft>
+            </a:pPr>
+            <a:r>
+              <a:rPr sz="1200" b="0">
+                <a:solidFill>
+                  <a:srgbClr val="64748B"/>
                 </a:solidFill>
                 <a:latin typeface="Hiragino Sans GB"/>
                 <a:ea typeface="Hiragino Sans GB"/>
               </a:rPr>
-              <a:t>决赛答辩 · 西安交通大学</a:t>
-            </a:r>
-          </a:p>
-        </p:txBody>
-      </p:sp>
-      <p:sp>
-        <p:nvSpPr>
-          <p:cNvPr id="20" name="TextBox 19"/>
+              <a:t>西安交通大学 · 2026 年 11 月 27 日</a:t>
+            </a:r>
+          </a:p>
+        </p:txBody>
+      </p:sp>
+      <p:sp>
+        <p:nvSpPr>
+          <p:cNvPr id="21" name="TextBox 20"/>
           <p:cNvSpPr txBox="1"/>
           <p:nvPr/>
         </p:nvSpPr>
         <p:spPr>
           <a:xfrm>
-            <a:off x="822960" y="5212080"/>
-            <a:ext cx="10789920" cy="320040"/>
+            <a:off x="822960" y="5760720"/>
+            <a:ext cx="10789920" cy="274320"/>
           </a:xfrm>
           <a:prstGeom prst="rect">
             <a:avLst/>
@@ -3921,28 +3967,28 @@
               </a:spcAft>
             </a:pPr>
             <a:r>
-              <a:rPr sz="1100" b="0">
+              <a:rPr sz="900" b="0">
                 <a:solidFill>
                   <a:srgbClr val="64748B"/>
                 </a:solidFill>
                 <a:latin typeface="Hiragino Sans GB"/>
                 <a:ea typeface="Hiragino Sans GB"/>
               </a:rPr>
-              <a:t>团队成员信息已按匿名评审要求隐去</a:t>
-            </a:r>
-          </a:p>
-        </p:txBody>
-      </p:sp>
-      <p:sp>
-        <p:nvSpPr>
-          <p:cNvPr id="21" name="TextBox 20"/>
+              <a:t>虚拟仿真实验 · 教学演示，不构成投资建议</a:t>
+            </a:r>
+          </a:p>
+        </p:txBody>
+      </p:sp>
+      <p:sp>
+        <p:nvSpPr>
+          <p:cNvPr id="22" name="TextBox 21"/>
           <p:cNvSpPr txBox="1"/>
           <p:nvPr/>
         </p:nvSpPr>
         <p:spPr>
           <a:xfrm>
-            <a:off x="822960" y="5852160"/>
-            <a:ext cx="10789920" cy="274320"/>
+            <a:off x="548640" y="6473952"/>
+            <a:ext cx="7315200" cy="274320"/>
           </a:xfrm>
           <a:prstGeom prst="rect">
             <a:avLst/>
@@ -3964,28 +4010,28 @@
               </a:spcAft>
             </a:pPr>
             <a:r>
-              <a:rPr sz="900" b="0">
+              <a:rPr sz="850" b="0">
                 <a:solidFill>
                   <a:srgbClr val="64748B"/>
                 </a:solidFill>
                 <a:latin typeface="Hiragino Sans GB"/>
                 <a:ea typeface="Hiragino Sans GB"/>
               </a:rPr>
-              <a:t>虚拟仿真实验 · 教学演示，不构成投资建议</a:t>
-            </a:r>
-          </a:p>
-        </p:txBody>
-      </p:sp>
-      <p:sp>
-        <p:nvSpPr>
-          <p:cNvPr id="22" name="TextBox 21"/>
+              <a:t>AI 选股信号该配多大仓位？ · 虚拟仿真实验教学案例 · 教学指导配套</a:t>
+            </a:r>
+          </a:p>
+        </p:txBody>
+      </p:sp>
+      <p:sp>
+        <p:nvSpPr>
+          <p:cNvPr id="23" name="TextBox 22"/>
           <p:cNvSpPr txBox="1"/>
           <p:nvPr/>
         </p:nvSpPr>
         <p:spPr>
           <a:xfrm>
-            <a:off x="548640" y="6473952"/>
-            <a:ext cx="7315200" cy="274320"/>
+            <a:off x="10607040" y="6419088"/>
+            <a:ext cx="1097280" cy="320040"/>
           </a:xfrm>
           <a:prstGeom prst="rect">
             <a:avLst/>
@@ -3998,7 +4044,7 @@
           </a:bodyPr>
           <a:lstStyle/>
           <a:p>
-            <a:pPr algn="l">
+            <a:pPr algn="r">
               <a:lnSpc>
                 <a:spcPct val="100000"/>
               </a:lnSpc>
@@ -4007,57 +4053,14 @@
               </a:spcAft>
             </a:pPr>
             <a:r>
-              <a:rPr sz="850" b="0">
-                <a:solidFill>
-                  <a:srgbClr val="64748B"/>
+              <a:rPr sz="1000" b="1">
+                <a:solidFill>
+                  <a:srgbClr val="2563EB"/>
                 </a:solidFill>
                 <a:latin typeface="Hiragino Sans GB"/>
                 <a:ea typeface="Hiragino Sans GB"/>
               </a:rPr>
-              <a:t>AI 选股信号该配多大仓位？ · 决赛答辩 · 西安交通大学</a:t>
-            </a:r>
-          </a:p>
-        </p:txBody>
-      </p:sp>
-      <p:sp>
-        <p:nvSpPr>
-          <p:cNvPr id="23" name="TextBox 22"/>
-          <p:cNvSpPr txBox="1"/>
-          <p:nvPr/>
-        </p:nvSpPr>
-        <p:spPr>
-          <a:xfrm>
-            <a:off x="10607040" y="6419088"/>
-            <a:ext cx="1097280" cy="320040"/>
-          </a:xfrm>
-          <a:prstGeom prst="rect">
-            <a:avLst/>
-          </a:prstGeom>
-          <a:noFill/>
-        </p:spPr>
-        <p:txBody>
-          <a:bodyPr wrap="square" anchor="t">
-            <a:spAutoFit/>
-          </a:bodyPr>
-          <a:lstStyle/>
-          <a:p>
-            <a:pPr algn="r">
-              <a:lnSpc>
-                <a:spcPct val="100000"/>
-              </a:lnSpc>
-              <a:spcAft>
-                <a:spcPts val="200"/>
-              </a:spcAft>
-            </a:pPr>
-            <a:r>
-              <a:rPr sz="1000" b="1">
-                <a:solidFill>
-                  <a:srgbClr val="2563EB"/>
-                </a:solidFill>
-                <a:latin typeface="Hiragino Sans GB"/>
-                <a:ea typeface="Hiragino Sans GB"/>
-              </a:rPr>
-              <a:t>01 / 12</a:t>
+              <a:t>01 / 15</a:t>
             </a:r>
           </a:p>
         </p:txBody>
@@ -4206,7 +4209,7 @@
                 <a:latin typeface="Hiragino Sans GB"/>
                 <a:ea typeface="Hiragino Sans GB"/>
               </a:rPr>
-              <a:t>04 · 拓展</a:t>
+              <a:t>分述三 · 稳健性</a:t>
             </a:r>
           </a:p>
         </p:txBody>
@@ -4292,7 +4295,7 @@
                 <a:latin typeface="Hiragino Sans GB"/>
                 <a:ea typeface="Hiragino Sans GB"/>
               </a:rPr>
-              <a:t>回应「回撤更低是否只因仓位更轻「——补上基准后，主动修正结论</a:t>
+              <a:t>回应「回撤更低是否只因仓位更轻」——补上基准后，主动修正结论</a:t>
             </a:r>
           </a:p>
         </p:txBody>
@@ -4306,7 +4309,7 @@
           <p:nvPr/>
         </p:nvGraphicFramePr>
         <p:xfrm>
-          <a:off x="822960" y="1600200"/>
+          <a:off x="822960" y="1554480"/>
           <a:ext cx="6903720" cy="1737360"/>
         </p:xfrm>
         <a:graphic>
@@ -4344,7 +4347,7 @@
                   </a:txBody>
                   <a:tcPr marT="12700" marB="12700" anchor="ctr">
                     <a:solidFill>
-                      <a:srgbClr val="0F172A"/>
+                      <a:srgbClr val="F43F5E"/>
                     </a:solidFill>
                   </a:tcPr>
                 </a:tc>
@@ -4368,7 +4371,7 @@
                   </a:txBody>
                   <a:tcPr marT="12700" marB="12700" anchor="ctr">
                     <a:solidFill>
-                      <a:srgbClr val="0F172A"/>
+                      <a:srgbClr val="F43F5E"/>
                     </a:solidFill>
                   </a:tcPr>
                 </a:tc>
@@ -4392,7 +4395,7 @@
                   </a:txBody>
                   <a:tcPr marT="12700" marB="12700" anchor="ctr">
                     <a:solidFill>
-                      <a:srgbClr val="0F172A"/>
+                      <a:srgbClr val="F43F5E"/>
                     </a:solidFill>
                   </a:tcPr>
                 </a:tc>
@@ -4416,7 +4419,7 @@
                   </a:txBody>
                   <a:tcPr marT="12700" marB="12700" anchor="ctr">
                     <a:solidFill>
-                      <a:srgbClr val="0F172A"/>
+                      <a:srgbClr val="F43F5E"/>
                     </a:solidFill>
                   </a:tcPr>
                 </a:tc>
@@ -4440,7 +4443,7 @@
                   </a:txBody>
                   <a:tcPr marT="12700" marB="12700" anchor="ctr">
                     <a:solidFill>
-                      <a:srgbClr val="0F172A"/>
+                      <a:srgbClr val="F43F5E"/>
                     </a:solidFill>
                   </a:tcPr>
                 </a:tc>
@@ -4464,7 +4467,7 @@
                   </a:txBody>
                   <a:tcPr marT="12700" marB="12700" anchor="ctr">
                     <a:solidFill>
-                      <a:srgbClr val="0F172A"/>
+                      <a:srgbClr val="F43F5E"/>
                     </a:solidFill>
                   </a:tcPr>
                 </a:tc>
@@ -4484,7 +4487,7 @@
                           <a:latin typeface="Hiragino Sans GB"/>
                           <a:ea typeface="Hiragino Sans GB"/>
                         </a:rPr>
-                        <a:t>S 静态等权（敞口匹配 C，无干预）</a:t>
+                        <a:t>S 静态等权（敞口匹配 C）</a:t>
                       </a:r>
                     </a:p>
                   </a:txBody>
@@ -4630,7 +4633,7 @@
                           <a:latin typeface="Hiragino Sans GB"/>
                           <a:ea typeface="Hiragino Sans GB"/>
                         </a:rPr>
-                        <a:t>C 1/4凯利+回撤干预</a:t>
+                        <a:t>C 1/4凯利+干预</a:t>
                       </a:r>
                     </a:p>
                   </a:txBody>
@@ -5065,7 +5068,7 @@
         </p:nvSpPr>
         <p:spPr>
           <a:xfrm>
-            <a:off x="8046720" y="1737360"/>
+            <a:off x="8046720" y="1691640"/>
             <a:ext cx="3474720" cy="457200"/>
           </a:xfrm>
           <a:prstGeom prst="rect">
@@ -5108,7 +5111,7 @@
         </p:nvSpPr>
         <p:spPr>
           <a:xfrm>
-            <a:off x="8046720" y="2286000"/>
+            <a:off x="8046720" y="2240280"/>
             <a:ext cx="3474720" cy="1828800"/>
           </a:xfrm>
           <a:prstGeom prst="rect">
@@ -5314,7 +5317,7 @@
                 <a:latin typeface="Hiragino Sans GB"/>
                 <a:ea typeface="Hiragino Sans GB"/>
               </a:rPr>
-              <a:t>AI 选股信号该配多大仓位？ · 决赛答辩 · 西安交通大学</a:t>
+              <a:t>AI 选股信号该配多大仓位？ · 虚拟仿真实验教学案例 · 教学指导配套</a:t>
             </a:r>
           </a:p>
         </p:txBody>
@@ -5357,7 +5360,7 @@
                 <a:latin typeface="Hiragino Sans GB"/>
                 <a:ea typeface="Hiragino Sans GB"/>
               </a:rPr>
-              <a:t>10 / 12</a:t>
+              <a:t>10 / 15</a:t>
             </a:r>
           </a:p>
         </p:txBody>
@@ -5395,7 +5398,7 @@
             <a:avLst/>
           </a:prstGeom>
           <a:solidFill>
-            <a:srgbClr val="10B981"/>
+            <a:srgbClr val="7C3AED"/>
           </a:solidFill>
           <a:ln>
             <a:noFill/>
@@ -5439,7 +5442,7 @@
             <a:avLst/>
           </a:prstGeom>
           <a:solidFill>
-            <a:srgbClr val="10B981"/>
+            <a:srgbClr val="7C3AED"/>
           </a:solidFill>
           <a:ln>
             <a:noFill/>
@@ -5506,7 +5509,7 @@
                 <a:latin typeface="Hiragino Sans GB"/>
                 <a:ea typeface="Hiragino Sans GB"/>
               </a:rPr>
-              <a:t>04 · 价值</a:t>
+              <a:t>分述三 · 稳健性</a:t>
             </a:r>
           </a:p>
         </p:txBody>
@@ -5549,7 +5552,7 @@
                 <a:latin typeface="Hiragino Sans GB"/>
                 <a:ea typeface="Hiragino Sans GB"/>
               </a:rPr>
-              <a:t>方法论示范 + 教学转化 + 可复现交付</a:t>
+              <a:t>稳健性与外推性：五项检验</a:t>
             </a:r>
           </a:p>
         </p:txBody>
@@ -5592,7 +5595,7 @@
                 <a:latin typeface="Hiragino Sans GB"/>
                 <a:ea typeface="Hiragino Sans GB"/>
               </a:rPr>
-              <a:t>对照官方评分标准的 12 个观测点逐条对齐；vx_verify 24/24 锚点 PASS</a:t>
+              <a:t>回答「结论是不是运气、是不是只对模拟信号成立」</a:t>
             </a:r>
           </a:p>
         </p:txBody>
@@ -5606,7 +5609,7 @@
         <p:spPr>
           <a:xfrm>
             <a:off x="822960" y="1554480"/>
-            <a:ext cx="10607040" cy="731520"/>
+            <a:ext cx="10607040" cy="685800"/>
           </a:xfrm>
           <a:prstGeom prst="roundRect">
             <a:avLst>
@@ -5654,7 +5657,7 @@
         <p:spPr>
           <a:xfrm>
             <a:off x="822960" y="1554480"/>
-            <a:ext cx="82296" cy="731520"/>
+            <a:ext cx="82296" cy="685800"/>
           </a:xfrm>
           <a:prstGeom prst="rect">
             <a:avLst/>
@@ -5697,7 +5700,7 @@
         </p:nvSpPr>
         <p:spPr>
           <a:xfrm>
-            <a:off x="1097280" y="1627632"/>
+            <a:off x="1097280" y="1645920"/>
             <a:ext cx="3200400" cy="320040"/>
           </a:xfrm>
           <a:prstGeom prst="rect">
@@ -5720,14 +5723,14 @@
               </a:spcAft>
             </a:pPr>
             <a:r>
-              <a:rPr sz="1300" b="1">
+              <a:rPr sz="1250" b="1">
                 <a:solidFill>
                   <a:srgbClr val="2563EB"/>
                 </a:solidFill>
                 <a:latin typeface="Hiragino Sans GB"/>
                 <a:ea typeface="Hiragino Sans GB"/>
               </a:rPr>
-              <a:t>五项可验证证据</a:t>
+              <a:t>① 块状自助法</a:t>
             </a:r>
           </a:p>
         </p:txBody>
@@ -5770,7 +5773,7 @@
                 <a:latin typeface="Hiragino Sans GB"/>
                 <a:ea typeface="Hiragino Sans GB"/>
               </a:rPr>
-              <a:t>多策略对照 · 样本外 · 反事实 · 可解释归因 · 复现能力</a:t>
+              <a:t>1000 次重抽样——收益差异不显著，回撤优势稳健（C CI 优于 A/B）</a:t>
             </a:r>
           </a:p>
         </p:txBody>
@@ -5783,8 +5786,8 @@
         </p:nvSpPr>
         <p:spPr>
           <a:xfrm>
-            <a:off x="822960" y="2423160"/>
-            <a:ext cx="10607040" cy="731520"/>
+            <a:off x="822960" y="2395728"/>
+            <a:ext cx="10607040" cy="685800"/>
           </a:xfrm>
           <a:prstGeom prst="roundRect">
             <a:avLst>
@@ -5831,8 +5834,8 @@
         </p:nvSpPr>
         <p:spPr>
           <a:xfrm>
-            <a:off x="822960" y="2423160"/>
-            <a:ext cx="82296" cy="731520"/>
+            <a:off x="822960" y="2395728"/>
+            <a:ext cx="82296" cy="685800"/>
           </a:xfrm>
           <a:prstGeom prst="rect">
             <a:avLst/>
@@ -5875,7 +5878,7 @@
         </p:nvSpPr>
         <p:spPr>
           <a:xfrm>
-            <a:off x="1097280" y="2496312"/>
+            <a:off x="1097280" y="2487168"/>
             <a:ext cx="3200400" cy="320040"/>
           </a:xfrm>
           <a:prstGeom prst="rect">
@@ -5898,14 +5901,14 @@
               </a:spcAft>
             </a:pPr>
             <a:r>
-              <a:rPr sz="1300" b="1">
+              <a:rPr sz="1250" b="1">
                 <a:solidFill>
                   <a:srgbClr val="10B981"/>
                 </a:solidFill>
                 <a:latin typeface="Hiragino Sans GB"/>
                 <a:ea typeface="Hiragino Sans GB"/>
               </a:rPr>
-              <a:t>诚实边界</a:t>
+              <a:t>② 子区间三等分</a:t>
             </a:r>
           </a:p>
         </p:txBody>
@@ -5918,7 +5921,7 @@
         </p:nvSpPr>
         <p:spPr>
           <a:xfrm>
-            <a:off x="4572000" y="2532888"/>
+            <a:off x="4572000" y="2505456"/>
             <a:ext cx="6675120" cy="365760"/>
           </a:xfrm>
           <a:prstGeom prst="rect">
@@ -5948,7 +5951,7 @@
                 <a:latin typeface="Hiragino Sans GB"/>
                 <a:ea typeface="Hiragino Sans GB"/>
               </a:rPr>
-              <a:t>滑点已做 7bp + 凸性情景 · 真实动量信号替换验证框架 · 三条局限逐条披露</a:t>
+              <a:t>收益排序三段一致（A≈B&gt;C），C 在震荡段卡玛 4.83 最高</a:t>
             </a:r>
           </a:p>
         </p:txBody>
@@ -5961,8 +5964,8 @@
         </p:nvSpPr>
         <p:spPr>
           <a:xfrm>
-            <a:off x="822960" y="3291840"/>
-            <a:ext cx="10607040" cy="731520"/>
+            <a:off x="822960" y="3236976"/>
+            <a:ext cx="10607040" cy="685800"/>
           </a:xfrm>
           <a:prstGeom prst="roundRect">
             <a:avLst>
@@ -6009,8 +6012,8 @@
         </p:nvSpPr>
         <p:spPr>
           <a:xfrm>
-            <a:off x="822960" y="3291840"/>
-            <a:ext cx="82296" cy="731520"/>
+            <a:off x="822960" y="3236976"/>
+            <a:ext cx="82296" cy="685800"/>
           </a:xfrm>
           <a:prstGeom prst="rect">
             <a:avLst/>
@@ -6053,7 +6056,7 @@
         </p:nvSpPr>
         <p:spPr>
           <a:xfrm>
-            <a:off x="1097280" y="3364992"/>
+            <a:off x="1097280" y="3328416"/>
             <a:ext cx="3200400" cy="320040"/>
           </a:xfrm>
           <a:prstGeom prst="rect">
@@ -6076,14 +6079,14 @@
               </a:spcAft>
             </a:pPr>
             <a:r>
-              <a:rPr sz="1300" b="1">
+              <a:rPr sz="1250" b="1">
                 <a:solidFill>
                   <a:srgbClr val="F97316"/>
                 </a:solidFill>
                 <a:latin typeface="Hiragino Sans GB"/>
                 <a:ea typeface="Hiragino Sans GB"/>
               </a:rPr>
-              <a:t>教学转化</a:t>
+              <a:t>③ 凸性冲击</a:t>
             </a:r>
           </a:p>
         </p:txBody>
@@ -6096,7 +6099,7 @@
         </p:nvSpPr>
         <p:spPr>
           <a:xfrm>
-            <a:off x="4572000" y="3401568"/>
+            <a:off x="4572000" y="3346704"/>
             <a:ext cx="6675120" cy="365760"/>
           </a:xfrm>
           <a:prstGeom prst="rect">
@@ -6126,7 +6129,7 @@
                 <a:latin typeface="Hiragino Sans GB"/>
                 <a:ea typeface="Hiragino Sans GB"/>
               </a:rPr>
-              <a:t>分层任务 · 典型错误引导 · 四维量规 · 前后测 · 交互式参数实验室</a:t>
+              <a:t>C 组卡玛 0.88 为 A/B（0.47/0.42）的两倍——低换手优势扩大</a:t>
             </a:r>
           </a:p>
         </p:txBody>
@@ -6139,8 +6142,8 @@
         </p:nvSpPr>
         <p:spPr>
           <a:xfrm>
-            <a:off x="822960" y="4160520"/>
-            <a:ext cx="10607040" cy="731520"/>
+            <a:off x="822960" y="4078224"/>
+            <a:ext cx="10607040" cy="685800"/>
           </a:xfrm>
           <a:prstGeom prst="roundRect">
             <a:avLst>
@@ -6187,8 +6190,186 @@
         </p:nvSpPr>
         <p:spPr>
           <a:xfrm>
-            <a:off x="822960" y="4160520"/>
-            <a:ext cx="82296" cy="731520"/>
+            <a:off x="822960" y="4078224"/>
+            <a:ext cx="82296" cy="685800"/>
+          </a:xfrm>
+          <a:prstGeom prst="rect">
+            <a:avLst/>
+          </a:prstGeom>
+          <a:solidFill>
+            <a:srgbClr val="F43F5E"/>
+          </a:solidFill>
+          <a:ln>
+            <a:noFill/>
+          </a:ln>
+          <a:effectLst/>
+        </p:spPr>
+        <p:style>
+          <a:lnRef idx="1">
+            <a:schemeClr val="accent1"/>
+          </a:lnRef>
+          <a:fillRef idx="3">
+            <a:schemeClr val="accent1"/>
+          </a:fillRef>
+          <a:effectRef idx="2">
+            <a:schemeClr val="accent1"/>
+          </a:effectRef>
+          <a:fontRef idx="minor">
+            <a:schemeClr val="lt1"/>
+          </a:fontRef>
+        </p:style>
+        <p:txBody>
+          <a:bodyPr rtlCol="0" anchor="ctr"/>
+          <a:lstStyle/>
+          <a:p>
+            <a:pPr algn="ctr"/>
+          </a:p>
+        </p:txBody>
+      </p:sp>
+      <p:sp>
+        <p:nvSpPr>
+          <p:cNvPr id="21" name="TextBox 20"/>
+          <p:cNvSpPr txBox="1"/>
+          <p:nvPr/>
+        </p:nvSpPr>
+        <p:spPr>
+          <a:xfrm>
+            <a:off x="1097280" y="4169664"/>
+            <a:ext cx="3200400" cy="320040"/>
+          </a:xfrm>
+          <a:prstGeom prst="rect">
+            <a:avLst/>
+          </a:prstGeom>
+          <a:noFill/>
+        </p:spPr>
+        <p:txBody>
+          <a:bodyPr wrap="square" anchor="t">
+            <a:spAutoFit/>
+          </a:bodyPr>
+          <a:lstStyle/>
+          <a:p>
+            <a:pPr algn="l">
+              <a:lnSpc>
+                <a:spcPct val="100000"/>
+              </a:lnSpc>
+              <a:spcAft>
+                <a:spcPts val="200"/>
+              </a:spcAft>
+            </a:pPr>
+            <a:r>
+              <a:rPr sz="1250" b="1">
+                <a:solidFill>
+                  <a:srgbClr val="F43F5E"/>
+                </a:solidFill>
+                <a:latin typeface="Hiragino Sans GB"/>
+                <a:ea typeface="Hiragino Sans GB"/>
+              </a:rPr>
+              <a:t>④ 滚动重估</a:t>
+            </a:r>
+          </a:p>
+        </p:txBody>
+      </p:sp>
+      <p:sp>
+        <p:nvSpPr>
+          <p:cNvPr id="22" name="TextBox 21"/>
+          <p:cNvSpPr txBox="1"/>
+          <p:nvPr/>
+        </p:nvSpPr>
+        <p:spPr>
+          <a:xfrm>
+            <a:off x="4572000" y="4187952"/>
+            <a:ext cx="6675120" cy="365760"/>
+          </a:xfrm>
+          <a:prstGeom prst="rect">
+            <a:avLst/>
+          </a:prstGeom>
+          <a:noFill/>
+        </p:spPr>
+        <p:txBody>
+          <a:bodyPr wrap="square" anchor="t">
+            <a:spAutoFit/>
+          </a:bodyPr>
+          <a:lstStyle/>
+          <a:p>
+            <a:pPr algn="l">
+              <a:lnSpc>
+                <a:spcPct val="100000"/>
+              </a:lnSpc>
+              <a:spcAft>
+                <a:spcPts val="200"/>
+              </a:spcAft>
+            </a:pPr>
+            <a:r>
+              <a:rPr sz="1050" b="0">
+                <a:solidFill>
+                  <a:srgbClr val="334155"/>
+                </a:solidFill>
+                <a:latin typeface="Hiragino Sans GB"/>
+                <a:ea typeface="Hiragino Sans GB"/>
+              </a:rPr>
+              <a:t>14.6%/0.92 低于静态 18.6%/1.19——保守的静态缩放反而更稳</a:t>
+            </a:r>
+          </a:p>
+        </p:txBody>
+      </p:sp>
+      <p:sp>
+        <p:nvSpPr>
+          <p:cNvPr id="23" name="Rounded Rectangle 22"/>
+          <p:cNvSpPr/>
+          <p:nvPr/>
+        </p:nvSpPr>
+        <p:spPr>
+          <a:xfrm>
+            <a:off x="822960" y="4919472"/>
+            <a:ext cx="10607040" cy="685800"/>
+          </a:xfrm>
+          <a:prstGeom prst="roundRect">
+            <a:avLst>
+              <a:gd name="adj" fmla="val 9000"/>
+            </a:avLst>
+          </a:prstGeom>
+          <a:solidFill>
+            <a:srgbClr val="FFFFFF"/>
+          </a:solidFill>
+          <a:ln w="12700">
+            <a:solidFill>
+              <a:srgbClr val="E2E8F0"/>
+            </a:solidFill>
+          </a:ln>
+          <a:effectLst/>
+        </p:spPr>
+        <p:style>
+          <a:lnRef idx="1">
+            <a:schemeClr val="accent1"/>
+          </a:lnRef>
+          <a:fillRef idx="3">
+            <a:schemeClr val="accent1"/>
+          </a:fillRef>
+          <a:effectRef idx="2">
+            <a:schemeClr val="accent1"/>
+          </a:effectRef>
+          <a:fontRef idx="minor">
+            <a:schemeClr val="lt1"/>
+          </a:fontRef>
+        </p:style>
+        <p:txBody>
+          <a:bodyPr rtlCol="0" anchor="ctr"/>
+          <a:lstStyle/>
+          <a:p>
+            <a:pPr algn="ctr"/>
+          </a:p>
+        </p:txBody>
+      </p:sp>
+      <p:sp>
+        <p:nvSpPr>
+          <p:cNvPr id="24" name="Rectangle 23"/>
+          <p:cNvSpPr/>
+          <p:nvPr/>
+        </p:nvSpPr>
+        <p:spPr>
+          <a:xfrm>
+            <a:off x="822960" y="4919472"/>
+            <a:ext cx="82296" cy="685800"/>
           </a:xfrm>
           <a:prstGeom prst="rect">
             <a:avLst/>
@@ -6225,13 +6406,13 @@
       </p:sp>
       <p:sp>
         <p:nvSpPr>
-          <p:cNvPr id="21" name="TextBox 20"/>
+          <p:cNvPr id="25" name="TextBox 24"/>
           <p:cNvSpPr txBox="1"/>
           <p:nvPr/>
         </p:nvSpPr>
         <p:spPr>
           <a:xfrm>
-            <a:off x="1097280" y="4233672"/>
+            <a:off x="1097280" y="5010912"/>
             <a:ext cx="3200400" cy="320040"/>
           </a:xfrm>
           <a:prstGeom prst="rect">
@@ -6254,27 +6435,27 @@
               </a:spcAft>
             </a:pPr>
             <a:r>
-              <a:rPr sz="1300" b="1">
+              <a:rPr sz="1250" b="1">
                 <a:solidFill>
                   <a:srgbClr val="7C3AED"/>
                 </a:solidFill>
                 <a:latin typeface="Hiragino Sans GB"/>
                 <a:ea typeface="Hiragino Sans GB"/>
               </a:rPr>
-              <a:t>可复现交付</a:t>
-            </a:r>
-          </a:p>
-        </p:txBody>
-      </p:sp>
-      <p:sp>
-        <p:nvSpPr>
-          <p:cNvPr id="22" name="TextBox 21"/>
+              <a:t>⑤ 真实信号替换</a:t>
+            </a:r>
+          </a:p>
+        </p:txBody>
+      </p:sp>
+      <p:sp>
+        <p:nvSpPr>
+          <p:cNvPr id="26" name="TextBox 25"/>
           <p:cNvSpPr txBox="1"/>
           <p:nvPr/>
         </p:nvSpPr>
         <p:spPr>
           <a:xfrm>
-            <a:off x="4572000" y="4270248"/>
+            <a:off x="4572000" y="5029200"/>
             <a:ext cx="6675120" cy="365760"/>
           </a:xfrm>
           <a:prstGeom prst="rect">
@@ -6304,14 +6485,14 @@
                 <a:latin typeface="Hiragino Sans GB"/>
                 <a:ea typeface="Hiragino Sans GB"/>
               </a:rPr>
-              <a:t>种子 20261029 · vx_verify 24/24 · 15 个结果 CSV · 47→56 单元 Notebook</a:t>
-            </a:r>
-          </a:p>
-        </p:txBody>
-      </p:sp>
-      <p:sp>
-        <p:nvSpPr>
-          <p:cNvPr id="23" name="Rounded Rectangle 22"/>
+              <a:t>20 日动量（命中率 48.7%）下 C 组回撤 -8.8% vs A -13.5%——框架成立</a:t>
+            </a:r>
+          </a:p>
+        </p:txBody>
+      </p:sp>
+      <p:sp>
+        <p:nvSpPr>
+          <p:cNvPr id="27" name="Rounded Rectangle 26"/>
           <p:cNvSpPr/>
           <p:nvPr/>
         </p:nvSpPr>
@@ -6326,7 +6507,7 @@
             </a:avLst>
           </a:prstGeom>
           <a:solidFill>
-            <a:srgbClr val="ECFDF5"/>
+            <a:srgbClr val="F5F3FF"/>
           </a:solidFill>
           <a:ln>
             <a:noFill/>
@@ -6357,7 +6538,7 @@
       </p:sp>
       <p:sp>
         <p:nvSpPr>
-          <p:cNvPr id="24" name="TextBox 23"/>
+          <p:cNvPr id="28" name="TextBox 27"/>
           <p:cNvSpPr txBox="1"/>
           <p:nvPr/>
         </p:nvSpPr>
@@ -6393,14 +6574,14 @@
                 <a:latin typeface="Hiragino Sans GB"/>
                 <a:ea typeface="Hiragino Sans GB"/>
               </a:rPr>
-              <a:t>自评 99.9/100：不是因为完美，而是因为敢于把不完美写出来</a:t>
-            </a:r>
-          </a:p>
-        </p:txBody>
-      </p:sp>
-      <p:sp>
-        <p:nvSpPr>
-          <p:cNvPr id="25" name="TextBox 24"/>
+              <a:t>把「赢」与「不赢」都写出来，才是稳健性检验的意义</a:t>
+            </a:r>
+          </a:p>
+        </p:txBody>
+      </p:sp>
+      <p:sp>
+        <p:nvSpPr>
+          <p:cNvPr id="29" name="TextBox 28"/>
           <p:cNvSpPr txBox="1"/>
           <p:nvPr/>
         </p:nvSpPr>
@@ -6431,19 +6612,19 @@
             <a:r>
               <a:rPr sz="1050" b="1">
                 <a:solidFill>
-                  <a:srgbClr val="10B981"/>
+                  <a:srgbClr val="7C3AED"/>
                 </a:solidFill>
                 <a:latin typeface="Hiragino Sans GB"/>
                 <a:ea typeface="Hiragino Sans GB"/>
               </a:rPr>
-              <a:t>两处各留 0.05 分边界缺口</a:t>
-            </a:r>
-          </a:p>
-        </p:txBody>
-      </p:sp>
-      <p:sp>
-        <p:nvSpPr>
-          <p:cNvPr id="26" name="TextBox 25"/>
+              <a:t>五项检验含两项自我否定</a:t>
+            </a:r>
+          </a:p>
+        </p:txBody>
+      </p:sp>
+      <p:sp>
+        <p:nvSpPr>
+          <p:cNvPr id="30" name="TextBox 29"/>
           <p:cNvSpPr txBox="1"/>
           <p:nvPr/>
         </p:nvSpPr>
@@ -6479,14 +6660,14 @@
                 <a:latin typeface="Hiragino Sans GB"/>
                 <a:ea typeface="Hiragino Sans GB"/>
               </a:rPr>
-              <a:t>AI 选股信号该配多大仓位？ · 决赛答辩 · 西安交通大学</a:t>
-            </a:r>
-          </a:p>
-        </p:txBody>
-      </p:sp>
-      <p:sp>
-        <p:nvSpPr>
-          <p:cNvPr id="27" name="TextBox 26"/>
+              <a:t>AI 选股信号该配多大仓位？ · 虚拟仿真实验教学案例 · 教学指导配套</a:t>
+            </a:r>
+          </a:p>
+        </p:txBody>
+      </p:sp>
+      <p:sp>
+        <p:nvSpPr>
+          <p:cNvPr id="31" name="TextBox 30"/>
           <p:cNvSpPr txBox="1"/>
           <p:nvPr/>
         </p:nvSpPr>
@@ -6517,12 +6698,12 @@
             <a:r>
               <a:rPr sz="1000" b="1">
                 <a:solidFill>
-                  <a:srgbClr val="10B981"/>
+                  <a:srgbClr val="7C3AED"/>
                 </a:solidFill>
                 <a:latin typeface="Hiragino Sans GB"/>
                 <a:ea typeface="Hiragino Sans GB"/>
               </a:rPr>
-              <a:t>11 / 12</a:t>
+              <a:t>11 / 15</a:t>
             </a:r>
           </a:p>
         </p:txBody>
@@ -6554,6 +6735,3949 @@
         <p:spPr>
           <a:xfrm>
             <a:off x="0" y="0"/>
+            <a:ext cx="12191695" cy="91440"/>
+          </a:xfrm>
+          <a:prstGeom prst="rect">
+            <a:avLst/>
+          </a:prstGeom>
+          <a:solidFill>
+            <a:srgbClr val="F43F5E"/>
+          </a:solidFill>
+          <a:ln>
+            <a:noFill/>
+          </a:ln>
+          <a:effectLst/>
+        </p:spPr>
+        <p:style>
+          <a:lnRef idx="1">
+            <a:schemeClr val="accent1"/>
+          </a:lnRef>
+          <a:fillRef idx="3">
+            <a:schemeClr val="accent1"/>
+          </a:fillRef>
+          <a:effectRef idx="2">
+            <a:schemeClr val="accent1"/>
+          </a:effectRef>
+          <a:fontRef idx="minor">
+            <a:schemeClr val="lt1"/>
+          </a:fontRef>
+        </p:style>
+        <p:txBody>
+          <a:bodyPr rtlCol="0" anchor="ctr"/>
+          <a:lstStyle/>
+          <a:p>
+            <a:pPr algn="ctr"/>
+          </a:p>
+        </p:txBody>
+      </p:sp>
+      <p:sp>
+        <p:nvSpPr>
+          <p:cNvPr id="3" name="Rectangle 2"/>
+          <p:cNvSpPr/>
+          <p:nvPr/>
+        </p:nvSpPr>
+        <p:spPr>
+          <a:xfrm>
+            <a:off x="548640" y="457200"/>
+            <a:ext cx="91440" cy="822960"/>
+          </a:xfrm>
+          <a:prstGeom prst="rect">
+            <a:avLst/>
+          </a:prstGeom>
+          <a:solidFill>
+            <a:srgbClr val="F43F5E"/>
+          </a:solidFill>
+          <a:ln>
+            <a:noFill/>
+          </a:ln>
+          <a:effectLst/>
+        </p:spPr>
+        <p:style>
+          <a:lnRef idx="1">
+            <a:schemeClr val="accent1"/>
+          </a:lnRef>
+          <a:fillRef idx="3">
+            <a:schemeClr val="accent1"/>
+          </a:fillRef>
+          <a:effectRef idx="2">
+            <a:schemeClr val="accent1"/>
+          </a:effectRef>
+          <a:fontRef idx="minor">
+            <a:schemeClr val="lt1"/>
+          </a:fontRef>
+        </p:style>
+        <p:txBody>
+          <a:bodyPr rtlCol="0" anchor="ctr"/>
+          <a:lstStyle/>
+          <a:p>
+            <a:pPr algn="ctr"/>
+          </a:p>
+        </p:txBody>
+      </p:sp>
+      <p:sp>
+        <p:nvSpPr>
+          <p:cNvPr id="4" name="TextBox 3"/>
+          <p:cNvSpPr txBox="1"/>
+          <p:nvPr/>
+        </p:nvSpPr>
+        <p:spPr>
+          <a:xfrm>
+            <a:off x="822960" y="365760"/>
+            <a:ext cx="8961120" cy="274320"/>
+          </a:xfrm>
+          <a:prstGeom prst="rect">
+            <a:avLst/>
+          </a:prstGeom>
+          <a:noFill/>
+        </p:spPr>
+        <p:txBody>
+          <a:bodyPr wrap="square" anchor="t">
+            <a:spAutoFit/>
+          </a:bodyPr>
+          <a:lstStyle/>
+          <a:p>
+            <a:pPr algn="l">
+              <a:lnSpc>
+                <a:spcPct val="100000"/>
+              </a:lnSpc>
+              <a:spcAft>
+                <a:spcPts val="200"/>
+              </a:spcAft>
+            </a:pPr>
+            <a:r>
+              <a:rPr sz="1200" b="0">
+                <a:solidFill>
+                  <a:srgbClr val="64748B"/>
+                </a:solidFill>
+                <a:latin typeface="Hiragino Sans GB"/>
+                <a:ea typeface="Hiragino Sans GB"/>
+              </a:rPr>
+              <a:t>总收 · 结论</a:t>
+            </a:r>
+          </a:p>
+        </p:txBody>
+      </p:sp>
+      <p:sp>
+        <p:nvSpPr>
+          <p:cNvPr id="5" name="TextBox 4"/>
+          <p:cNvSpPr txBox="1"/>
+          <p:nvPr/>
+        </p:nvSpPr>
+        <p:spPr>
+          <a:xfrm>
+            <a:off x="822960" y="685800"/>
+            <a:ext cx="10607040" cy="548640"/>
+          </a:xfrm>
+          <a:prstGeom prst="rect">
+            <a:avLst/>
+          </a:prstGeom>
+          <a:noFill/>
+        </p:spPr>
+        <p:txBody>
+          <a:bodyPr wrap="square" anchor="t">
+            <a:spAutoFit/>
+          </a:bodyPr>
+          <a:lstStyle/>
+          <a:p>
+            <a:pPr algn="l">
+              <a:lnSpc>
+                <a:spcPct val="100000"/>
+              </a:lnSpc>
+              <a:spcAft>
+                <a:spcPts val="200"/>
+              </a:spcAft>
+            </a:pPr>
+            <a:r>
+              <a:rPr sz="2200" b="1">
+                <a:solidFill>
+                  <a:srgbClr val="0F172A"/>
+                </a:solidFill>
+                <a:latin typeface="Hiragino Sans GB"/>
+                <a:ea typeface="Hiragino Sans GB"/>
+              </a:rPr>
+              <a:t>结论与自我修正</a:t>
+            </a:r>
+          </a:p>
+        </p:txBody>
+      </p:sp>
+      <p:sp>
+        <p:nvSpPr>
+          <p:cNvPr id="6" name="TextBox 5"/>
+          <p:cNvSpPr txBox="1"/>
+          <p:nvPr/>
+        </p:nvSpPr>
+        <p:spPr>
+          <a:xfrm>
+            <a:off x="822960" y="1261872"/>
+            <a:ext cx="10881360" cy="320040"/>
+          </a:xfrm>
+          <a:prstGeom prst="rect">
+            <a:avLst/>
+          </a:prstGeom>
+          <a:noFill/>
+        </p:spPr>
+        <p:txBody>
+          <a:bodyPr wrap="square" anchor="t">
+            <a:spAutoFit/>
+          </a:bodyPr>
+          <a:lstStyle/>
+          <a:p>
+            <a:pPr algn="l">
+              <a:lnSpc>
+                <a:spcPct val="100000"/>
+              </a:lnSpc>
+              <a:spcAft>
+                <a:spcPts val="200"/>
+              </a:spcAft>
+            </a:pPr>
+            <a:r>
+              <a:rPr sz="1150" b="0">
+                <a:solidFill>
+                  <a:srgbClr val="64748B"/>
+                </a:solidFill>
+                <a:latin typeface="Hiragino Sans GB"/>
+                <a:ea typeface="Hiragino Sans GB"/>
+              </a:rPr>
+              <a:t>三层排序 + 五项可验证证据 + 六项创新</a:t>
+            </a:r>
+          </a:p>
+        </p:txBody>
+      </p:sp>
+      <p:sp>
+        <p:nvSpPr>
+          <p:cNvPr id="7" name="Rounded Rectangle 6"/>
+          <p:cNvSpPr/>
+          <p:nvPr/>
+        </p:nvSpPr>
+        <p:spPr>
+          <a:xfrm>
+            <a:off x="822960" y="1554480"/>
+            <a:ext cx="10607040" cy="594360"/>
+          </a:xfrm>
+          <a:prstGeom prst="roundRect">
+            <a:avLst>
+              <a:gd name="adj" fmla="val 9000"/>
+            </a:avLst>
+          </a:prstGeom>
+          <a:solidFill>
+            <a:srgbClr val="FFFFFF"/>
+          </a:solidFill>
+          <a:ln w="12700">
+            <a:solidFill>
+              <a:srgbClr val="E2E8F0"/>
+            </a:solidFill>
+          </a:ln>
+          <a:effectLst/>
+        </p:spPr>
+        <p:style>
+          <a:lnRef idx="1">
+            <a:schemeClr val="accent1"/>
+          </a:lnRef>
+          <a:fillRef idx="3">
+            <a:schemeClr val="accent1"/>
+          </a:fillRef>
+          <a:effectRef idx="2">
+            <a:schemeClr val="accent1"/>
+          </a:effectRef>
+          <a:fontRef idx="minor">
+            <a:schemeClr val="lt1"/>
+          </a:fontRef>
+        </p:style>
+        <p:txBody>
+          <a:bodyPr rtlCol="0" anchor="ctr"/>
+          <a:lstStyle/>
+          <a:p>
+            <a:pPr algn="ctr"/>
+          </a:p>
+        </p:txBody>
+      </p:sp>
+      <p:sp>
+        <p:nvSpPr>
+          <p:cNvPr id="8" name="Rectangle 7"/>
+          <p:cNvSpPr/>
+          <p:nvPr/>
+        </p:nvSpPr>
+        <p:spPr>
+          <a:xfrm>
+            <a:off x="822960" y="1554480"/>
+            <a:ext cx="82296" cy="594360"/>
+          </a:xfrm>
+          <a:prstGeom prst="rect">
+            <a:avLst/>
+          </a:prstGeom>
+          <a:solidFill>
+            <a:srgbClr val="2563EB"/>
+          </a:solidFill>
+          <a:ln>
+            <a:noFill/>
+          </a:ln>
+          <a:effectLst/>
+        </p:spPr>
+        <p:style>
+          <a:lnRef idx="1">
+            <a:schemeClr val="accent1"/>
+          </a:lnRef>
+          <a:fillRef idx="3">
+            <a:schemeClr val="accent1"/>
+          </a:fillRef>
+          <a:effectRef idx="2">
+            <a:schemeClr val="accent1"/>
+          </a:effectRef>
+          <a:fontRef idx="minor">
+            <a:schemeClr val="lt1"/>
+          </a:fontRef>
+        </p:style>
+        <p:txBody>
+          <a:bodyPr rtlCol="0" anchor="ctr"/>
+          <a:lstStyle/>
+          <a:p>
+            <a:pPr algn="ctr"/>
+          </a:p>
+        </p:txBody>
+      </p:sp>
+      <p:sp>
+        <p:nvSpPr>
+          <p:cNvPr id="9" name="TextBox 8"/>
+          <p:cNvSpPr txBox="1"/>
+          <p:nvPr/>
+        </p:nvSpPr>
+        <p:spPr>
+          <a:xfrm>
+            <a:off x="1097280" y="1645920"/>
+            <a:ext cx="2011680" cy="320040"/>
+          </a:xfrm>
+          <a:prstGeom prst="rect">
+            <a:avLst/>
+          </a:prstGeom>
+          <a:noFill/>
+        </p:spPr>
+        <p:txBody>
+          <a:bodyPr wrap="square" anchor="t">
+            <a:spAutoFit/>
+          </a:bodyPr>
+          <a:lstStyle/>
+          <a:p>
+            <a:pPr algn="l">
+              <a:lnSpc>
+                <a:spcPct val="100000"/>
+              </a:lnSpc>
+              <a:spcAft>
+                <a:spcPts val="200"/>
+              </a:spcAft>
+            </a:pPr>
+            <a:r>
+              <a:rPr sz="1200" b="1">
+                <a:solidFill>
+                  <a:srgbClr val="2563EB"/>
+                </a:solidFill>
+                <a:latin typeface="Hiragino Sans GB"/>
+                <a:ea typeface="Hiragino Sans GB"/>
+              </a:rPr>
+              <a:t>结论一</a:t>
+            </a:r>
+          </a:p>
+        </p:txBody>
+      </p:sp>
+      <p:sp>
+        <p:nvSpPr>
+          <p:cNvPr id="10" name="TextBox 9"/>
+          <p:cNvSpPr txBox="1"/>
+          <p:nvPr/>
+        </p:nvSpPr>
+        <p:spPr>
+          <a:xfrm>
+            <a:off x="3291840" y="1645920"/>
+            <a:ext cx="8046720" cy="320040"/>
+          </a:xfrm>
+          <a:prstGeom prst="rect">
+            <a:avLst/>
+          </a:prstGeom>
+          <a:noFill/>
+        </p:spPr>
+        <p:txBody>
+          <a:bodyPr wrap="square" anchor="t">
+            <a:spAutoFit/>
+          </a:bodyPr>
+          <a:lstStyle/>
+          <a:p>
+            <a:pPr algn="l">
+              <a:lnSpc>
+                <a:spcPct val="100000"/>
+              </a:lnSpc>
+              <a:spcAft>
+                <a:spcPts val="200"/>
+              </a:spcAft>
+            </a:pPr>
+            <a:r>
+              <a:rPr sz="1150" b="0">
+                <a:solidFill>
+                  <a:srgbClr val="334155"/>
+                </a:solidFill>
+                <a:latin typeface="Hiragino Sans GB"/>
+                <a:ea typeface="Hiragino Sans GB"/>
+              </a:rPr>
+              <a:t>预测力 ≠ 盈利能力，分水岭在转化规则</a:t>
+            </a:r>
+          </a:p>
+        </p:txBody>
+      </p:sp>
+      <p:sp>
+        <p:nvSpPr>
+          <p:cNvPr id="11" name="Rounded Rectangle 10"/>
+          <p:cNvSpPr/>
+          <p:nvPr/>
+        </p:nvSpPr>
+        <p:spPr>
+          <a:xfrm>
+            <a:off x="822960" y="2304288"/>
+            <a:ext cx="10607040" cy="594360"/>
+          </a:xfrm>
+          <a:prstGeom prst="roundRect">
+            <a:avLst>
+              <a:gd name="adj" fmla="val 9000"/>
+            </a:avLst>
+          </a:prstGeom>
+          <a:solidFill>
+            <a:srgbClr val="FFFFFF"/>
+          </a:solidFill>
+          <a:ln w="12700">
+            <a:solidFill>
+              <a:srgbClr val="E2E8F0"/>
+            </a:solidFill>
+          </a:ln>
+          <a:effectLst/>
+        </p:spPr>
+        <p:style>
+          <a:lnRef idx="1">
+            <a:schemeClr val="accent1"/>
+          </a:lnRef>
+          <a:fillRef idx="3">
+            <a:schemeClr val="accent1"/>
+          </a:fillRef>
+          <a:effectRef idx="2">
+            <a:schemeClr val="accent1"/>
+          </a:effectRef>
+          <a:fontRef idx="minor">
+            <a:schemeClr val="lt1"/>
+          </a:fontRef>
+        </p:style>
+        <p:txBody>
+          <a:bodyPr rtlCol="0" anchor="ctr"/>
+          <a:lstStyle/>
+          <a:p>
+            <a:pPr algn="ctr"/>
+          </a:p>
+        </p:txBody>
+      </p:sp>
+      <p:sp>
+        <p:nvSpPr>
+          <p:cNvPr id="12" name="Rectangle 11"/>
+          <p:cNvSpPr/>
+          <p:nvPr/>
+        </p:nvSpPr>
+        <p:spPr>
+          <a:xfrm>
+            <a:off x="822960" y="2304288"/>
+            <a:ext cx="82296" cy="594360"/>
+          </a:xfrm>
+          <a:prstGeom prst="rect">
+            <a:avLst/>
+          </a:prstGeom>
+          <a:solidFill>
+            <a:srgbClr val="F97316"/>
+          </a:solidFill>
+          <a:ln>
+            <a:noFill/>
+          </a:ln>
+          <a:effectLst/>
+        </p:spPr>
+        <p:style>
+          <a:lnRef idx="1">
+            <a:schemeClr val="accent1"/>
+          </a:lnRef>
+          <a:fillRef idx="3">
+            <a:schemeClr val="accent1"/>
+          </a:fillRef>
+          <a:effectRef idx="2">
+            <a:schemeClr val="accent1"/>
+          </a:effectRef>
+          <a:fontRef idx="minor">
+            <a:schemeClr val="lt1"/>
+          </a:fontRef>
+        </p:style>
+        <p:txBody>
+          <a:bodyPr rtlCol="0" anchor="ctr"/>
+          <a:lstStyle/>
+          <a:p>
+            <a:pPr algn="ctr"/>
+          </a:p>
+        </p:txBody>
+      </p:sp>
+      <p:sp>
+        <p:nvSpPr>
+          <p:cNvPr id="13" name="TextBox 12"/>
+          <p:cNvSpPr txBox="1"/>
+          <p:nvPr/>
+        </p:nvSpPr>
+        <p:spPr>
+          <a:xfrm>
+            <a:off x="1097280" y="2395728"/>
+            <a:ext cx="2011680" cy="320040"/>
+          </a:xfrm>
+          <a:prstGeom prst="rect">
+            <a:avLst/>
+          </a:prstGeom>
+          <a:noFill/>
+        </p:spPr>
+        <p:txBody>
+          <a:bodyPr wrap="square" anchor="t">
+            <a:spAutoFit/>
+          </a:bodyPr>
+          <a:lstStyle/>
+          <a:p>
+            <a:pPr algn="l">
+              <a:lnSpc>
+                <a:spcPct val="100000"/>
+              </a:lnSpc>
+              <a:spcAft>
+                <a:spcPts val="200"/>
+              </a:spcAft>
+            </a:pPr>
+            <a:r>
+              <a:rPr sz="1200" b="1">
+                <a:solidFill>
+                  <a:srgbClr val="F97316"/>
+                </a:solidFill>
+                <a:latin typeface="Hiragino Sans GB"/>
+                <a:ea typeface="Hiragino Sans GB"/>
+              </a:rPr>
+              <a:t>结论二</a:t>
+            </a:r>
+          </a:p>
+        </p:txBody>
+      </p:sp>
+      <p:sp>
+        <p:nvSpPr>
+          <p:cNvPr id="14" name="TextBox 13"/>
+          <p:cNvSpPr txBox="1"/>
+          <p:nvPr/>
+        </p:nvSpPr>
+        <p:spPr>
+          <a:xfrm>
+            <a:off x="3291840" y="2395728"/>
+            <a:ext cx="8046720" cy="320040"/>
+          </a:xfrm>
+          <a:prstGeom prst="rect">
+            <a:avLst/>
+          </a:prstGeom>
+          <a:noFill/>
+        </p:spPr>
+        <p:txBody>
+          <a:bodyPr wrap="square" anchor="t">
+            <a:spAutoFit/>
+          </a:bodyPr>
+          <a:lstStyle/>
+          <a:p>
+            <a:pPr algn="l">
+              <a:lnSpc>
+                <a:spcPct val="100000"/>
+              </a:lnSpc>
+              <a:spcAft>
+                <a:spcPts val="200"/>
+              </a:spcAft>
+            </a:pPr>
+            <a:r>
+              <a:rPr sz="1150" b="0">
+                <a:solidFill>
+                  <a:srgbClr val="334155"/>
+                </a:solidFill>
+                <a:latin typeface="Hiragino Sans GB"/>
+                <a:ea typeface="Hiragino Sans GB"/>
+              </a:rPr>
+              <a:t>交易成本是仓位决策的一等公民（8.8% vs 4.3%）</a:t>
+            </a:r>
+          </a:p>
+        </p:txBody>
+      </p:sp>
+      <p:sp>
+        <p:nvSpPr>
+          <p:cNvPr id="15" name="Rounded Rectangle 14"/>
+          <p:cNvSpPr/>
+          <p:nvPr/>
+        </p:nvSpPr>
+        <p:spPr>
+          <a:xfrm>
+            <a:off x="822960" y="3054096"/>
+            <a:ext cx="10607040" cy="594360"/>
+          </a:xfrm>
+          <a:prstGeom prst="roundRect">
+            <a:avLst>
+              <a:gd name="adj" fmla="val 9000"/>
+            </a:avLst>
+          </a:prstGeom>
+          <a:solidFill>
+            <a:srgbClr val="FFFFFF"/>
+          </a:solidFill>
+          <a:ln w="12700">
+            <a:solidFill>
+              <a:srgbClr val="E2E8F0"/>
+            </a:solidFill>
+          </a:ln>
+          <a:effectLst/>
+        </p:spPr>
+        <p:style>
+          <a:lnRef idx="1">
+            <a:schemeClr val="accent1"/>
+          </a:lnRef>
+          <a:fillRef idx="3">
+            <a:schemeClr val="accent1"/>
+          </a:fillRef>
+          <a:effectRef idx="2">
+            <a:schemeClr val="accent1"/>
+          </a:effectRef>
+          <a:fontRef idx="minor">
+            <a:schemeClr val="lt1"/>
+          </a:fontRef>
+        </p:style>
+        <p:txBody>
+          <a:bodyPr rtlCol="0" anchor="ctr"/>
+          <a:lstStyle/>
+          <a:p>
+            <a:pPr algn="ctr"/>
+          </a:p>
+        </p:txBody>
+      </p:sp>
+      <p:sp>
+        <p:nvSpPr>
+          <p:cNvPr id="16" name="Rectangle 15"/>
+          <p:cNvSpPr/>
+          <p:nvPr/>
+        </p:nvSpPr>
+        <p:spPr>
+          <a:xfrm>
+            <a:off x="822960" y="3054096"/>
+            <a:ext cx="82296" cy="594360"/>
+          </a:xfrm>
+          <a:prstGeom prst="rect">
+            <a:avLst/>
+          </a:prstGeom>
+          <a:solidFill>
+            <a:srgbClr val="10B981"/>
+          </a:solidFill>
+          <a:ln>
+            <a:noFill/>
+          </a:ln>
+          <a:effectLst/>
+        </p:spPr>
+        <p:style>
+          <a:lnRef idx="1">
+            <a:schemeClr val="accent1"/>
+          </a:lnRef>
+          <a:fillRef idx="3">
+            <a:schemeClr val="accent1"/>
+          </a:fillRef>
+          <a:effectRef idx="2">
+            <a:schemeClr val="accent1"/>
+          </a:effectRef>
+          <a:fontRef idx="minor">
+            <a:schemeClr val="lt1"/>
+          </a:fontRef>
+        </p:style>
+        <p:txBody>
+          <a:bodyPr rtlCol="0" anchor="ctr"/>
+          <a:lstStyle/>
+          <a:p>
+            <a:pPr algn="ctr"/>
+          </a:p>
+        </p:txBody>
+      </p:sp>
+      <p:sp>
+        <p:nvSpPr>
+          <p:cNvPr id="17" name="TextBox 16"/>
+          <p:cNvSpPr txBox="1"/>
+          <p:nvPr/>
+        </p:nvSpPr>
+        <p:spPr>
+          <a:xfrm>
+            <a:off x="1097280" y="3145536"/>
+            <a:ext cx="2011680" cy="320040"/>
+          </a:xfrm>
+          <a:prstGeom prst="rect">
+            <a:avLst/>
+          </a:prstGeom>
+          <a:noFill/>
+        </p:spPr>
+        <p:txBody>
+          <a:bodyPr wrap="square" anchor="t">
+            <a:spAutoFit/>
+          </a:bodyPr>
+          <a:lstStyle/>
+          <a:p>
+            <a:pPr algn="l">
+              <a:lnSpc>
+                <a:spcPct val="100000"/>
+              </a:lnSpc>
+              <a:spcAft>
+                <a:spcPts val="200"/>
+              </a:spcAft>
+            </a:pPr>
+            <a:r>
+              <a:rPr sz="1200" b="1">
+                <a:solidFill>
+                  <a:srgbClr val="10B981"/>
+                </a:solidFill>
+                <a:latin typeface="Hiragino Sans GB"/>
+                <a:ea typeface="Hiragino Sans GB"/>
+              </a:rPr>
+              <a:t>结论三</a:t>
+            </a:r>
+          </a:p>
+        </p:txBody>
+      </p:sp>
+      <p:sp>
+        <p:nvSpPr>
+          <p:cNvPr id="18" name="TextBox 17"/>
+          <p:cNvSpPr txBox="1"/>
+          <p:nvPr/>
+        </p:nvSpPr>
+        <p:spPr>
+          <a:xfrm>
+            <a:off x="3291840" y="3145536"/>
+            <a:ext cx="8046720" cy="320040"/>
+          </a:xfrm>
+          <a:prstGeom prst="rect">
+            <a:avLst/>
+          </a:prstGeom>
+          <a:noFill/>
+        </p:spPr>
+        <p:txBody>
+          <a:bodyPr wrap="square" anchor="t">
+            <a:spAutoFit/>
+          </a:bodyPr>
+          <a:lstStyle/>
+          <a:p>
+            <a:pPr algn="l">
+              <a:lnSpc>
+                <a:spcPct val="100000"/>
+              </a:lnSpc>
+              <a:spcAft>
+                <a:spcPts val="200"/>
+              </a:spcAft>
+            </a:pPr>
+            <a:r>
+              <a:rPr sz="1150" b="0">
+                <a:solidFill>
+                  <a:srgbClr val="334155"/>
+                </a:solidFill>
+                <a:latin typeface="Hiragino Sans GB"/>
+                <a:ea typeface="Hiragino Sans GB"/>
+              </a:rPr>
+              <a:t>置信度校准失败不能驱动仓位（0.871 vs 54%）</a:t>
+            </a:r>
+          </a:p>
+        </p:txBody>
+      </p:sp>
+      <p:sp>
+        <p:nvSpPr>
+          <p:cNvPr id="19" name="Rounded Rectangle 18"/>
+          <p:cNvSpPr/>
+          <p:nvPr/>
+        </p:nvSpPr>
+        <p:spPr>
+          <a:xfrm>
+            <a:off x="822960" y="3803904"/>
+            <a:ext cx="10607040" cy="594360"/>
+          </a:xfrm>
+          <a:prstGeom prst="roundRect">
+            <a:avLst>
+              <a:gd name="adj" fmla="val 9000"/>
+            </a:avLst>
+          </a:prstGeom>
+          <a:solidFill>
+            <a:srgbClr val="FFFFFF"/>
+          </a:solidFill>
+          <a:ln w="12700">
+            <a:solidFill>
+              <a:srgbClr val="E2E8F0"/>
+            </a:solidFill>
+          </a:ln>
+          <a:effectLst/>
+        </p:spPr>
+        <p:style>
+          <a:lnRef idx="1">
+            <a:schemeClr val="accent1"/>
+          </a:lnRef>
+          <a:fillRef idx="3">
+            <a:schemeClr val="accent1"/>
+          </a:fillRef>
+          <a:effectRef idx="2">
+            <a:schemeClr val="accent1"/>
+          </a:effectRef>
+          <a:fontRef idx="minor">
+            <a:schemeClr val="lt1"/>
+          </a:fontRef>
+        </p:style>
+        <p:txBody>
+          <a:bodyPr rtlCol="0" anchor="ctr"/>
+          <a:lstStyle/>
+          <a:p>
+            <a:pPr algn="ctr"/>
+          </a:p>
+        </p:txBody>
+      </p:sp>
+      <p:sp>
+        <p:nvSpPr>
+          <p:cNvPr id="20" name="Rectangle 19"/>
+          <p:cNvSpPr/>
+          <p:nvPr/>
+        </p:nvSpPr>
+        <p:spPr>
+          <a:xfrm>
+            <a:off x="822960" y="3803904"/>
+            <a:ext cx="82296" cy="594360"/>
+          </a:xfrm>
+          <a:prstGeom prst="rect">
+            <a:avLst/>
+          </a:prstGeom>
+          <a:solidFill>
+            <a:srgbClr val="7C3AED"/>
+          </a:solidFill>
+          <a:ln>
+            <a:noFill/>
+          </a:ln>
+          <a:effectLst/>
+        </p:spPr>
+        <p:style>
+          <a:lnRef idx="1">
+            <a:schemeClr val="accent1"/>
+          </a:lnRef>
+          <a:fillRef idx="3">
+            <a:schemeClr val="accent1"/>
+          </a:fillRef>
+          <a:effectRef idx="2">
+            <a:schemeClr val="accent1"/>
+          </a:effectRef>
+          <a:fontRef idx="minor">
+            <a:schemeClr val="lt1"/>
+          </a:fontRef>
+        </p:style>
+        <p:txBody>
+          <a:bodyPr rtlCol="0" anchor="ctr"/>
+          <a:lstStyle/>
+          <a:p>
+            <a:pPr algn="ctr"/>
+          </a:p>
+        </p:txBody>
+      </p:sp>
+      <p:sp>
+        <p:nvSpPr>
+          <p:cNvPr id="21" name="TextBox 20"/>
+          <p:cNvSpPr txBox="1"/>
+          <p:nvPr/>
+        </p:nvSpPr>
+        <p:spPr>
+          <a:xfrm>
+            <a:off x="1097280" y="3895344"/>
+            <a:ext cx="2011680" cy="320040"/>
+          </a:xfrm>
+          <a:prstGeom prst="rect">
+            <a:avLst/>
+          </a:prstGeom>
+          <a:noFill/>
+        </p:spPr>
+        <p:txBody>
+          <a:bodyPr wrap="square" anchor="t">
+            <a:spAutoFit/>
+          </a:bodyPr>
+          <a:lstStyle/>
+          <a:p>
+            <a:pPr algn="l">
+              <a:lnSpc>
+                <a:spcPct val="100000"/>
+              </a:lnSpc>
+              <a:spcAft>
+                <a:spcPts val="200"/>
+              </a:spcAft>
+            </a:pPr>
+            <a:r>
+              <a:rPr sz="1200" b="1">
+                <a:solidFill>
+                  <a:srgbClr val="7C3AED"/>
+                </a:solidFill>
+                <a:latin typeface="Hiragino Sans GB"/>
+                <a:ea typeface="Hiragino Sans GB"/>
+              </a:rPr>
+              <a:t>结论四</a:t>
+            </a:r>
+          </a:p>
+        </p:txBody>
+      </p:sp>
+      <p:sp>
+        <p:nvSpPr>
+          <p:cNvPr id="22" name="TextBox 21"/>
+          <p:cNvSpPr txBox="1"/>
+          <p:nvPr/>
+        </p:nvSpPr>
+        <p:spPr>
+          <a:xfrm>
+            <a:off x="3291840" y="3895344"/>
+            <a:ext cx="8046720" cy="320040"/>
+          </a:xfrm>
+          <a:prstGeom prst="rect">
+            <a:avLst/>
+          </a:prstGeom>
+          <a:noFill/>
+        </p:spPr>
+        <p:txBody>
+          <a:bodyPr wrap="square" anchor="t">
+            <a:spAutoFit/>
+          </a:bodyPr>
+          <a:lstStyle/>
+          <a:p>
+            <a:pPr algn="l">
+              <a:lnSpc>
+                <a:spcPct val="100000"/>
+              </a:lnSpc>
+              <a:spcAft>
+                <a:spcPts val="200"/>
+              </a:spcAft>
+            </a:pPr>
+            <a:r>
+              <a:rPr sz="1150" b="0">
+                <a:solidFill>
+                  <a:srgbClr val="334155"/>
+                </a:solidFill>
+                <a:latin typeface="Hiragino Sans GB"/>
+                <a:ea typeface="Hiragino Sans GB"/>
+              </a:rPr>
+              <a:t>平均敞口是第一杠杆：敞口＞分散度＞触发干预</a:t>
+            </a:r>
+          </a:p>
+        </p:txBody>
+      </p:sp>
+      <p:sp>
+        <p:nvSpPr>
+          <p:cNvPr id="23" name="Rounded Rectangle 22"/>
+          <p:cNvSpPr/>
+          <p:nvPr/>
+        </p:nvSpPr>
+        <p:spPr>
+          <a:xfrm>
+            <a:off x="822960" y="4553712"/>
+            <a:ext cx="10607040" cy="594360"/>
+          </a:xfrm>
+          <a:prstGeom prst="roundRect">
+            <a:avLst>
+              <a:gd name="adj" fmla="val 9000"/>
+            </a:avLst>
+          </a:prstGeom>
+          <a:solidFill>
+            <a:srgbClr val="FFFFFF"/>
+          </a:solidFill>
+          <a:ln w="12700">
+            <a:solidFill>
+              <a:srgbClr val="E2E8F0"/>
+            </a:solidFill>
+          </a:ln>
+          <a:effectLst/>
+        </p:spPr>
+        <p:style>
+          <a:lnRef idx="1">
+            <a:schemeClr val="accent1"/>
+          </a:lnRef>
+          <a:fillRef idx="3">
+            <a:schemeClr val="accent1"/>
+          </a:fillRef>
+          <a:effectRef idx="2">
+            <a:schemeClr val="accent1"/>
+          </a:effectRef>
+          <a:fontRef idx="minor">
+            <a:schemeClr val="lt1"/>
+          </a:fontRef>
+        </p:style>
+        <p:txBody>
+          <a:bodyPr rtlCol="0" anchor="ctr"/>
+          <a:lstStyle/>
+          <a:p>
+            <a:pPr algn="ctr"/>
+          </a:p>
+        </p:txBody>
+      </p:sp>
+      <p:sp>
+        <p:nvSpPr>
+          <p:cNvPr id="24" name="Rectangle 23"/>
+          <p:cNvSpPr/>
+          <p:nvPr/>
+        </p:nvSpPr>
+        <p:spPr>
+          <a:xfrm>
+            <a:off x="822960" y="4553712"/>
+            <a:ext cx="82296" cy="594360"/>
+          </a:xfrm>
+          <a:prstGeom prst="rect">
+            <a:avLst/>
+          </a:prstGeom>
+          <a:solidFill>
+            <a:srgbClr val="F43F5E"/>
+          </a:solidFill>
+          <a:ln>
+            <a:noFill/>
+          </a:ln>
+          <a:effectLst/>
+        </p:spPr>
+        <p:style>
+          <a:lnRef idx="1">
+            <a:schemeClr val="accent1"/>
+          </a:lnRef>
+          <a:fillRef idx="3">
+            <a:schemeClr val="accent1"/>
+          </a:fillRef>
+          <a:effectRef idx="2">
+            <a:schemeClr val="accent1"/>
+          </a:effectRef>
+          <a:fontRef idx="minor">
+            <a:schemeClr val="lt1"/>
+          </a:fontRef>
+        </p:style>
+        <p:txBody>
+          <a:bodyPr rtlCol="0" anchor="ctr"/>
+          <a:lstStyle/>
+          <a:p>
+            <a:pPr algn="ctr"/>
+          </a:p>
+        </p:txBody>
+      </p:sp>
+      <p:sp>
+        <p:nvSpPr>
+          <p:cNvPr id="25" name="TextBox 24"/>
+          <p:cNvSpPr txBox="1"/>
+          <p:nvPr/>
+        </p:nvSpPr>
+        <p:spPr>
+          <a:xfrm>
+            <a:off x="1097280" y="4645152"/>
+            <a:ext cx="2011680" cy="320040"/>
+          </a:xfrm>
+          <a:prstGeom prst="rect">
+            <a:avLst/>
+          </a:prstGeom>
+          <a:noFill/>
+        </p:spPr>
+        <p:txBody>
+          <a:bodyPr wrap="square" anchor="t">
+            <a:spAutoFit/>
+          </a:bodyPr>
+          <a:lstStyle/>
+          <a:p>
+            <a:pPr algn="l">
+              <a:lnSpc>
+                <a:spcPct val="100000"/>
+              </a:lnSpc>
+              <a:spcAft>
+                <a:spcPts val="200"/>
+              </a:spcAft>
+            </a:pPr>
+            <a:r>
+              <a:rPr sz="1200" b="1">
+                <a:solidFill>
+                  <a:srgbClr val="F43F5E"/>
+                </a:solidFill>
+                <a:latin typeface="Hiragino Sans GB"/>
+                <a:ea typeface="Hiragino Sans GB"/>
+              </a:rPr>
+              <a:t>结论五</a:t>
+            </a:r>
+          </a:p>
+        </p:txBody>
+      </p:sp>
+      <p:sp>
+        <p:nvSpPr>
+          <p:cNvPr id="26" name="TextBox 25"/>
+          <p:cNvSpPr txBox="1"/>
+          <p:nvPr/>
+        </p:nvSpPr>
+        <p:spPr>
+          <a:xfrm>
+            <a:off x="3291840" y="4645152"/>
+            <a:ext cx="8046720" cy="320040"/>
+          </a:xfrm>
+          <a:prstGeom prst="rect">
+            <a:avLst/>
+          </a:prstGeom>
+          <a:noFill/>
+        </p:spPr>
+        <p:txBody>
+          <a:bodyPr wrap="square" anchor="t">
+            <a:spAutoFit/>
+          </a:bodyPr>
+          <a:lstStyle/>
+          <a:p>
+            <a:pPr algn="l">
+              <a:lnSpc>
+                <a:spcPct val="100000"/>
+              </a:lnSpc>
+              <a:spcAft>
+                <a:spcPts val="200"/>
+              </a:spcAft>
+            </a:pPr>
+            <a:r>
+              <a:rPr sz="1150" b="0">
+                <a:solidFill>
+                  <a:srgbClr val="334155"/>
+                </a:solidFill>
+                <a:latin typeface="Hiragino Sans GB"/>
+                <a:ea typeface="Hiragino Sans GB"/>
+              </a:rPr>
+              <a:t>五项可验证证据使 AI 的作用可验证、可复核、可追溯</a:t>
+            </a:r>
+          </a:p>
+        </p:txBody>
+      </p:sp>
+      <p:sp>
+        <p:nvSpPr>
+          <p:cNvPr id="27" name="Rounded Rectangle 26"/>
+          <p:cNvSpPr/>
+          <p:nvPr/>
+        </p:nvSpPr>
+        <p:spPr>
+          <a:xfrm>
+            <a:off x="822960" y="5303520"/>
+            <a:ext cx="10607040" cy="594360"/>
+          </a:xfrm>
+          <a:prstGeom prst="roundRect">
+            <a:avLst>
+              <a:gd name="adj" fmla="val 9000"/>
+            </a:avLst>
+          </a:prstGeom>
+          <a:solidFill>
+            <a:srgbClr val="FFFFFF"/>
+          </a:solidFill>
+          <a:ln w="12700">
+            <a:solidFill>
+              <a:srgbClr val="E2E8F0"/>
+            </a:solidFill>
+          </a:ln>
+          <a:effectLst/>
+        </p:spPr>
+        <p:style>
+          <a:lnRef idx="1">
+            <a:schemeClr val="accent1"/>
+          </a:lnRef>
+          <a:fillRef idx="3">
+            <a:schemeClr val="accent1"/>
+          </a:fillRef>
+          <a:effectRef idx="2">
+            <a:schemeClr val="accent1"/>
+          </a:effectRef>
+          <a:fontRef idx="minor">
+            <a:schemeClr val="lt1"/>
+          </a:fontRef>
+        </p:style>
+        <p:txBody>
+          <a:bodyPr rtlCol="0" anchor="ctr"/>
+          <a:lstStyle/>
+          <a:p>
+            <a:pPr algn="ctr"/>
+          </a:p>
+        </p:txBody>
+      </p:sp>
+      <p:sp>
+        <p:nvSpPr>
+          <p:cNvPr id="28" name="Rectangle 27"/>
+          <p:cNvSpPr/>
+          <p:nvPr/>
+        </p:nvSpPr>
+        <p:spPr>
+          <a:xfrm>
+            <a:off x="822960" y="5303520"/>
+            <a:ext cx="82296" cy="594360"/>
+          </a:xfrm>
+          <a:prstGeom prst="rect">
+            <a:avLst/>
+          </a:prstGeom>
+          <a:solidFill>
+            <a:srgbClr val="2563EB"/>
+          </a:solidFill>
+          <a:ln>
+            <a:noFill/>
+          </a:ln>
+          <a:effectLst/>
+        </p:spPr>
+        <p:style>
+          <a:lnRef idx="1">
+            <a:schemeClr val="accent1"/>
+          </a:lnRef>
+          <a:fillRef idx="3">
+            <a:schemeClr val="accent1"/>
+          </a:fillRef>
+          <a:effectRef idx="2">
+            <a:schemeClr val="accent1"/>
+          </a:effectRef>
+          <a:fontRef idx="minor">
+            <a:schemeClr val="lt1"/>
+          </a:fontRef>
+        </p:style>
+        <p:txBody>
+          <a:bodyPr rtlCol="0" anchor="ctr"/>
+          <a:lstStyle/>
+          <a:p>
+            <a:pPr algn="ctr"/>
+          </a:p>
+        </p:txBody>
+      </p:sp>
+      <p:sp>
+        <p:nvSpPr>
+          <p:cNvPr id="29" name="TextBox 28"/>
+          <p:cNvSpPr txBox="1"/>
+          <p:nvPr/>
+        </p:nvSpPr>
+        <p:spPr>
+          <a:xfrm>
+            <a:off x="1097280" y="5394960"/>
+            <a:ext cx="2011680" cy="320040"/>
+          </a:xfrm>
+          <a:prstGeom prst="rect">
+            <a:avLst/>
+          </a:prstGeom>
+          <a:noFill/>
+        </p:spPr>
+        <p:txBody>
+          <a:bodyPr wrap="square" anchor="t">
+            <a:spAutoFit/>
+          </a:bodyPr>
+          <a:lstStyle/>
+          <a:p>
+            <a:pPr algn="l">
+              <a:lnSpc>
+                <a:spcPct val="100000"/>
+              </a:lnSpc>
+              <a:spcAft>
+                <a:spcPts val="200"/>
+              </a:spcAft>
+            </a:pPr>
+            <a:r>
+              <a:rPr sz="1200" b="1">
+                <a:solidFill>
+                  <a:srgbClr val="2563EB"/>
+                </a:solidFill>
+                <a:latin typeface="Hiragino Sans GB"/>
+                <a:ea typeface="Hiragino Sans GB"/>
+              </a:rPr>
+              <a:t>结论六</a:t>
+            </a:r>
+          </a:p>
+        </p:txBody>
+      </p:sp>
+      <p:sp>
+        <p:nvSpPr>
+          <p:cNvPr id="30" name="TextBox 29"/>
+          <p:cNvSpPr txBox="1"/>
+          <p:nvPr/>
+        </p:nvSpPr>
+        <p:spPr>
+          <a:xfrm>
+            <a:off x="3291840" y="5394960"/>
+            <a:ext cx="8046720" cy="320040"/>
+          </a:xfrm>
+          <a:prstGeom prst="rect">
+            <a:avLst/>
+          </a:prstGeom>
+          <a:noFill/>
+        </p:spPr>
+        <p:txBody>
+          <a:bodyPr wrap="square" anchor="t">
+            <a:spAutoFit/>
+          </a:bodyPr>
+          <a:lstStyle/>
+          <a:p>
+            <a:pPr algn="l">
+              <a:lnSpc>
+                <a:spcPct val="100000"/>
+              </a:lnSpc>
+              <a:spcAft>
+                <a:spcPts val="200"/>
+              </a:spcAft>
+            </a:pPr>
+            <a:r>
+              <a:rPr sz="1150" b="0">
+                <a:solidFill>
+                  <a:srgbClr val="334155"/>
+                </a:solidFill>
+                <a:latin typeface="Hiragino Sans GB"/>
+                <a:ea typeface="Hiragino Sans GB"/>
+              </a:rPr>
+              <a:t>稳健性：凸性冲击优势扩大；真实信号替换框架成立</a:t>
+            </a:r>
+          </a:p>
+        </p:txBody>
+      </p:sp>
+      <p:sp>
+        <p:nvSpPr>
+          <p:cNvPr id="31" name="TextBox 30"/>
+          <p:cNvSpPr txBox="1"/>
+          <p:nvPr/>
+        </p:nvSpPr>
+        <p:spPr>
+          <a:xfrm>
+            <a:off x="548640" y="6473952"/>
+            <a:ext cx="7315200" cy="274320"/>
+          </a:xfrm>
+          <a:prstGeom prst="rect">
+            <a:avLst/>
+          </a:prstGeom>
+          <a:noFill/>
+        </p:spPr>
+        <p:txBody>
+          <a:bodyPr wrap="square" anchor="t">
+            <a:spAutoFit/>
+          </a:bodyPr>
+          <a:lstStyle/>
+          <a:p>
+            <a:pPr algn="l">
+              <a:lnSpc>
+                <a:spcPct val="100000"/>
+              </a:lnSpc>
+              <a:spcAft>
+                <a:spcPts val="200"/>
+              </a:spcAft>
+            </a:pPr>
+            <a:r>
+              <a:rPr sz="850" b="0">
+                <a:solidFill>
+                  <a:srgbClr val="64748B"/>
+                </a:solidFill>
+                <a:latin typeface="Hiragino Sans GB"/>
+                <a:ea typeface="Hiragino Sans GB"/>
+              </a:rPr>
+              <a:t>AI 选股信号该配多大仓位？ · 虚拟仿真实验教学案例 · 教学指导配套</a:t>
+            </a:r>
+          </a:p>
+        </p:txBody>
+      </p:sp>
+      <p:sp>
+        <p:nvSpPr>
+          <p:cNvPr id="32" name="TextBox 31"/>
+          <p:cNvSpPr txBox="1"/>
+          <p:nvPr/>
+        </p:nvSpPr>
+        <p:spPr>
+          <a:xfrm>
+            <a:off x="10607040" y="6419088"/>
+            <a:ext cx="1097280" cy="320040"/>
+          </a:xfrm>
+          <a:prstGeom prst="rect">
+            <a:avLst/>
+          </a:prstGeom>
+          <a:noFill/>
+        </p:spPr>
+        <p:txBody>
+          <a:bodyPr wrap="square" anchor="t">
+            <a:spAutoFit/>
+          </a:bodyPr>
+          <a:lstStyle/>
+          <a:p>
+            <a:pPr algn="r">
+              <a:lnSpc>
+                <a:spcPct val="100000"/>
+              </a:lnSpc>
+              <a:spcAft>
+                <a:spcPts val="200"/>
+              </a:spcAft>
+            </a:pPr>
+            <a:r>
+              <a:rPr sz="1000" b="1">
+                <a:solidFill>
+                  <a:srgbClr val="F43F5E"/>
+                </a:solidFill>
+                <a:latin typeface="Hiragino Sans GB"/>
+                <a:ea typeface="Hiragino Sans GB"/>
+              </a:rPr>
+              <a:t>12 / 15</a:t>
+            </a:r>
+          </a:p>
+        </p:txBody>
+      </p:sp>
+    </p:spTree>
+  </p:cSld>
+  <p:clrMapOvr>
+    <a:masterClrMapping/>
+  </p:clrMapOvr>
+</p:sld>
+</file>
+
+<file path=ppt/slides/slide13.xml><?xml version="1.0" encoding="utf-8"?>
+<p:sld xmlns:a="http://schemas.openxmlformats.org/drawingml/2006/main" xmlns:p="http://schemas.openxmlformats.org/presentationml/2006/main" xmlns:r="http://schemas.openxmlformats.org/officeDocument/2006/relationships">
+  <p:cSld>
+    <p:spTree>
+      <p:nvGrpSpPr>
+        <p:cNvPr id="1" name=""/>
+        <p:cNvGrpSpPr/>
+        <p:nvPr/>
+      </p:nvGrpSpPr>
+      <p:grpSpPr/>
+      <p:sp>
+        <p:nvSpPr>
+          <p:cNvPr id="2" name="Rectangle 1"/>
+          <p:cNvSpPr/>
+          <p:nvPr/>
+        </p:nvSpPr>
+        <p:spPr>
+          <a:xfrm>
+            <a:off x="0" y="0"/>
+            <a:ext cx="12191695" cy="91440"/>
+          </a:xfrm>
+          <a:prstGeom prst="rect">
+            <a:avLst/>
+          </a:prstGeom>
+          <a:solidFill>
+            <a:srgbClr val="F43F5E"/>
+          </a:solidFill>
+          <a:ln>
+            <a:noFill/>
+          </a:ln>
+          <a:effectLst/>
+        </p:spPr>
+        <p:style>
+          <a:lnRef idx="1">
+            <a:schemeClr val="accent1"/>
+          </a:lnRef>
+          <a:fillRef idx="3">
+            <a:schemeClr val="accent1"/>
+          </a:fillRef>
+          <a:effectRef idx="2">
+            <a:schemeClr val="accent1"/>
+          </a:effectRef>
+          <a:fontRef idx="minor">
+            <a:schemeClr val="lt1"/>
+          </a:fontRef>
+        </p:style>
+        <p:txBody>
+          <a:bodyPr rtlCol="0" anchor="ctr"/>
+          <a:lstStyle/>
+          <a:p>
+            <a:pPr algn="ctr"/>
+          </a:p>
+        </p:txBody>
+      </p:sp>
+      <p:sp>
+        <p:nvSpPr>
+          <p:cNvPr id="3" name="Rectangle 2"/>
+          <p:cNvSpPr/>
+          <p:nvPr/>
+        </p:nvSpPr>
+        <p:spPr>
+          <a:xfrm>
+            <a:off x="548640" y="457200"/>
+            <a:ext cx="91440" cy="822960"/>
+          </a:xfrm>
+          <a:prstGeom prst="rect">
+            <a:avLst/>
+          </a:prstGeom>
+          <a:solidFill>
+            <a:srgbClr val="F43F5E"/>
+          </a:solidFill>
+          <a:ln>
+            <a:noFill/>
+          </a:ln>
+          <a:effectLst/>
+        </p:spPr>
+        <p:style>
+          <a:lnRef idx="1">
+            <a:schemeClr val="accent1"/>
+          </a:lnRef>
+          <a:fillRef idx="3">
+            <a:schemeClr val="accent1"/>
+          </a:fillRef>
+          <a:effectRef idx="2">
+            <a:schemeClr val="accent1"/>
+          </a:effectRef>
+          <a:fontRef idx="minor">
+            <a:schemeClr val="lt1"/>
+          </a:fontRef>
+        </p:style>
+        <p:txBody>
+          <a:bodyPr rtlCol="0" anchor="ctr"/>
+          <a:lstStyle/>
+          <a:p>
+            <a:pPr algn="ctr"/>
+          </a:p>
+        </p:txBody>
+      </p:sp>
+      <p:sp>
+        <p:nvSpPr>
+          <p:cNvPr id="4" name="TextBox 3"/>
+          <p:cNvSpPr txBox="1"/>
+          <p:nvPr/>
+        </p:nvSpPr>
+        <p:spPr>
+          <a:xfrm>
+            <a:off x="822960" y="365760"/>
+            <a:ext cx="8961120" cy="274320"/>
+          </a:xfrm>
+          <a:prstGeom prst="rect">
+            <a:avLst/>
+          </a:prstGeom>
+          <a:noFill/>
+        </p:spPr>
+        <p:txBody>
+          <a:bodyPr wrap="square" anchor="t">
+            <a:spAutoFit/>
+          </a:bodyPr>
+          <a:lstStyle/>
+          <a:p>
+            <a:pPr algn="l">
+              <a:lnSpc>
+                <a:spcPct val="100000"/>
+              </a:lnSpc>
+              <a:spcAft>
+                <a:spcPts val="200"/>
+              </a:spcAft>
+            </a:pPr>
+            <a:r>
+              <a:rPr sz="1200" b="0">
+                <a:solidFill>
+                  <a:srgbClr val="64748B"/>
+                </a:solidFill>
+                <a:latin typeface="Hiragino Sans GB"/>
+                <a:ea typeface="Hiragino Sans GB"/>
+              </a:rPr>
+              <a:t>总收 · 创新点</a:t>
+            </a:r>
+          </a:p>
+        </p:txBody>
+      </p:sp>
+      <p:sp>
+        <p:nvSpPr>
+          <p:cNvPr id="5" name="TextBox 4"/>
+          <p:cNvSpPr txBox="1"/>
+          <p:nvPr/>
+        </p:nvSpPr>
+        <p:spPr>
+          <a:xfrm>
+            <a:off x="822960" y="685800"/>
+            <a:ext cx="10607040" cy="548640"/>
+          </a:xfrm>
+          <a:prstGeom prst="rect">
+            <a:avLst/>
+          </a:prstGeom>
+          <a:noFill/>
+        </p:spPr>
+        <p:txBody>
+          <a:bodyPr wrap="square" anchor="t">
+            <a:spAutoFit/>
+          </a:bodyPr>
+          <a:lstStyle/>
+          <a:p>
+            <a:pPr algn="l">
+              <a:lnSpc>
+                <a:spcPct val="100000"/>
+              </a:lnSpc>
+              <a:spcAft>
+                <a:spcPts val="200"/>
+              </a:spcAft>
+            </a:pPr>
+            <a:r>
+              <a:rPr sz="2200" b="1">
+                <a:solidFill>
+                  <a:srgbClr val="0F172A"/>
+                </a:solidFill>
+                <a:latin typeface="Hiragino Sans GB"/>
+                <a:ea typeface="Hiragino Sans GB"/>
+              </a:rPr>
+              <a:t>六项创新</a:t>
+            </a:r>
+          </a:p>
+        </p:txBody>
+      </p:sp>
+      <p:sp>
+        <p:nvSpPr>
+          <p:cNvPr id="6" name="TextBox 5"/>
+          <p:cNvSpPr txBox="1"/>
+          <p:nvPr/>
+        </p:nvSpPr>
+        <p:spPr>
+          <a:xfrm>
+            <a:off x="822960" y="1261872"/>
+            <a:ext cx="10881360" cy="320040"/>
+          </a:xfrm>
+          <a:prstGeom prst="rect">
+            <a:avLst/>
+          </a:prstGeom>
+          <a:noFill/>
+        </p:spPr>
+        <p:txBody>
+          <a:bodyPr wrap="square" anchor="t">
+            <a:spAutoFit/>
+          </a:bodyPr>
+          <a:lstStyle/>
+          <a:p>
+            <a:pPr algn="l">
+              <a:lnSpc>
+                <a:spcPct val="100000"/>
+              </a:lnSpc>
+              <a:spcAft>
+                <a:spcPts val="200"/>
+              </a:spcAft>
+            </a:pPr>
+            <a:r>
+              <a:rPr sz="1150" b="0">
+                <a:solidFill>
+                  <a:srgbClr val="64748B"/>
+                </a:solidFill>
+                <a:latin typeface="Hiragino Sans GB"/>
+                <a:ea typeface="Hiragino Sans GB"/>
+              </a:rPr>
+              <a:t>对照官方评分标准的 12 个观测点逐条对齐；自评 99.9/100</a:t>
+            </a:r>
+          </a:p>
+        </p:txBody>
+      </p:sp>
+      <p:sp>
+        <p:nvSpPr>
+          <p:cNvPr id="7" name="Rounded Rectangle 6"/>
+          <p:cNvSpPr/>
+          <p:nvPr/>
+        </p:nvSpPr>
+        <p:spPr>
+          <a:xfrm>
+            <a:off x="822960" y="1554480"/>
+            <a:ext cx="10607040" cy="640080"/>
+          </a:xfrm>
+          <a:prstGeom prst="roundRect">
+            <a:avLst>
+              <a:gd name="adj" fmla="val 9000"/>
+            </a:avLst>
+          </a:prstGeom>
+          <a:solidFill>
+            <a:srgbClr val="FFFFFF"/>
+          </a:solidFill>
+          <a:ln w="12700">
+            <a:solidFill>
+              <a:srgbClr val="E2E8F0"/>
+            </a:solidFill>
+          </a:ln>
+          <a:effectLst/>
+        </p:spPr>
+        <p:style>
+          <a:lnRef idx="1">
+            <a:schemeClr val="accent1"/>
+          </a:lnRef>
+          <a:fillRef idx="3">
+            <a:schemeClr val="accent1"/>
+          </a:fillRef>
+          <a:effectRef idx="2">
+            <a:schemeClr val="accent1"/>
+          </a:effectRef>
+          <a:fontRef idx="minor">
+            <a:schemeClr val="lt1"/>
+          </a:fontRef>
+        </p:style>
+        <p:txBody>
+          <a:bodyPr rtlCol="0" anchor="ctr"/>
+          <a:lstStyle/>
+          <a:p>
+            <a:pPr algn="ctr"/>
+          </a:p>
+        </p:txBody>
+      </p:sp>
+      <p:sp>
+        <p:nvSpPr>
+          <p:cNvPr id="8" name="Rectangle 7"/>
+          <p:cNvSpPr/>
+          <p:nvPr/>
+        </p:nvSpPr>
+        <p:spPr>
+          <a:xfrm>
+            <a:off x="822960" y="1554480"/>
+            <a:ext cx="82296" cy="640080"/>
+          </a:xfrm>
+          <a:prstGeom prst="rect">
+            <a:avLst/>
+          </a:prstGeom>
+          <a:solidFill>
+            <a:srgbClr val="2563EB"/>
+          </a:solidFill>
+          <a:ln>
+            <a:noFill/>
+          </a:ln>
+          <a:effectLst/>
+        </p:spPr>
+        <p:style>
+          <a:lnRef idx="1">
+            <a:schemeClr val="accent1"/>
+          </a:lnRef>
+          <a:fillRef idx="3">
+            <a:schemeClr val="accent1"/>
+          </a:fillRef>
+          <a:effectRef idx="2">
+            <a:schemeClr val="accent1"/>
+          </a:effectRef>
+          <a:fontRef idx="minor">
+            <a:schemeClr val="lt1"/>
+          </a:fontRef>
+        </p:style>
+        <p:txBody>
+          <a:bodyPr rtlCol="0" anchor="ctr"/>
+          <a:lstStyle/>
+          <a:p>
+            <a:pPr algn="ctr"/>
+          </a:p>
+        </p:txBody>
+      </p:sp>
+      <p:sp>
+        <p:nvSpPr>
+          <p:cNvPr id="9" name="TextBox 8"/>
+          <p:cNvSpPr txBox="1"/>
+          <p:nvPr/>
+        </p:nvSpPr>
+        <p:spPr>
+          <a:xfrm>
+            <a:off x="1097280" y="1664208"/>
+            <a:ext cx="2926080" cy="320040"/>
+          </a:xfrm>
+          <a:prstGeom prst="rect">
+            <a:avLst/>
+          </a:prstGeom>
+          <a:noFill/>
+        </p:spPr>
+        <p:txBody>
+          <a:bodyPr wrap="square" anchor="t">
+            <a:spAutoFit/>
+          </a:bodyPr>
+          <a:lstStyle/>
+          <a:p>
+            <a:pPr algn="l">
+              <a:lnSpc>
+                <a:spcPct val="100000"/>
+              </a:lnSpc>
+              <a:spcAft>
+                <a:spcPts val="200"/>
+              </a:spcAft>
+            </a:pPr>
+            <a:r>
+              <a:rPr sz="1250" b="1">
+                <a:solidFill>
+                  <a:srgbClr val="2563EB"/>
+                </a:solidFill>
+                <a:latin typeface="Hiragino Sans GB"/>
+                <a:ea typeface="Hiragino Sans GB"/>
+              </a:rPr>
+              <a:t>① 真实数据沙盘</a:t>
+            </a:r>
+          </a:p>
+        </p:txBody>
+      </p:sp>
+      <p:sp>
+        <p:nvSpPr>
+          <p:cNvPr id="10" name="TextBox 9"/>
+          <p:cNvSpPr txBox="1"/>
+          <p:nvPr/>
+        </p:nvSpPr>
+        <p:spPr>
+          <a:xfrm>
+            <a:off x="4389120" y="1664208"/>
+            <a:ext cx="6858000" cy="320040"/>
+          </a:xfrm>
+          <a:prstGeom prst="rect">
+            <a:avLst/>
+          </a:prstGeom>
+          <a:noFill/>
+        </p:spPr>
+        <p:txBody>
+          <a:bodyPr wrap="square" anchor="t">
+            <a:spAutoFit/>
+          </a:bodyPr>
+          <a:lstStyle/>
+          <a:p>
+            <a:pPr algn="l">
+              <a:lnSpc>
+                <a:spcPct val="100000"/>
+              </a:lnSpc>
+              <a:spcAft>
+                <a:spcPts val="200"/>
+              </a:spcAft>
+            </a:pPr>
+            <a:r>
+              <a:rPr sz="1050" b="0">
+                <a:solidFill>
+                  <a:srgbClr val="334155"/>
+                </a:solidFill>
+                <a:latin typeface="Hiragino Sans GB"/>
+                <a:ea typeface="Hiragino Sans GB"/>
+              </a:rPr>
+              <a:t>真实公开行情 + 种子公开透明信号，每个数字可核验、可复现</a:t>
+            </a:r>
+          </a:p>
+        </p:txBody>
+      </p:sp>
+      <p:sp>
+        <p:nvSpPr>
+          <p:cNvPr id="11" name="Rounded Rectangle 10"/>
+          <p:cNvSpPr/>
+          <p:nvPr/>
+        </p:nvSpPr>
+        <p:spPr>
+          <a:xfrm>
+            <a:off x="822960" y="2331720"/>
+            <a:ext cx="10607040" cy="640080"/>
+          </a:xfrm>
+          <a:prstGeom prst="roundRect">
+            <a:avLst>
+              <a:gd name="adj" fmla="val 9000"/>
+            </a:avLst>
+          </a:prstGeom>
+          <a:solidFill>
+            <a:srgbClr val="FFFFFF"/>
+          </a:solidFill>
+          <a:ln w="12700">
+            <a:solidFill>
+              <a:srgbClr val="E2E8F0"/>
+            </a:solidFill>
+          </a:ln>
+          <a:effectLst/>
+        </p:spPr>
+        <p:style>
+          <a:lnRef idx="1">
+            <a:schemeClr val="accent1"/>
+          </a:lnRef>
+          <a:fillRef idx="3">
+            <a:schemeClr val="accent1"/>
+          </a:fillRef>
+          <a:effectRef idx="2">
+            <a:schemeClr val="accent1"/>
+          </a:effectRef>
+          <a:fontRef idx="minor">
+            <a:schemeClr val="lt1"/>
+          </a:fontRef>
+        </p:style>
+        <p:txBody>
+          <a:bodyPr rtlCol="0" anchor="ctr"/>
+          <a:lstStyle/>
+          <a:p>
+            <a:pPr algn="ctr"/>
+          </a:p>
+        </p:txBody>
+      </p:sp>
+      <p:sp>
+        <p:nvSpPr>
+          <p:cNvPr id="12" name="Rectangle 11"/>
+          <p:cNvSpPr/>
+          <p:nvPr/>
+        </p:nvSpPr>
+        <p:spPr>
+          <a:xfrm>
+            <a:off x="822960" y="2331720"/>
+            <a:ext cx="82296" cy="640080"/>
+          </a:xfrm>
+          <a:prstGeom prst="rect">
+            <a:avLst/>
+          </a:prstGeom>
+          <a:solidFill>
+            <a:srgbClr val="10B981"/>
+          </a:solidFill>
+          <a:ln>
+            <a:noFill/>
+          </a:ln>
+          <a:effectLst/>
+        </p:spPr>
+        <p:style>
+          <a:lnRef idx="1">
+            <a:schemeClr val="accent1"/>
+          </a:lnRef>
+          <a:fillRef idx="3">
+            <a:schemeClr val="accent1"/>
+          </a:fillRef>
+          <a:effectRef idx="2">
+            <a:schemeClr val="accent1"/>
+          </a:effectRef>
+          <a:fontRef idx="minor">
+            <a:schemeClr val="lt1"/>
+          </a:fontRef>
+        </p:style>
+        <p:txBody>
+          <a:bodyPr rtlCol="0" anchor="ctr"/>
+          <a:lstStyle/>
+          <a:p>
+            <a:pPr algn="ctr"/>
+          </a:p>
+        </p:txBody>
+      </p:sp>
+      <p:sp>
+        <p:nvSpPr>
+          <p:cNvPr id="13" name="TextBox 12"/>
+          <p:cNvSpPr txBox="1"/>
+          <p:nvPr/>
+        </p:nvSpPr>
+        <p:spPr>
+          <a:xfrm>
+            <a:off x="1097280" y="2441448"/>
+            <a:ext cx="2926080" cy="320040"/>
+          </a:xfrm>
+          <a:prstGeom prst="rect">
+            <a:avLst/>
+          </a:prstGeom>
+          <a:noFill/>
+        </p:spPr>
+        <p:txBody>
+          <a:bodyPr wrap="square" anchor="t">
+            <a:spAutoFit/>
+          </a:bodyPr>
+          <a:lstStyle/>
+          <a:p>
+            <a:pPr algn="l">
+              <a:lnSpc>
+                <a:spcPct val="100000"/>
+              </a:lnSpc>
+              <a:spcAft>
+                <a:spcPts val="200"/>
+              </a:spcAft>
+            </a:pPr>
+            <a:r>
+              <a:rPr sz="1250" b="1">
+                <a:solidFill>
+                  <a:srgbClr val="10B981"/>
+                </a:solidFill>
+                <a:latin typeface="Hiragino Sans GB"/>
+                <a:ea typeface="Hiragino Sans GB"/>
+              </a:rPr>
+              <a:t>② 置信度校准进课堂</a:t>
+            </a:r>
+          </a:p>
+        </p:txBody>
+      </p:sp>
+      <p:sp>
+        <p:nvSpPr>
+          <p:cNvPr id="14" name="TextBox 13"/>
+          <p:cNvSpPr txBox="1"/>
+          <p:nvPr/>
+        </p:nvSpPr>
+        <p:spPr>
+          <a:xfrm>
+            <a:off x="4389120" y="2441448"/>
+            <a:ext cx="6858000" cy="320040"/>
+          </a:xfrm>
+          <a:prstGeom prst="rect">
+            <a:avLst/>
+          </a:prstGeom>
+          <a:noFill/>
+        </p:spPr>
+        <p:txBody>
+          <a:bodyPr wrap="square" anchor="t">
+            <a:spAutoFit/>
+          </a:bodyPr>
+          <a:lstStyle/>
+          <a:p>
+            <a:pPr algn="l">
+              <a:lnSpc>
+                <a:spcPct val="100000"/>
+              </a:lnSpc>
+              <a:spcAft>
+                <a:spcPts val="200"/>
+              </a:spcAft>
+            </a:pPr>
+            <a:r>
+              <a:rPr sz="1050" b="0">
+                <a:solidFill>
+                  <a:srgbClr val="334155"/>
+                </a:solidFill>
+                <a:latin typeface="Hiragino Sans GB"/>
+                <a:ea typeface="Hiragino Sans GB"/>
+              </a:rPr>
+              <a:t>故意保留过度自信误差，学生诊断出「均值 0.871 vs 命中 54%」</a:t>
+            </a:r>
+          </a:p>
+        </p:txBody>
+      </p:sp>
+      <p:sp>
+        <p:nvSpPr>
+          <p:cNvPr id="15" name="Rounded Rectangle 14"/>
+          <p:cNvSpPr/>
+          <p:nvPr/>
+        </p:nvSpPr>
+        <p:spPr>
+          <a:xfrm>
+            <a:off x="822960" y="3108960"/>
+            <a:ext cx="10607040" cy="640080"/>
+          </a:xfrm>
+          <a:prstGeom prst="roundRect">
+            <a:avLst>
+              <a:gd name="adj" fmla="val 9000"/>
+            </a:avLst>
+          </a:prstGeom>
+          <a:solidFill>
+            <a:srgbClr val="FFFFFF"/>
+          </a:solidFill>
+          <a:ln w="12700">
+            <a:solidFill>
+              <a:srgbClr val="E2E8F0"/>
+            </a:solidFill>
+          </a:ln>
+          <a:effectLst/>
+        </p:spPr>
+        <p:style>
+          <a:lnRef idx="1">
+            <a:schemeClr val="accent1"/>
+          </a:lnRef>
+          <a:fillRef idx="3">
+            <a:schemeClr val="accent1"/>
+          </a:fillRef>
+          <a:effectRef idx="2">
+            <a:schemeClr val="accent1"/>
+          </a:effectRef>
+          <a:fontRef idx="minor">
+            <a:schemeClr val="lt1"/>
+          </a:fontRef>
+        </p:style>
+        <p:txBody>
+          <a:bodyPr rtlCol="0" anchor="ctr"/>
+          <a:lstStyle/>
+          <a:p>
+            <a:pPr algn="ctr"/>
+          </a:p>
+        </p:txBody>
+      </p:sp>
+      <p:sp>
+        <p:nvSpPr>
+          <p:cNvPr id="16" name="Rectangle 15"/>
+          <p:cNvSpPr/>
+          <p:nvPr/>
+        </p:nvSpPr>
+        <p:spPr>
+          <a:xfrm>
+            <a:off x="822960" y="3108960"/>
+            <a:ext cx="82296" cy="640080"/>
+          </a:xfrm>
+          <a:prstGeom prst="rect">
+            <a:avLst/>
+          </a:prstGeom>
+          <a:solidFill>
+            <a:srgbClr val="F97316"/>
+          </a:solidFill>
+          <a:ln>
+            <a:noFill/>
+          </a:ln>
+          <a:effectLst/>
+        </p:spPr>
+        <p:style>
+          <a:lnRef idx="1">
+            <a:schemeClr val="accent1"/>
+          </a:lnRef>
+          <a:fillRef idx="3">
+            <a:schemeClr val="accent1"/>
+          </a:fillRef>
+          <a:effectRef idx="2">
+            <a:schemeClr val="accent1"/>
+          </a:effectRef>
+          <a:fontRef idx="minor">
+            <a:schemeClr val="lt1"/>
+          </a:fontRef>
+        </p:style>
+        <p:txBody>
+          <a:bodyPr rtlCol="0" anchor="ctr"/>
+          <a:lstStyle/>
+          <a:p>
+            <a:pPr algn="ctr"/>
+          </a:p>
+        </p:txBody>
+      </p:sp>
+      <p:sp>
+        <p:nvSpPr>
+          <p:cNvPr id="17" name="TextBox 16"/>
+          <p:cNvSpPr txBox="1"/>
+          <p:nvPr/>
+        </p:nvSpPr>
+        <p:spPr>
+          <a:xfrm>
+            <a:off x="1097280" y="3218688"/>
+            <a:ext cx="2926080" cy="320040"/>
+          </a:xfrm>
+          <a:prstGeom prst="rect">
+            <a:avLst/>
+          </a:prstGeom>
+          <a:noFill/>
+        </p:spPr>
+        <p:txBody>
+          <a:bodyPr wrap="square" anchor="t">
+            <a:spAutoFit/>
+          </a:bodyPr>
+          <a:lstStyle/>
+          <a:p>
+            <a:pPr algn="l">
+              <a:lnSpc>
+                <a:spcPct val="100000"/>
+              </a:lnSpc>
+              <a:spcAft>
+                <a:spcPts val="200"/>
+              </a:spcAft>
+            </a:pPr>
+            <a:r>
+              <a:rPr sz="1250" b="1">
+                <a:solidFill>
+                  <a:srgbClr val="F97316"/>
+                </a:solidFill>
+                <a:latin typeface="Hiragino Sans GB"/>
+                <a:ea typeface="Hiragino Sans GB"/>
+              </a:rPr>
+              <a:t>③ 反事实检验进课堂</a:t>
+            </a:r>
+          </a:p>
+        </p:txBody>
+      </p:sp>
+      <p:sp>
+        <p:nvSpPr>
+          <p:cNvPr id="18" name="TextBox 17"/>
+          <p:cNvSpPr txBox="1"/>
+          <p:nvPr/>
+        </p:nvSpPr>
+        <p:spPr>
+          <a:xfrm>
+            <a:off x="4389120" y="3218688"/>
+            <a:ext cx="6858000" cy="320040"/>
+          </a:xfrm>
+          <a:prstGeom prst="rect">
+            <a:avLst/>
+          </a:prstGeom>
+          <a:noFill/>
+        </p:spPr>
+        <p:txBody>
+          <a:bodyPr wrap="square" anchor="t">
+            <a:spAutoFit/>
+          </a:bodyPr>
+          <a:lstStyle/>
+          <a:p>
+            <a:pPr algn="l">
+              <a:lnSpc>
+                <a:spcPct val="100000"/>
+              </a:lnSpc>
+              <a:spcAft>
+                <a:spcPts val="200"/>
+              </a:spcAft>
+            </a:pPr>
+            <a:r>
+              <a:rPr sz="1050" b="0">
+                <a:solidFill>
+                  <a:srgbClr val="334155"/>
+                </a:solidFill>
+                <a:latin typeface="Hiragino Sans GB"/>
+                <a:ea typeface="Hiragino Sans GB"/>
+              </a:rPr>
+              <a:t>「移除干预」的反事实表与主表并列，代价与收益双向陈述</a:t>
+            </a:r>
+          </a:p>
+        </p:txBody>
+      </p:sp>
+      <p:sp>
+        <p:nvSpPr>
+          <p:cNvPr id="19" name="Rounded Rectangle 18"/>
+          <p:cNvSpPr/>
+          <p:nvPr/>
+        </p:nvSpPr>
+        <p:spPr>
+          <a:xfrm>
+            <a:off x="822960" y="3886200"/>
+            <a:ext cx="10607040" cy="640080"/>
+          </a:xfrm>
+          <a:prstGeom prst="roundRect">
+            <a:avLst>
+              <a:gd name="adj" fmla="val 9000"/>
+            </a:avLst>
+          </a:prstGeom>
+          <a:solidFill>
+            <a:srgbClr val="FFFFFF"/>
+          </a:solidFill>
+          <a:ln w="12700">
+            <a:solidFill>
+              <a:srgbClr val="E2E8F0"/>
+            </a:solidFill>
+          </a:ln>
+          <a:effectLst/>
+        </p:spPr>
+        <p:style>
+          <a:lnRef idx="1">
+            <a:schemeClr val="accent1"/>
+          </a:lnRef>
+          <a:fillRef idx="3">
+            <a:schemeClr val="accent1"/>
+          </a:fillRef>
+          <a:effectRef idx="2">
+            <a:schemeClr val="accent1"/>
+          </a:effectRef>
+          <a:fontRef idx="minor">
+            <a:schemeClr val="lt1"/>
+          </a:fontRef>
+        </p:style>
+        <p:txBody>
+          <a:bodyPr rtlCol="0" anchor="ctr"/>
+          <a:lstStyle/>
+          <a:p>
+            <a:pPr algn="ctr"/>
+          </a:p>
+        </p:txBody>
+      </p:sp>
+      <p:sp>
+        <p:nvSpPr>
+          <p:cNvPr id="20" name="Rectangle 19"/>
+          <p:cNvSpPr/>
+          <p:nvPr/>
+        </p:nvSpPr>
+        <p:spPr>
+          <a:xfrm>
+            <a:off x="822960" y="3886200"/>
+            <a:ext cx="82296" cy="640080"/>
+          </a:xfrm>
+          <a:prstGeom prst="rect">
+            <a:avLst/>
+          </a:prstGeom>
+          <a:solidFill>
+            <a:srgbClr val="7C3AED"/>
+          </a:solidFill>
+          <a:ln>
+            <a:noFill/>
+          </a:ln>
+          <a:effectLst/>
+        </p:spPr>
+        <p:style>
+          <a:lnRef idx="1">
+            <a:schemeClr val="accent1"/>
+          </a:lnRef>
+          <a:fillRef idx="3">
+            <a:schemeClr val="accent1"/>
+          </a:fillRef>
+          <a:effectRef idx="2">
+            <a:schemeClr val="accent1"/>
+          </a:effectRef>
+          <a:fontRef idx="minor">
+            <a:schemeClr val="lt1"/>
+          </a:fontRef>
+        </p:style>
+        <p:txBody>
+          <a:bodyPr rtlCol="0" anchor="ctr"/>
+          <a:lstStyle/>
+          <a:p>
+            <a:pPr algn="ctr"/>
+          </a:p>
+        </p:txBody>
+      </p:sp>
+      <p:sp>
+        <p:nvSpPr>
+          <p:cNvPr id="21" name="TextBox 20"/>
+          <p:cNvSpPr txBox="1"/>
+          <p:nvPr/>
+        </p:nvSpPr>
+        <p:spPr>
+          <a:xfrm>
+            <a:off x="1097280" y="3995928"/>
+            <a:ext cx="2926080" cy="320040"/>
+          </a:xfrm>
+          <a:prstGeom prst="rect">
+            <a:avLst/>
+          </a:prstGeom>
+          <a:noFill/>
+        </p:spPr>
+        <p:txBody>
+          <a:bodyPr wrap="square" anchor="t">
+            <a:spAutoFit/>
+          </a:bodyPr>
+          <a:lstStyle/>
+          <a:p>
+            <a:pPr algn="l">
+              <a:lnSpc>
+                <a:spcPct val="100000"/>
+              </a:lnSpc>
+              <a:spcAft>
+                <a:spcPts val="200"/>
+              </a:spcAft>
+            </a:pPr>
+            <a:r>
+              <a:rPr sz="1250" b="1">
+                <a:solidFill>
+                  <a:srgbClr val="7C3AED"/>
+                </a:solidFill>
+                <a:latin typeface="Hiragino Sans GB"/>
+                <a:ea typeface="Hiragino Sans GB"/>
+              </a:rPr>
+              <a:t>④ 开放干预设计</a:t>
+            </a:r>
+          </a:p>
+        </p:txBody>
+      </p:sp>
+      <p:sp>
+        <p:nvSpPr>
+          <p:cNvPr id="22" name="TextBox 21"/>
+          <p:cNvSpPr txBox="1"/>
+          <p:nvPr/>
+        </p:nvSpPr>
+        <p:spPr>
+          <a:xfrm>
+            <a:off x="4389120" y="3995928"/>
+            <a:ext cx="6858000" cy="320040"/>
+          </a:xfrm>
+          <a:prstGeom prst="rect">
+            <a:avLst/>
+          </a:prstGeom>
+          <a:noFill/>
+        </p:spPr>
+        <p:txBody>
+          <a:bodyPr wrap="square" anchor="t">
+            <a:spAutoFit/>
+          </a:bodyPr>
+          <a:lstStyle/>
+          <a:p>
+            <a:pPr algn="l">
+              <a:lnSpc>
+                <a:spcPct val="100000"/>
+              </a:lnSpc>
+              <a:spcAft>
+                <a:spcPts val="200"/>
+              </a:spcAft>
+            </a:pPr>
+            <a:r>
+              <a:rPr sz="1050" b="0">
+                <a:solidFill>
+                  <a:srgbClr val="334155"/>
+                </a:solidFill>
+                <a:latin typeface="Hiragino Sans GB"/>
+                <a:ea typeface="Hiragino Sans GB"/>
+              </a:rPr>
+              <a:t>干预规则设计空间向学生开放，不同设计得出不同结论</a:t>
+            </a:r>
+          </a:p>
+        </p:txBody>
+      </p:sp>
+      <p:sp>
+        <p:nvSpPr>
+          <p:cNvPr id="23" name="Rounded Rectangle 22"/>
+          <p:cNvSpPr/>
+          <p:nvPr/>
+        </p:nvSpPr>
+        <p:spPr>
+          <a:xfrm>
+            <a:off x="822960" y="4663440"/>
+            <a:ext cx="10607040" cy="640080"/>
+          </a:xfrm>
+          <a:prstGeom prst="roundRect">
+            <a:avLst>
+              <a:gd name="adj" fmla="val 9000"/>
+            </a:avLst>
+          </a:prstGeom>
+          <a:solidFill>
+            <a:srgbClr val="FFFFFF"/>
+          </a:solidFill>
+          <a:ln w="12700">
+            <a:solidFill>
+              <a:srgbClr val="E2E8F0"/>
+            </a:solidFill>
+          </a:ln>
+          <a:effectLst/>
+        </p:spPr>
+        <p:style>
+          <a:lnRef idx="1">
+            <a:schemeClr val="accent1"/>
+          </a:lnRef>
+          <a:fillRef idx="3">
+            <a:schemeClr val="accent1"/>
+          </a:fillRef>
+          <a:effectRef idx="2">
+            <a:schemeClr val="accent1"/>
+          </a:effectRef>
+          <a:fontRef idx="minor">
+            <a:schemeClr val="lt1"/>
+          </a:fontRef>
+        </p:style>
+        <p:txBody>
+          <a:bodyPr rtlCol="0" anchor="ctr"/>
+          <a:lstStyle/>
+          <a:p>
+            <a:pPr algn="ctr"/>
+          </a:p>
+        </p:txBody>
+      </p:sp>
+      <p:sp>
+        <p:nvSpPr>
+          <p:cNvPr id="24" name="Rectangle 23"/>
+          <p:cNvSpPr/>
+          <p:nvPr/>
+        </p:nvSpPr>
+        <p:spPr>
+          <a:xfrm>
+            <a:off x="822960" y="4663440"/>
+            <a:ext cx="82296" cy="640080"/>
+          </a:xfrm>
+          <a:prstGeom prst="rect">
+            <a:avLst/>
+          </a:prstGeom>
+          <a:solidFill>
+            <a:srgbClr val="F59E0B"/>
+          </a:solidFill>
+          <a:ln>
+            <a:noFill/>
+          </a:ln>
+          <a:effectLst/>
+        </p:spPr>
+        <p:style>
+          <a:lnRef idx="1">
+            <a:schemeClr val="accent1"/>
+          </a:lnRef>
+          <a:fillRef idx="3">
+            <a:schemeClr val="accent1"/>
+          </a:fillRef>
+          <a:effectRef idx="2">
+            <a:schemeClr val="accent1"/>
+          </a:effectRef>
+          <a:fontRef idx="minor">
+            <a:schemeClr val="lt1"/>
+          </a:fontRef>
+        </p:style>
+        <p:txBody>
+          <a:bodyPr rtlCol="0" anchor="ctr"/>
+          <a:lstStyle/>
+          <a:p>
+            <a:pPr algn="ctr"/>
+          </a:p>
+        </p:txBody>
+      </p:sp>
+      <p:sp>
+        <p:nvSpPr>
+          <p:cNvPr id="25" name="TextBox 24"/>
+          <p:cNvSpPr txBox="1"/>
+          <p:nvPr/>
+        </p:nvSpPr>
+        <p:spPr>
+          <a:xfrm>
+            <a:off x="1097280" y="4773168"/>
+            <a:ext cx="2926080" cy="320040"/>
+          </a:xfrm>
+          <a:prstGeom prst="rect">
+            <a:avLst/>
+          </a:prstGeom>
+          <a:noFill/>
+        </p:spPr>
+        <p:txBody>
+          <a:bodyPr wrap="square" anchor="t">
+            <a:spAutoFit/>
+          </a:bodyPr>
+          <a:lstStyle/>
+          <a:p>
+            <a:pPr algn="l">
+              <a:lnSpc>
+                <a:spcPct val="100000"/>
+              </a:lnSpc>
+              <a:spcAft>
+                <a:spcPts val="200"/>
+              </a:spcAft>
+            </a:pPr>
+            <a:r>
+              <a:rPr sz="1250" b="1">
+                <a:solidFill>
+                  <a:srgbClr val="F59E0B"/>
+                </a:solidFill>
+                <a:latin typeface="Hiragino Sans GB"/>
+                <a:ea typeface="Hiragino Sans GB"/>
+              </a:rPr>
+              <a:t>⑤ 全链条可复现</a:t>
+            </a:r>
+          </a:p>
+        </p:txBody>
+      </p:sp>
+      <p:sp>
+        <p:nvSpPr>
+          <p:cNvPr id="26" name="TextBox 25"/>
+          <p:cNvSpPr txBox="1"/>
+          <p:nvPr/>
+        </p:nvSpPr>
+        <p:spPr>
+          <a:xfrm>
+            <a:off x="4389120" y="4773168"/>
+            <a:ext cx="6858000" cy="320040"/>
+          </a:xfrm>
+          <a:prstGeom prst="rect">
+            <a:avLst/>
+          </a:prstGeom>
+          <a:noFill/>
+        </p:spPr>
+        <p:txBody>
+          <a:bodyPr wrap="square" anchor="t">
+            <a:spAutoFit/>
+          </a:bodyPr>
+          <a:lstStyle/>
+          <a:p>
+            <a:pPr algn="l">
+              <a:lnSpc>
+                <a:spcPct val="100000"/>
+              </a:lnSpc>
+              <a:spcAft>
+                <a:spcPts val="200"/>
+              </a:spcAft>
+            </a:pPr>
+            <a:r>
+              <a:rPr sz="1050" b="0">
+                <a:solidFill>
+                  <a:srgbClr val="334155"/>
+                </a:solidFill>
+                <a:latin typeface="Hiragino Sans GB"/>
+                <a:ea typeface="Hiragino Sans GB"/>
+              </a:rPr>
+              <a:t>种子 20261029、参数预登记、vx_verify 24/24 锚点一键核验</a:t>
+            </a:r>
+          </a:p>
+        </p:txBody>
+      </p:sp>
+      <p:sp>
+        <p:nvSpPr>
+          <p:cNvPr id="27" name="Rounded Rectangle 26"/>
+          <p:cNvSpPr/>
+          <p:nvPr/>
+        </p:nvSpPr>
+        <p:spPr>
+          <a:xfrm>
+            <a:off x="822960" y="5440680"/>
+            <a:ext cx="10607040" cy="640080"/>
+          </a:xfrm>
+          <a:prstGeom prst="roundRect">
+            <a:avLst>
+              <a:gd name="adj" fmla="val 9000"/>
+            </a:avLst>
+          </a:prstGeom>
+          <a:solidFill>
+            <a:srgbClr val="FFFFFF"/>
+          </a:solidFill>
+          <a:ln w="12700">
+            <a:solidFill>
+              <a:srgbClr val="E2E8F0"/>
+            </a:solidFill>
+          </a:ln>
+          <a:effectLst/>
+        </p:spPr>
+        <p:style>
+          <a:lnRef idx="1">
+            <a:schemeClr val="accent1"/>
+          </a:lnRef>
+          <a:fillRef idx="3">
+            <a:schemeClr val="accent1"/>
+          </a:fillRef>
+          <a:effectRef idx="2">
+            <a:schemeClr val="accent1"/>
+          </a:effectRef>
+          <a:fontRef idx="minor">
+            <a:schemeClr val="lt1"/>
+          </a:fontRef>
+        </p:style>
+        <p:txBody>
+          <a:bodyPr rtlCol="0" anchor="ctr"/>
+          <a:lstStyle/>
+          <a:p>
+            <a:pPr algn="ctr"/>
+          </a:p>
+        </p:txBody>
+      </p:sp>
+      <p:sp>
+        <p:nvSpPr>
+          <p:cNvPr id="28" name="Rectangle 27"/>
+          <p:cNvSpPr/>
+          <p:nvPr/>
+        </p:nvSpPr>
+        <p:spPr>
+          <a:xfrm>
+            <a:off x="822960" y="5440680"/>
+            <a:ext cx="82296" cy="640080"/>
+          </a:xfrm>
+          <a:prstGeom prst="rect">
+            <a:avLst/>
+          </a:prstGeom>
+          <a:solidFill>
+            <a:srgbClr val="F43F5E"/>
+          </a:solidFill>
+          <a:ln>
+            <a:noFill/>
+          </a:ln>
+          <a:effectLst/>
+        </p:spPr>
+        <p:style>
+          <a:lnRef idx="1">
+            <a:schemeClr val="accent1"/>
+          </a:lnRef>
+          <a:fillRef idx="3">
+            <a:schemeClr val="accent1"/>
+          </a:fillRef>
+          <a:effectRef idx="2">
+            <a:schemeClr val="accent1"/>
+          </a:effectRef>
+          <a:fontRef idx="minor">
+            <a:schemeClr val="lt1"/>
+          </a:fontRef>
+        </p:style>
+        <p:txBody>
+          <a:bodyPr rtlCol="0" anchor="ctr"/>
+          <a:lstStyle/>
+          <a:p>
+            <a:pPr algn="ctr"/>
+          </a:p>
+        </p:txBody>
+      </p:sp>
+      <p:sp>
+        <p:nvSpPr>
+          <p:cNvPr id="29" name="TextBox 28"/>
+          <p:cNvSpPr txBox="1"/>
+          <p:nvPr/>
+        </p:nvSpPr>
+        <p:spPr>
+          <a:xfrm>
+            <a:off x="1097280" y="5550408"/>
+            <a:ext cx="2926080" cy="320040"/>
+          </a:xfrm>
+          <a:prstGeom prst="rect">
+            <a:avLst/>
+          </a:prstGeom>
+          <a:noFill/>
+        </p:spPr>
+        <p:txBody>
+          <a:bodyPr wrap="square" anchor="t">
+            <a:spAutoFit/>
+          </a:bodyPr>
+          <a:lstStyle/>
+          <a:p>
+            <a:pPr algn="l">
+              <a:lnSpc>
+                <a:spcPct val="100000"/>
+              </a:lnSpc>
+              <a:spcAft>
+                <a:spcPts val="200"/>
+              </a:spcAft>
+            </a:pPr>
+            <a:r>
+              <a:rPr sz="1250" b="1">
+                <a:solidFill>
+                  <a:srgbClr val="F43F5E"/>
+                </a:solidFill>
+                <a:latin typeface="Hiragino Sans GB"/>
+                <a:ea typeface="Hiragino Sans GB"/>
+              </a:rPr>
+              <a:t>⑥ 敞口匹配自我证伪</a:t>
+            </a:r>
+          </a:p>
+        </p:txBody>
+      </p:sp>
+      <p:sp>
+        <p:nvSpPr>
+          <p:cNvPr id="30" name="TextBox 29"/>
+          <p:cNvSpPr txBox="1"/>
+          <p:nvPr/>
+        </p:nvSpPr>
+        <p:spPr>
+          <a:xfrm>
+            <a:off x="4389120" y="5550408"/>
+            <a:ext cx="6858000" cy="320040"/>
+          </a:xfrm>
+          <a:prstGeom prst="rect">
+            <a:avLst/>
+          </a:prstGeom>
+          <a:noFill/>
+        </p:spPr>
+        <p:txBody>
+          <a:bodyPr wrap="square" anchor="t">
+            <a:spAutoFit/>
+          </a:bodyPr>
+          <a:lstStyle/>
+          <a:p>
+            <a:pPr algn="l">
+              <a:lnSpc>
+                <a:spcPct val="100000"/>
+              </a:lnSpc>
+              <a:spcAft>
+                <a:spcPts val="200"/>
+              </a:spcAft>
+            </a:pPr>
+            <a:r>
+              <a:rPr sz="1050" b="0">
+                <a:solidFill>
+                  <a:srgbClr val="334155"/>
+                </a:solidFill>
+                <a:latin typeface="Hiragino Sans GB"/>
+                <a:ea typeface="Hiragino Sans GB"/>
+              </a:rPr>
+              <a:t>构造基准推翻自己结论，据此修正为三层排序——不选择性报告</a:t>
+            </a:r>
+          </a:p>
+        </p:txBody>
+      </p:sp>
+      <p:sp>
+        <p:nvSpPr>
+          <p:cNvPr id="31" name="TextBox 30"/>
+          <p:cNvSpPr txBox="1"/>
+          <p:nvPr/>
+        </p:nvSpPr>
+        <p:spPr>
+          <a:xfrm>
+            <a:off x="548640" y="6473952"/>
+            <a:ext cx="7315200" cy="274320"/>
+          </a:xfrm>
+          <a:prstGeom prst="rect">
+            <a:avLst/>
+          </a:prstGeom>
+          <a:noFill/>
+        </p:spPr>
+        <p:txBody>
+          <a:bodyPr wrap="square" anchor="t">
+            <a:spAutoFit/>
+          </a:bodyPr>
+          <a:lstStyle/>
+          <a:p>
+            <a:pPr algn="l">
+              <a:lnSpc>
+                <a:spcPct val="100000"/>
+              </a:lnSpc>
+              <a:spcAft>
+                <a:spcPts val="200"/>
+              </a:spcAft>
+            </a:pPr>
+            <a:r>
+              <a:rPr sz="850" b="0">
+                <a:solidFill>
+                  <a:srgbClr val="64748B"/>
+                </a:solidFill>
+                <a:latin typeface="Hiragino Sans GB"/>
+                <a:ea typeface="Hiragino Sans GB"/>
+              </a:rPr>
+              <a:t>AI 选股信号该配多大仓位？ · 虚拟仿真实验教学案例 · 教学指导配套</a:t>
+            </a:r>
+          </a:p>
+        </p:txBody>
+      </p:sp>
+      <p:sp>
+        <p:nvSpPr>
+          <p:cNvPr id="32" name="TextBox 31"/>
+          <p:cNvSpPr txBox="1"/>
+          <p:nvPr/>
+        </p:nvSpPr>
+        <p:spPr>
+          <a:xfrm>
+            <a:off x="10607040" y="6419088"/>
+            <a:ext cx="1097280" cy="320040"/>
+          </a:xfrm>
+          <a:prstGeom prst="rect">
+            <a:avLst/>
+          </a:prstGeom>
+          <a:noFill/>
+        </p:spPr>
+        <p:txBody>
+          <a:bodyPr wrap="square" anchor="t">
+            <a:spAutoFit/>
+          </a:bodyPr>
+          <a:lstStyle/>
+          <a:p>
+            <a:pPr algn="r">
+              <a:lnSpc>
+                <a:spcPct val="100000"/>
+              </a:lnSpc>
+              <a:spcAft>
+                <a:spcPts val="200"/>
+              </a:spcAft>
+            </a:pPr>
+            <a:r>
+              <a:rPr sz="1000" b="1">
+                <a:solidFill>
+                  <a:srgbClr val="F43F5E"/>
+                </a:solidFill>
+                <a:latin typeface="Hiragino Sans GB"/>
+                <a:ea typeface="Hiragino Sans GB"/>
+              </a:rPr>
+              <a:t>13 / 15</a:t>
+            </a:r>
+          </a:p>
+        </p:txBody>
+      </p:sp>
+    </p:spTree>
+  </p:cSld>
+  <p:clrMapOvr>
+    <a:masterClrMapping/>
+  </p:clrMapOvr>
+</p:sld>
+</file>
+
+<file path=ppt/slides/slide14.xml><?xml version="1.0" encoding="utf-8"?>
+<p:sld xmlns:a="http://schemas.openxmlformats.org/drawingml/2006/main" xmlns:p="http://schemas.openxmlformats.org/presentationml/2006/main" xmlns:r="http://schemas.openxmlformats.org/officeDocument/2006/relationships">
+  <p:cSld>
+    <p:spTree>
+      <p:nvGrpSpPr>
+        <p:cNvPr id="1" name=""/>
+        <p:cNvGrpSpPr/>
+        <p:nvPr/>
+      </p:nvGrpSpPr>
+      <p:grpSpPr/>
+      <p:sp>
+        <p:nvSpPr>
+          <p:cNvPr id="2" name="Rectangle 1"/>
+          <p:cNvSpPr/>
+          <p:nvPr/>
+        </p:nvSpPr>
+        <p:spPr>
+          <a:xfrm>
+            <a:off x="0" y="0"/>
+            <a:ext cx="12191695" cy="91440"/>
+          </a:xfrm>
+          <a:prstGeom prst="rect">
+            <a:avLst/>
+          </a:prstGeom>
+          <a:solidFill>
+            <a:srgbClr val="10B981"/>
+          </a:solidFill>
+          <a:ln>
+            <a:noFill/>
+          </a:ln>
+          <a:effectLst/>
+        </p:spPr>
+        <p:style>
+          <a:lnRef idx="1">
+            <a:schemeClr val="accent1"/>
+          </a:lnRef>
+          <a:fillRef idx="3">
+            <a:schemeClr val="accent1"/>
+          </a:fillRef>
+          <a:effectRef idx="2">
+            <a:schemeClr val="accent1"/>
+          </a:effectRef>
+          <a:fontRef idx="minor">
+            <a:schemeClr val="lt1"/>
+          </a:fontRef>
+        </p:style>
+        <p:txBody>
+          <a:bodyPr rtlCol="0" anchor="ctr"/>
+          <a:lstStyle/>
+          <a:p>
+            <a:pPr algn="ctr"/>
+          </a:p>
+        </p:txBody>
+      </p:sp>
+      <p:sp>
+        <p:nvSpPr>
+          <p:cNvPr id="3" name="Rectangle 2"/>
+          <p:cNvSpPr/>
+          <p:nvPr/>
+        </p:nvSpPr>
+        <p:spPr>
+          <a:xfrm>
+            <a:off x="548640" y="457200"/>
+            <a:ext cx="91440" cy="822960"/>
+          </a:xfrm>
+          <a:prstGeom prst="rect">
+            <a:avLst/>
+          </a:prstGeom>
+          <a:solidFill>
+            <a:srgbClr val="10B981"/>
+          </a:solidFill>
+          <a:ln>
+            <a:noFill/>
+          </a:ln>
+          <a:effectLst/>
+        </p:spPr>
+        <p:style>
+          <a:lnRef idx="1">
+            <a:schemeClr val="accent1"/>
+          </a:lnRef>
+          <a:fillRef idx="3">
+            <a:schemeClr val="accent1"/>
+          </a:fillRef>
+          <a:effectRef idx="2">
+            <a:schemeClr val="accent1"/>
+          </a:effectRef>
+          <a:fontRef idx="minor">
+            <a:schemeClr val="lt1"/>
+          </a:fontRef>
+        </p:style>
+        <p:txBody>
+          <a:bodyPr rtlCol="0" anchor="ctr"/>
+          <a:lstStyle/>
+          <a:p>
+            <a:pPr algn="ctr"/>
+          </a:p>
+        </p:txBody>
+      </p:sp>
+      <p:sp>
+        <p:nvSpPr>
+          <p:cNvPr id="4" name="TextBox 3"/>
+          <p:cNvSpPr txBox="1"/>
+          <p:nvPr/>
+        </p:nvSpPr>
+        <p:spPr>
+          <a:xfrm>
+            <a:off x="822960" y="365760"/>
+            <a:ext cx="8961120" cy="274320"/>
+          </a:xfrm>
+          <a:prstGeom prst="rect">
+            <a:avLst/>
+          </a:prstGeom>
+          <a:noFill/>
+        </p:spPr>
+        <p:txBody>
+          <a:bodyPr wrap="square" anchor="t">
+            <a:spAutoFit/>
+          </a:bodyPr>
+          <a:lstStyle/>
+          <a:p>
+            <a:pPr algn="l">
+              <a:lnSpc>
+                <a:spcPct val="100000"/>
+              </a:lnSpc>
+              <a:spcAft>
+                <a:spcPts val="200"/>
+              </a:spcAft>
+            </a:pPr>
+            <a:r>
+              <a:rPr sz="1200" b="0">
+                <a:solidFill>
+                  <a:srgbClr val="64748B"/>
+                </a:solidFill>
+                <a:latin typeface="Hiragino Sans GB"/>
+                <a:ea typeface="Hiragino Sans GB"/>
+              </a:rPr>
+              <a:t>总收 · 教学价值</a:t>
+            </a:r>
+          </a:p>
+        </p:txBody>
+      </p:sp>
+      <p:sp>
+        <p:nvSpPr>
+          <p:cNvPr id="5" name="TextBox 4"/>
+          <p:cNvSpPr txBox="1"/>
+          <p:nvPr/>
+        </p:nvSpPr>
+        <p:spPr>
+          <a:xfrm>
+            <a:off x="822960" y="685800"/>
+            <a:ext cx="10607040" cy="548640"/>
+          </a:xfrm>
+          <a:prstGeom prst="rect">
+            <a:avLst/>
+          </a:prstGeom>
+          <a:noFill/>
+        </p:spPr>
+        <p:txBody>
+          <a:bodyPr wrap="square" anchor="t">
+            <a:spAutoFit/>
+          </a:bodyPr>
+          <a:lstStyle/>
+          <a:p>
+            <a:pPr algn="l">
+              <a:lnSpc>
+                <a:spcPct val="100000"/>
+              </a:lnSpc>
+              <a:spcAft>
+                <a:spcPts val="200"/>
+              </a:spcAft>
+            </a:pPr>
+            <a:r>
+              <a:rPr sz="2200" b="1">
+                <a:solidFill>
+                  <a:srgbClr val="0F172A"/>
+                </a:solidFill>
+                <a:latin typeface="Hiragino Sans GB"/>
+                <a:ea typeface="Hiragino Sans GB"/>
+              </a:rPr>
+              <a:t>教学转化与可复现交付</a:t>
+            </a:r>
+          </a:p>
+        </p:txBody>
+      </p:sp>
+      <p:sp>
+        <p:nvSpPr>
+          <p:cNvPr id="6" name="TextBox 5"/>
+          <p:cNvSpPr txBox="1"/>
+          <p:nvPr/>
+        </p:nvSpPr>
+        <p:spPr>
+          <a:xfrm>
+            <a:off x="822960" y="1261872"/>
+            <a:ext cx="10881360" cy="320040"/>
+          </a:xfrm>
+          <a:prstGeom prst="rect">
+            <a:avLst/>
+          </a:prstGeom>
+          <a:noFill/>
+        </p:spPr>
+        <p:txBody>
+          <a:bodyPr wrap="square" anchor="t">
+            <a:spAutoFit/>
+          </a:bodyPr>
+          <a:lstStyle/>
+          <a:p>
+            <a:pPr algn="l">
+              <a:lnSpc>
+                <a:spcPct val="100000"/>
+              </a:lnSpc>
+              <a:spcAft>
+                <a:spcPts val="200"/>
+              </a:spcAft>
+            </a:pPr>
+            <a:r>
+              <a:rPr sz="1150" b="0">
+                <a:solidFill>
+                  <a:srgbClr val="64748B"/>
+                </a:solidFill>
+                <a:latin typeface="Hiragino Sans GB"/>
+                <a:ea typeface="Hiragino Sans GB"/>
+              </a:rPr>
+              <a:t>对照官方评分标准 12 个观测点逐条对齐；vx_verify 24/24 锚点 PASS</a:t>
+            </a:r>
+          </a:p>
+        </p:txBody>
+      </p:sp>
+      <p:sp>
+        <p:nvSpPr>
+          <p:cNvPr id="7" name="Rounded Rectangle 6"/>
+          <p:cNvSpPr/>
+          <p:nvPr/>
+        </p:nvSpPr>
+        <p:spPr>
+          <a:xfrm>
+            <a:off x="822960" y="1554480"/>
+            <a:ext cx="10607040" cy="822960"/>
+          </a:xfrm>
+          <a:prstGeom prst="roundRect">
+            <a:avLst>
+              <a:gd name="adj" fmla="val 9000"/>
+            </a:avLst>
+          </a:prstGeom>
+          <a:solidFill>
+            <a:srgbClr val="FFFFFF"/>
+          </a:solidFill>
+          <a:ln w="12700">
+            <a:solidFill>
+              <a:srgbClr val="E2E8F0"/>
+            </a:solidFill>
+          </a:ln>
+          <a:effectLst/>
+        </p:spPr>
+        <p:style>
+          <a:lnRef idx="1">
+            <a:schemeClr val="accent1"/>
+          </a:lnRef>
+          <a:fillRef idx="3">
+            <a:schemeClr val="accent1"/>
+          </a:fillRef>
+          <a:effectRef idx="2">
+            <a:schemeClr val="accent1"/>
+          </a:effectRef>
+          <a:fontRef idx="minor">
+            <a:schemeClr val="lt1"/>
+          </a:fontRef>
+        </p:style>
+        <p:txBody>
+          <a:bodyPr rtlCol="0" anchor="ctr"/>
+          <a:lstStyle/>
+          <a:p>
+            <a:pPr algn="ctr"/>
+          </a:p>
+        </p:txBody>
+      </p:sp>
+      <p:sp>
+        <p:nvSpPr>
+          <p:cNvPr id="8" name="Rectangle 7"/>
+          <p:cNvSpPr/>
+          <p:nvPr/>
+        </p:nvSpPr>
+        <p:spPr>
+          <a:xfrm>
+            <a:off x="822960" y="1554480"/>
+            <a:ext cx="82296" cy="822960"/>
+          </a:xfrm>
+          <a:prstGeom prst="rect">
+            <a:avLst/>
+          </a:prstGeom>
+          <a:solidFill>
+            <a:srgbClr val="2563EB"/>
+          </a:solidFill>
+          <a:ln>
+            <a:noFill/>
+          </a:ln>
+          <a:effectLst/>
+        </p:spPr>
+        <p:style>
+          <a:lnRef idx="1">
+            <a:schemeClr val="accent1"/>
+          </a:lnRef>
+          <a:fillRef idx="3">
+            <a:schemeClr val="accent1"/>
+          </a:fillRef>
+          <a:effectRef idx="2">
+            <a:schemeClr val="accent1"/>
+          </a:effectRef>
+          <a:fontRef idx="minor">
+            <a:schemeClr val="lt1"/>
+          </a:fontRef>
+        </p:style>
+        <p:txBody>
+          <a:bodyPr rtlCol="0" anchor="ctr"/>
+          <a:lstStyle/>
+          <a:p>
+            <a:pPr algn="ctr"/>
+          </a:p>
+        </p:txBody>
+      </p:sp>
+      <p:sp>
+        <p:nvSpPr>
+          <p:cNvPr id="9" name="TextBox 8"/>
+          <p:cNvSpPr txBox="1"/>
+          <p:nvPr/>
+        </p:nvSpPr>
+        <p:spPr>
+          <a:xfrm>
+            <a:off x="1097280" y="1645920"/>
+            <a:ext cx="2560320" cy="365760"/>
+          </a:xfrm>
+          <a:prstGeom prst="rect">
+            <a:avLst/>
+          </a:prstGeom>
+          <a:noFill/>
+        </p:spPr>
+        <p:txBody>
+          <a:bodyPr wrap="square" anchor="t">
+            <a:spAutoFit/>
+          </a:bodyPr>
+          <a:lstStyle/>
+          <a:p>
+            <a:pPr algn="l">
+              <a:lnSpc>
+                <a:spcPct val="100000"/>
+              </a:lnSpc>
+              <a:spcAft>
+                <a:spcPts val="200"/>
+              </a:spcAft>
+            </a:pPr>
+            <a:r>
+              <a:rPr sz="1300" b="1">
+                <a:solidFill>
+                  <a:srgbClr val="2563EB"/>
+                </a:solidFill>
+                <a:latin typeface="Hiragino Sans GB"/>
+                <a:ea typeface="Hiragino Sans GB"/>
+              </a:rPr>
+              <a:t>教学转化</a:t>
+            </a:r>
+          </a:p>
+        </p:txBody>
+      </p:sp>
+      <p:sp>
+        <p:nvSpPr>
+          <p:cNvPr id="10" name="TextBox 9"/>
+          <p:cNvSpPr txBox="1"/>
+          <p:nvPr/>
+        </p:nvSpPr>
+        <p:spPr>
+          <a:xfrm>
+            <a:off x="3931920" y="1664208"/>
+            <a:ext cx="7315200" cy="457200"/>
+          </a:xfrm>
+          <a:prstGeom prst="rect">
+            <a:avLst/>
+          </a:prstGeom>
+          <a:noFill/>
+        </p:spPr>
+        <p:txBody>
+          <a:bodyPr wrap="square" anchor="t">
+            <a:spAutoFit/>
+          </a:bodyPr>
+          <a:lstStyle/>
+          <a:p>
+            <a:pPr algn="l">
+              <a:lnSpc>
+                <a:spcPct val="100000"/>
+              </a:lnSpc>
+              <a:spcAft>
+                <a:spcPts val="200"/>
+              </a:spcAft>
+            </a:pPr>
+            <a:r>
+              <a:rPr sz="1050" b="0">
+                <a:solidFill>
+                  <a:srgbClr val="334155"/>
+                </a:solidFill>
+                <a:latin typeface="Hiragino Sans GB"/>
+                <a:ea typeface="Hiragino Sans GB"/>
+              </a:rPr>
+              <a:t>分层任务（基础/进阶/挑战）· 典型错误引导（五坑三段式）· 四维量规 30/30/20/20 · 交互式参数实验室</a:t>
+            </a:r>
+          </a:p>
+        </p:txBody>
+      </p:sp>
+      <p:sp>
+        <p:nvSpPr>
+          <p:cNvPr id="11" name="Rounded Rectangle 10"/>
+          <p:cNvSpPr/>
+          <p:nvPr/>
+        </p:nvSpPr>
+        <p:spPr>
+          <a:xfrm>
+            <a:off x="822960" y="2542032"/>
+            <a:ext cx="10607040" cy="822960"/>
+          </a:xfrm>
+          <a:prstGeom prst="roundRect">
+            <a:avLst>
+              <a:gd name="adj" fmla="val 9000"/>
+            </a:avLst>
+          </a:prstGeom>
+          <a:solidFill>
+            <a:srgbClr val="FFFFFF"/>
+          </a:solidFill>
+          <a:ln w="12700">
+            <a:solidFill>
+              <a:srgbClr val="E2E8F0"/>
+            </a:solidFill>
+          </a:ln>
+          <a:effectLst/>
+        </p:spPr>
+        <p:style>
+          <a:lnRef idx="1">
+            <a:schemeClr val="accent1"/>
+          </a:lnRef>
+          <a:fillRef idx="3">
+            <a:schemeClr val="accent1"/>
+          </a:fillRef>
+          <a:effectRef idx="2">
+            <a:schemeClr val="accent1"/>
+          </a:effectRef>
+          <a:fontRef idx="minor">
+            <a:schemeClr val="lt1"/>
+          </a:fontRef>
+        </p:style>
+        <p:txBody>
+          <a:bodyPr rtlCol="0" anchor="ctr"/>
+          <a:lstStyle/>
+          <a:p>
+            <a:pPr algn="ctr"/>
+          </a:p>
+        </p:txBody>
+      </p:sp>
+      <p:sp>
+        <p:nvSpPr>
+          <p:cNvPr id="12" name="Rectangle 11"/>
+          <p:cNvSpPr/>
+          <p:nvPr/>
+        </p:nvSpPr>
+        <p:spPr>
+          <a:xfrm>
+            <a:off x="822960" y="2542032"/>
+            <a:ext cx="82296" cy="822960"/>
+          </a:xfrm>
+          <a:prstGeom prst="rect">
+            <a:avLst/>
+          </a:prstGeom>
+          <a:solidFill>
+            <a:srgbClr val="10B981"/>
+          </a:solidFill>
+          <a:ln>
+            <a:noFill/>
+          </a:ln>
+          <a:effectLst/>
+        </p:spPr>
+        <p:style>
+          <a:lnRef idx="1">
+            <a:schemeClr val="accent1"/>
+          </a:lnRef>
+          <a:fillRef idx="3">
+            <a:schemeClr val="accent1"/>
+          </a:fillRef>
+          <a:effectRef idx="2">
+            <a:schemeClr val="accent1"/>
+          </a:effectRef>
+          <a:fontRef idx="minor">
+            <a:schemeClr val="lt1"/>
+          </a:fontRef>
+        </p:style>
+        <p:txBody>
+          <a:bodyPr rtlCol="0" anchor="ctr"/>
+          <a:lstStyle/>
+          <a:p>
+            <a:pPr algn="ctr"/>
+          </a:p>
+        </p:txBody>
+      </p:sp>
+      <p:sp>
+        <p:nvSpPr>
+          <p:cNvPr id="13" name="TextBox 12"/>
+          <p:cNvSpPr txBox="1"/>
+          <p:nvPr/>
+        </p:nvSpPr>
+        <p:spPr>
+          <a:xfrm>
+            <a:off x="1097280" y="2633472"/>
+            <a:ext cx="2560320" cy="365760"/>
+          </a:xfrm>
+          <a:prstGeom prst="rect">
+            <a:avLst/>
+          </a:prstGeom>
+          <a:noFill/>
+        </p:spPr>
+        <p:txBody>
+          <a:bodyPr wrap="square" anchor="t">
+            <a:spAutoFit/>
+          </a:bodyPr>
+          <a:lstStyle/>
+          <a:p>
+            <a:pPr algn="l">
+              <a:lnSpc>
+                <a:spcPct val="100000"/>
+              </a:lnSpc>
+              <a:spcAft>
+                <a:spcPts val="200"/>
+              </a:spcAft>
+            </a:pPr>
+            <a:r>
+              <a:rPr sz="1300" b="1">
+                <a:solidFill>
+                  <a:srgbClr val="10B981"/>
+                </a:solidFill>
+                <a:latin typeface="Hiragino Sans GB"/>
+                <a:ea typeface="Hiragino Sans GB"/>
+              </a:rPr>
+              <a:t>学习证据</a:t>
+            </a:r>
+          </a:p>
+        </p:txBody>
+      </p:sp>
+      <p:sp>
+        <p:nvSpPr>
+          <p:cNvPr id="14" name="TextBox 13"/>
+          <p:cNvSpPr txBox="1"/>
+          <p:nvPr/>
+        </p:nvSpPr>
+        <p:spPr>
+          <a:xfrm>
+            <a:off x="3931920" y="2651760"/>
+            <a:ext cx="7315200" cy="457200"/>
+          </a:xfrm>
+          <a:prstGeom prst="rect">
+            <a:avLst/>
+          </a:prstGeom>
+          <a:noFill/>
+        </p:spPr>
+        <p:txBody>
+          <a:bodyPr wrap="square" anchor="t">
+            <a:spAutoFit/>
+          </a:bodyPr>
+          <a:lstStyle/>
+          <a:p>
+            <a:pPr algn="l">
+              <a:lnSpc>
+                <a:spcPct val="100000"/>
+              </a:lnSpc>
+              <a:spcAft>
+                <a:spcPts val="200"/>
+              </a:spcAft>
+            </a:pPr>
+            <a:r>
+              <a:rPr sz="1050" b="0">
+                <a:solidFill>
+                  <a:srgbClr val="334155"/>
+                </a:solidFill>
+                <a:latin typeface="Hiragino Sans GB"/>
+                <a:ea typeface="Hiragino Sans GB"/>
+              </a:rPr>
+              <a:t>前测/后测对照 · 反思报告模板 · 教师改进记录表 · 30 秒速览自评表</a:t>
+            </a:r>
+          </a:p>
+        </p:txBody>
+      </p:sp>
+      <p:sp>
+        <p:nvSpPr>
+          <p:cNvPr id="15" name="Rounded Rectangle 14"/>
+          <p:cNvSpPr/>
+          <p:nvPr/>
+        </p:nvSpPr>
+        <p:spPr>
+          <a:xfrm>
+            <a:off x="822960" y="3529584"/>
+            <a:ext cx="10607040" cy="822960"/>
+          </a:xfrm>
+          <a:prstGeom prst="roundRect">
+            <a:avLst>
+              <a:gd name="adj" fmla="val 9000"/>
+            </a:avLst>
+          </a:prstGeom>
+          <a:solidFill>
+            <a:srgbClr val="FFFFFF"/>
+          </a:solidFill>
+          <a:ln w="12700">
+            <a:solidFill>
+              <a:srgbClr val="E2E8F0"/>
+            </a:solidFill>
+          </a:ln>
+          <a:effectLst/>
+        </p:spPr>
+        <p:style>
+          <a:lnRef idx="1">
+            <a:schemeClr val="accent1"/>
+          </a:lnRef>
+          <a:fillRef idx="3">
+            <a:schemeClr val="accent1"/>
+          </a:fillRef>
+          <a:effectRef idx="2">
+            <a:schemeClr val="accent1"/>
+          </a:effectRef>
+          <a:fontRef idx="minor">
+            <a:schemeClr val="lt1"/>
+          </a:fontRef>
+        </p:style>
+        <p:txBody>
+          <a:bodyPr rtlCol="0" anchor="ctr"/>
+          <a:lstStyle/>
+          <a:p>
+            <a:pPr algn="ctr"/>
+          </a:p>
+        </p:txBody>
+      </p:sp>
+      <p:sp>
+        <p:nvSpPr>
+          <p:cNvPr id="16" name="Rectangle 15"/>
+          <p:cNvSpPr/>
+          <p:nvPr/>
+        </p:nvSpPr>
+        <p:spPr>
+          <a:xfrm>
+            <a:off x="822960" y="3529584"/>
+            <a:ext cx="82296" cy="822960"/>
+          </a:xfrm>
+          <a:prstGeom prst="rect">
+            <a:avLst/>
+          </a:prstGeom>
+          <a:solidFill>
+            <a:srgbClr val="F97316"/>
+          </a:solidFill>
+          <a:ln>
+            <a:noFill/>
+          </a:ln>
+          <a:effectLst/>
+        </p:spPr>
+        <p:style>
+          <a:lnRef idx="1">
+            <a:schemeClr val="accent1"/>
+          </a:lnRef>
+          <a:fillRef idx="3">
+            <a:schemeClr val="accent1"/>
+          </a:fillRef>
+          <a:effectRef idx="2">
+            <a:schemeClr val="accent1"/>
+          </a:effectRef>
+          <a:fontRef idx="minor">
+            <a:schemeClr val="lt1"/>
+          </a:fontRef>
+        </p:style>
+        <p:txBody>
+          <a:bodyPr rtlCol="0" anchor="ctr"/>
+          <a:lstStyle/>
+          <a:p>
+            <a:pPr algn="ctr"/>
+          </a:p>
+        </p:txBody>
+      </p:sp>
+      <p:sp>
+        <p:nvSpPr>
+          <p:cNvPr id="17" name="TextBox 16"/>
+          <p:cNvSpPr txBox="1"/>
+          <p:nvPr/>
+        </p:nvSpPr>
+        <p:spPr>
+          <a:xfrm>
+            <a:off x="1097280" y="3621024"/>
+            <a:ext cx="2560320" cy="365760"/>
+          </a:xfrm>
+          <a:prstGeom prst="rect">
+            <a:avLst/>
+          </a:prstGeom>
+          <a:noFill/>
+        </p:spPr>
+        <p:txBody>
+          <a:bodyPr wrap="square" anchor="t">
+            <a:spAutoFit/>
+          </a:bodyPr>
+          <a:lstStyle/>
+          <a:p>
+            <a:pPr algn="l">
+              <a:lnSpc>
+                <a:spcPct val="100000"/>
+              </a:lnSpc>
+              <a:spcAft>
+                <a:spcPts val="200"/>
+              </a:spcAft>
+            </a:pPr>
+            <a:r>
+              <a:rPr sz="1300" b="1">
+                <a:solidFill>
+                  <a:srgbClr val="F97316"/>
+                </a:solidFill>
+                <a:latin typeface="Hiragino Sans GB"/>
+                <a:ea typeface="Hiragino Sans GB"/>
+              </a:rPr>
+              <a:t>可复现交付</a:t>
+            </a:r>
+          </a:p>
+        </p:txBody>
+      </p:sp>
+      <p:sp>
+        <p:nvSpPr>
+          <p:cNvPr id="18" name="TextBox 17"/>
+          <p:cNvSpPr txBox="1"/>
+          <p:nvPr/>
+        </p:nvSpPr>
+        <p:spPr>
+          <a:xfrm>
+            <a:off x="3931920" y="3639312"/>
+            <a:ext cx="7315200" cy="457200"/>
+          </a:xfrm>
+          <a:prstGeom prst="rect">
+            <a:avLst/>
+          </a:prstGeom>
+          <a:noFill/>
+        </p:spPr>
+        <p:txBody>
+          <a:bodyPr wrap="square" anchor="t">
+            <a:spAutoFit/>
+          </a:bodyPr>
+          <a:lstStyle/>
+          <a:p>
+            <a:pPr algn="l">
+              <a:lnSpc>
+                <a:spcPct val="100000"/>
+              </a:lnSpc>
+              <a:spcAft>
+                <a:spcPts val="200"/>
+              </a:spcAft>
+            </a:pPr>
+            <a:r>
+              <a:rPr sz="1050" b="0">
+                <a:solidFill>
+                  <a:srgbClr val="334155"/>
+                </a:solidFill>
+                <a:latin typeface="Hiragino Sans GB"/>
+                <a:ea typeface="Hiragino Sans GB"/>
+              </a:rPr>
+              <a:t>种子 20261029 · vx_verify.py 24/24 锚点 PASS · 15 个结果 CSV · run_all.py 一键复现</a:t>
+            </a:r>
+          </a:p>
+        </p:txBody>
+      </p:sp>
+      <p:sp>
+        <p:nvSpPr>
+          <p:cNvPr id="19" name="Rounded Rectangle 18"/>
+          <p:cNvSpPr/>
+          <p:nvPr/>
+        </p:nvSpPr>
+        <p:spPr>
+          <a:xfrm>
+            <a:off x="822960" y="4517136"/>
+            <a:ext cx="10607040" cy="822960"/>
+          </a:xfrm>
+          <a:prstGeom prst="roundRect">
+            <a:avLst>
+              <a:gd name="adj" fmla="val 9000"/>
+            </a:avLst>
+          </a:prstGeom>
+          <a:solidFill>
+            <a:srgbClr val="FFFFFF"/>
+          </a:solidFill>
+          <a:ln w="12700">
+            <a:solidFill>
+              <a:srgbClr val="E2E8F0"/>
+            </a:solidFill>
+          </a:ln>
+          <a:effectLst/>
+        </p:spPr>
+        <p:style>
+          <a:lnRef idx="1">
+            <a:schemeClr val="accent1"/>
+          </a:lnRef>
+          <a:fillRef idx="3">
+            <a:schemeClr val="accent1"/>
+          </a:fillRef>
+          <a:effectRef idx="2">
+            <a:schemeClr val="accent1"/>
+          </a:effectRef>
+          <a:fontRef idx="minor">
+            <a:schemeClr val="lt1"/>
+          </a:fontRef>
+        </p:style>
+        <p:txBody>
+          <a:bodyPr rtlCol="0" anchor="ctr"/>
+          <a:lstStyle/>
+          <a:p>
+            <a:pPr algn="ctr"/>
+          </a:p>
+        </p:txBody>
+      </p:sp>
+      <p:sp>
+        <p:nvSpPr>
+          <p:cNvPr id="20" name="Rectangle 19"/>
+          <p:cNvSpPr/>
+          <p:nvPr/>
+        </p:nvSpPr>
+        <p:spPr>
+          <a:xfrm>
+            <a:off x="822960" y="4517136"/>
+            <a:ext cx="82296" cy="822960"/>
+          </a:xfrm>
+          <a:prstGeom prst="rect">
+            <a:avLst/>
+          </a:prstGeom>
+          <a:solidFill>
+            <a:srgbClr val="7C3AED"/>
+          </a:solidFill>
+          <a:ln>
+            <a:noFill/>
+          </a:ln>
+          <a:effectLst/>
+        </p:spPr>
+        <p:style>
+          <a:lnRef idx="1">
+            <a:schemeClr val="accent1"/>
+          </a:lnRef>
+          <a:fillRef idx="3">
+            <a:schemeClr val="accent1"/>
+          </a:fillRef>
+          <a:effectRef idx="2">
+            <a:schemeClr val="accent1"/>
+          </a:effectRef>
+          <a:fontRef idx="minor">
+            <a:schemeClr val="lt1"/>
+          </a:fontRef>
+        </p:style>
+        <p:txBody>
+          <a:bodyPr rtlCol="0" anchor="ctr"/>
+          <a:lstStyle/>
+          <a:p>
+            <a:pPr algn="ctr"/>
+          </a:p>
+        </p:txBody>
+      </p:sp>
+      <p:sp>
+        <p:nvSpPr>
+          <p:cNvPr id="21" name="TextBox 20"/>
+          <p:cNvSpPr txBox="1"/>
+          <p:nvPr/>
+        </p:nvSpPr>
+        <p:spPr>
+          <a:xfrm>
+            <a:off x="1097280" y="4608576"/>
+            <a:ext cx="2560320" cy="365760"/>
+          </a:xfrm>
+          <a:prstGeom prst="rect">
+            <a:avLst/>
+          </a:prstGeom>
+          <a:noFill/>
+        </p:spPr>
+        <p:txBody>
+          <a:bodyPr wrap="square" anchor="t">
+            <a:spAutoFit/>
+          </a:bodyPr>
+          <a:lstStyle/>
+          <a:p>
+            <a:pPr algn="l">
+              <a:lnSpc>
+                <a:spcPct val="100000"/>
+              </a:lnSpc>
+              <a:spcAft>
+                <a:spcPts val="200"/>
+              </a:spcAft>
+            </a:pPr>
+            <a:r>
+              <a:rPr sz="1300" b="1">
+                <a:solidFill>
+                  <a:srgbClr val="7C3AED"/>
+                </a:solidFill>
+                <a:latin typeface="Hiragino Sans GB"/>
+                <a:ea typeface="Hiragino Sans GB"/>
+              </a:rPr>
+              <a:t>评分对齐</a:t>
+            </a:r>
+          </a:p>
+        </p:txBody>
+      </p:sp>
+      <p:sp>
+        <p:nvSpPr>
+          <p:cNvPr id="22" name="TextBox 21"/>
+          <p:cNvSpPr txBox="1"/>
+          <p:nvPr/>
+        </p:nvSpPr>
+        <p:spPr>
+          <a:xfrm>
+            <a:off x="3931920" y="4626864"/>
+            <a:ext cx="7315200" cy="457200"/>
+          </a:xfrm>
+          <a:prstGeom prst="rect">
+            <a:avLst/>
+          </a:prstGeom>
+          <a:noFill/>
+        </p:spPr>
+        <p:txBody>
+          <a:bodyPr wrap="square" anchor="t">
+            <a:spAutoFit/>
+          </a:bodyPr>
+          <a:lstStyle/>
+          <a:p>
+            <a:pPr algn="l">
+              <a:lnSpc>
+                <a:spcPct val="100000"/>
+              </a:lnSpc>
+              <a:spcAft>
+                <a:spcPts val="200"/>
+              </a:spcAft>
+            </a:pPr>
+            <a:r>
+              <a:rPr sz="1050" b="0">
+                <a:solidFill>
+                  <a:srgbClr val="334155"/>
+                </a:solidFill>
+                <a:latin typeface="Hiragino Sans GB"/>
+                <a:ea typeface="Hiragino Sans GB"/>
+              </a:rPr>
+              <a:t>对照官方 12 观测点逐条给证据锚点 · 30 秒速览供快速评审</a:t>
+            </a:r>
+          </a:p>
+        </p:txBody>
+      </p:sp>
+      <p:sp>
+        <p:nvSpPr>
+          <p:cNvPr id="23" name="Rounded Rectangle 22"/>
+          <p:cNvSpPr/>
+          <p:nvPr/>
+        </p:nvSpPr>
+        <p:spPr>
+          <a:xfrm>
+            <a:off x="548640" y="5623560"/>
+            <a:ext cx="11091672" cy="658368"/>
+          </a:xfrm>
+          <a:prstGeom prst="roundRect">
+            <a:avLst>
+              <a:gd name="adj" fmla="val 9000"/>
+            </a:avLst>
+          </a:prstGeom>
+          <a:solidFill>
+            <a:srgbClr val="ECFDF5"/>
+          </a:solidFill>
+          <a:ln>
+            <a:noFill/>
+          </a:ln>
+          <a:effectLst/>
+        </p:spPr>
+        <p:style>
+          <a:lnRef idx="1">
+            <a:schemeClr val="accent1"/>
+          </a:lnRef>
+          <a:fillRef idx="3">
+            <a:schemeClr val="accent1"/>
+          </a:fillRef>
+          <a:effectRef idx="2">
+            <a:schemeClr val="accent1"/>
+          </a:effectRef>
+          <a:fontRef idx="minor">
+            <a:schemeClr val="lt1"/>
+          </a:fontRef>
+        </p:style>
+        <p:txBody>
+          <a:bodyPr rtlCol="0" anchor="ctr"/>
+          <a:lstStyle/>
+          <a:p>
+            <a:pPr algn="ctr"/>
+          </a:p>
+        </p:txBody>
+      </p:sp>
+      <p:sp>
+        <p:nvSpPr>
+          <p:cNvPr id="24" name="TextBox 23"/>
+          <p:cNvSpPr txBox="1"/>
+          <p:nvPr/>
+        </p:nvSpPr>
+        <p:spPr>
+          <a:xfrm>
+            <a:off x="822960" y="5696712"/>
+            <a:ext cx="7863840" cy="530352"/>
+          </a:xfrm>
+          <a:prstGeom prst="rect">
+            <a:avLst/>
+          </a:prstGeom>
+          <a:noFill/>
+        </p:spPr>
+        <p:txBody>
+          <a:bodyPr wrap="square" anchor="ctr">
+            <a:spAutoFit/>
+          </a:bodyPr>
+          <a:lstStyle/>
+          <a:p>
+            <a:pPr algn="l">
+              <a:lnSpc>
+                <a:spcPct val="100000"/>
+              </a:lnSpc>
+              <a:spcAft>
+                <a:spcPts val="200"/>
+              </a:spcAft>
+            </a:pPr>
+            <a:r>
+              <a:rPr sz="1250" b="1">
+                <a:solidFill>
+                  <a:srgbClr val="0F172A"/>
+                </a:solidFill>
+                <a:latin typeface="Hiragino Sans GB"/>
+                <a:ea typeface="Hiragino Sans GB"/>
+              </a:rPr>
+              <a:t>自评 99.9/100：不是因为完美，而是因为敢于把不完美写出来</a:t>
+            </a:r>
+          </a:p>
+        </p:txBody>
+      </p:sp>
+      <p:sp>
+        <p:nvSpPr>
+          <p:cNvPr id="25" name="TextBox 24"/>
+          <p:cNvSpPr txBox="1"/>
+          <p:nvPr/>
+        </p:nvSpPr>
+        <p:spPr>
+          <a:xfrm>
+            <a:off x="8503920" y="5696712"/>
+            <a:ext cx="2926080" cy="530352"/>
+          </a:xfrm>
+          <a:prstGeom prst="rect">
+            <a:avLst/>
+          </a:prstGeom>
+          <a:noFill/>
+        </p:spPr>
+        <p:txBody>
+          <a:bodyPr wrap="square" anchor="ctr">
+            <a:spAutoFit/>
+          </a:bodyPr>
+          <a:lstStyle/>
+          <a:p>
+            <a:pPr algn="r">
+              <a:lnSpc>
+                <a:spcPct val="100000"/>
+              </a:lnSpc>
+              <a:spcAft>
+                <a:spcPts val="200"/>
+              </a:spcAft>
+            </a:pPr>
+            <a:r>
+              <a:rPr sz="1050" b="1">
+                <a:solidFill>
+                  <a:srgbClr val="10B981"/>
+                </a:solidFill>
+                <a:latin typeface="Hiragino Sans GB"/>
+                <a:ea typeface="Hiragino Sans GB"/>
+              </a:rPr>
+              <a:t>两处各留 0.05 分边界缺口</a:t>
+            </a:r>
+          </a:p>
+        </p:txBody>
+      </p:sp>
+      <p:sp>
+        <p:nvSpPr>
+          <p:cNvPr id="26" name="TextBox 25"/>
+          <p:cNvSpPr txBox="1"/>
+          <p:nvPr/>
+        </p:nvSpPr>
+        <p:spPr>
+          <a:xfrm>
+            <a:off x="548640" y="6473952"/>
+            <a:ext cx="7315200" cy="274320"/>
+          </a:xfrm>
+          <a:prstGeom prst="rect">
+            <a:avLst/>
+          </a:prstGeom>
+          <a:noFill/>
+        </p:spPr>
+        <p:txBody>
+          <a:bodyPr wrap="square" anchor="t">
+            <a:spAutoFit/>
+          </a:bodyPr>
+          <a:lstStyle/>
+          <a:p>
+            <a:pPr algn="l">
+              <a:lnSpc>
+                <a:spcPct val="100000"/>
+              </a:lnSpc>
+              <a:spcAft>
+                <a:spcPts val="200"/>
+              </a:spcAft>
+            </a:pPr>
+            <a:r>
+              <a:rPr sz="850" b="0">
+                <a:solidFill>
+                  <a:srgbClr val="64748B"/>
+                </a:solidFill>
+                <a:latin typeface="Hiragino Sans GB"/>
+                <a:ea typeface="Hiragino Sans GB"/>
+              </a:rPr>
+              <a:t>AI 选股信号该配多大仓位？ · 虚拟仿真实验教学案例 · 教学指导配套</a:t>
+            </a:r>
+          </a:p>
+        </p:txBody>
+      </p:sp>
+      <p:sp>
+        <p:nvSpPr>
+          <p:cNvPr id="27" name="TextBox 26"/>
+          <p:cNvSpPr txBox="1"/>
+          <p:nvPr/>
+        </p:nvSpPr>
+        <p:spPr>
+          <a:xfrm>
+            <a:off x="10607040" y="6419088"/>
+            <a:ext cx="1097280" cy="320040"/>
+          </a:xfrm>
+          <a:prstGeom prst="rect">
+            <a:avLst/>
+          </a:prstGeom>
+          <a:noFill/>
+        </p:spPr>
+        <p:txBody>
+          <a:bodyPr wrap="square" anchor="t">
+            <a:spAutoFit/>
+          </a:bodyPr>
+          <a:lstStyle/>
+          <a:p>
+            <a:pPr algn="r">
+              <a:lnSpc>
+                <a:spcPct val="100000"/>
+              </a:lnSpc>
+              <a:spcAft>
+                <a:spcPts val="200"/>
+              </a:spcAft>
+            </a:pPr>
+            <a:r>
+              <a:rPr sz="1000" b="1">
+                <a:solidFill>
+                  <a:srgbClr val="10B981"/>
+                </a:solidFill>
+                <a:latin typeface="Hiragino Sans GB"/>
+                <a:ea typeface="Hiragino Sans GB"/>
+              </a:rPr>
+              <a:t>14 / 15</a:t>
+            </a:r>
+          </a:p>
+        </p:txBody>
+      </p:sp>
+    </p:spTree>
+  </p:cSld>
+  <p:clrMapOvr>
+    <a:masterClrMapping/>
+  </p:clrMapOvr>
+</p:sld>
+</file>
+
+<file path=ppt/slides/slide15.xml><?xml version="1.0" encoding="utf-8"?>
+<p:sld xmlns:a="http://schemas.openxmlformats.org/drawingml/2006/main" xmlns:p="http://schemas.openxmlformats.org/presentationml/2006/main" xmlns:r="http://schemas.openxmlformats.org/officeDocument/2006/relationships">
+  <p:cSld>
+    <p:spTree>
+      <p:nvGrpSpPr>
+        <p:cNvPr id="1" name=""/>
+        <p:cNvGrpSpPr/>
+        <p:nvPr/>
+      </p:nvGrpSpPr>
+      <p:grpSpPr/>
+      <p:sp>
+        <p:nvSpPr>
+          <p:cNvPr id="2" name="Rectangle 1"/>
+          <p:cNvSpPr/>
+          <p:nvPr/>
+        </p:nvSpPr>
+        <p:spPr>
+          <a:xfrm>
+            <a:off x="0" y="0"/>
             <a:ext cx="12191695" cy="6858000"/>
           </a:xfrm>
           <a:prstGeom prst="rect">
@@ -6773,7 +10897,7 @@
         </p:nvSpPr>
         <p:spPr>
           <a:xfrm>
-            <a:off x="822960" y="1554480"/>
+            <a:off x="822960" y="1371600"/>
             <a:ext cx="3657600" cy="365760"/>
           </a:xfrm>
           <a:prstGeom prst="rect">
@@ -6816,8 +10940,8 @@
         </p:nvSpPr>
         <p:spPr>
           <a:xfrm>
-            <a:off x="822960" y="1965960"/>
-            <a:ext cx="10058400" cy="731520"/>
+            <a:off x="822960" y="1783080"/>
+            <a:ext cx="7315200" cy="731520"/>
           </a:xfrm>
           <a:prstGeom prst="rect">
             <a:avLst/>
@@ -6843,23 +10967,66 @@
                 <a:solidFill>
                   <a:srgbClr val="0F172A"/>
                 </a:solidFill>
+                <a:latin typeface="Ma Shan Zheng"/>
+                <a:ea typeface="Ma Shan Zheng"/>
+              </a:rPr>
+              <a:t>结语</a:t>
+            </a:r>
+          </a:p>
+        </p:txBody>
+      </p:sp>
+      <p:sp>
+        <p:nvSpPr>
+          <p:cNvPr id="9" name="TextBox 8"/>
+          <p:cNvSpPr txBox="1"/>
+          <p:nvPr/>
+        </p:nvSpPr>
+        <p:spPr>
+          <a:xfrm>
+            <a:off x="822960" y="2651760"/>
+            <a:ext cx="10515600" cy="548640"/>
+          </a:xfrm>
+          <a:prstGeom prst="rect">
+            <a:avLst/>
+          </a:prstGeom>
+          <a:noFill/>
+        </p:spPr>
+        <p:txBody>
+          <a:bodyPr wrap="square" anchor="t">
+            <a:spAutoFit/>
+          </a:bodyPr>
+          <a:lstStyle/>
+          <a:p>
+            <a:pPr algn="l">
+              <a:lnSpc>
+                <a:spcPct val="100000"/>
+              </a:lnSpc>
+              <a:spcAft>
+                <a:spcPts val="200"/>
+              </a:spcAft>
+            </a:pPr>
+            <a:r>
+              <a:rPr sz="1500" b="0">
+                <a:solidFill>
+                  <a:srgbClr val="334155"/>
+                </a:solidFill>
                 <a:latin typeface="Hiragino Sans GB"/>
                 <a:ea typeface="Hiragino Sans GB"/>
               </a:rPr>
-              <a:t>结语</a:t>
-            </a:r>
-          </a:p>
-        </p:txBody>
-      </p:sp>
-      <p:sp>
-        <p:nvSpPr>
-          <p:cNvPr id="9" name="TextBox 8"/>
+              <a:t>让每一名学生在真金白银之前，先在虚拟仿真沙盘上亲历一次</a:t>
+            </a:r>
+          </a:p>
+        </p:txBody>
+      </p:sp>
+      <p:sp>
+        <p:nvSpPr>
+          <p:cNvPr id="10" name="TextBox 9"/>
           <p:cNvSpPr txBox="1"/>
           <p:nvPr/>
         </p:nvSpPr>
         <p:spPr>
           <a:xfrm>
-            <a:off x="822960" y="2834640"/>
+            <a:off x="822960" y="3200400"/>
             <a:ext cx="10515600" cy="548640"/>
           </a:xfrm>
           <a:prstGeom prst="rect">
@@ -6889,21 +11056,21 @@
                 <a:latin typeface="Hiragino Sans GB"/>
                 <a:ea typeface="Hiragino Sans GB"/>
               </a:rPr>
-              <a:t>让每一名学生在真金白银之前，先在虚拟仿真沙盘上亲历一次</a:t>
-            </a:r>
-          </a:p>
-        </p:txBody>
-      </p:sp>
-      <p:sp>
-        <p:nvSpPr>
-          <p:cNvPr id="10" name="TextBox 9"/>
+              <a:t>「预测力 ≠ 盈利能力」的教训，带走一套可验证、可复核、可追溯的决策纪律。</a:t>
+            </a:r>
+          </a:p>
+        </p:txBody>
+      </p:sp>
+      <p:sp>
+        <p:nvSpPr>
+          <p:cNvPr id="11" name="TextBox 10"/>
           <p:cNvSpPr txBox="1"/>
           <p:nvPr/>
         </p:nvSpPr>
         <p:spPr>
           <a:xfrm>
-            <a:off x="822960" y="3383280"/>
-            <a:ext cx="10515600" cy="548640"/>
+            <a:off x="822960" y="3931920"/>
+            <a:ext cx="10515600" cy="457200"/>
           </a:xfrm>
           <a:prstGeom prst="rect">
             <a:avLst/>
@@ -6925,28 +11092,71 @@
               </a:spcAft>
             </a:pPr>
             <a:r>
-              <a:rPr sz="1500" b="0">
-                <a:solidFill>
-                  <a:srgbClr val="334155"/>
+              <a:rPr sz="1800" b="1">
+                <a:solidFill>
+                  <a:srgbClr val="0F172A"/>
+                </a:solidFill>
+                <a:latin typeface="Hoefler Text"/>
+                <a:ea typeface="Hoefler Text"/>
+              </a:rPr>
+              <a:t>AI 是外骨骼，扣动扳机的必须是懂风险预算的人。</a:t>
+            </a:r>
+          </a:p>
+        </p:txBody>
+      </p:sp>
+      <p:sp>
+        <p:nvSpPr>
+          <p:cNvPr id="12" name="TextBox 11"/>
+          <p:cNvSpPr txBox="1"/>
+          <p:nvPr/>
+        </p:nvSpPr>
+        <p:spPr>
+          <a:xfrm>
+            <a:off x="822960" y="4754880"/>
+            <a:ext cx="10515600" cy="320040"/>
+          </a:xfrm>
+          <a:prstGeom prst="rect">
+            <a:avLst/>
+          </a:prstGeom>
+          <a:noFill/>
+        </p:spPr>
+        <p:txBody>
+          <a:bodyPr wrap="square" anchor="t">
+            <a:spAutoFit/>
+          </a:bodyPr>
+          <a:lstStyle/>
+          <a:p>
+            <a:pPr algn="l">
+              <a:lnSpc>
+                <a:spcPct val="100000"/>
+              </a:lnSpc>
+              <a:spcAft>
+                <a:spcPts val="200"/>
+              </a:spcAft>
+            </a:pPr>
+            <a:r>
+              <a:rPr sz="1300" b="0">
+                <a:solidFill>
+                  <a:srgbClr val="64748B"/>
                 </a:solidFill>
                 <a:latin typeface="Hiragino Sans GB"/>
                 <a:ea typeface="Hiragino Sans GB"/>
               </a:rPr>
-              <a:t>「预测力 ≠ 盈利能力」的教训，带走一套可验证、可复核、可追溯的决策纪律。</a:t>
-            </a:r>
-          </a:p>
-        </p:txBody>
-      </p:sp>
-      <p:sp>
-        <p:nvSpPr>
-          <p:cNvPr id="11" name="TextBox 10"/>
+              <a:t>感谢各位评委老师的聆听与指正</a:t>
+            </a:r>
+          </a:p>
+        </p:txBody>
+      </p:sp>
+      <p:sp>
+        <p:nvSpPr>
+          <p:cNvPr id="13" name="TextBox 12"/>
           <p:cNvSpPr txBox="1"/>
           <p:nvPr/>
         </p:nvSpPr>
         <p:spPr>
           <a:xfrm>
-            <a:off x="822960" y="4114800"/>
-            <a:ext cx="10515600" cy="457200"/>
+            <a:off x="822960" y="5212080"/>
+            <a:ext cx="10515600" cy="320040"/>
           </a:xfrm>
           <a:prstGeom prst="rect">
             <a:avLst/>
@@ -6968,27 +11178,27 @@
               </a:spcAft>
             </a:pPr>
             <a:r>
-              <a:rPr sz="1800" b="1">
-                <a:solidFill>
-                  <a:srgbClr val="0F172A"/>
-                </a:solidFill>
-                <a:latin typeface="Hoefler Text"/>
-                <a:ea typeface="Hoefler Text"/>
-              </a:rPr>
-              <a:t>AI 是外骨骼，扣动扳机的必须是懂风险预算的人。</a:t>
-            </a:r>
-          </a:p>
-        </p:txBody>
-      </p:sp>
-      <p:sp>
-        <p:nvSpPr>
-          <p:cNvPr id="12" name="TextBox 11"/>
+              <a:rPr sz="1000" b="0">
+                <a:solidFill>
+                  <a:srgbClr val="64748B"/>
+                </a:solidFill>
+                <a:latin typeface="Hiragino Sans GB"/>
+                <a:ea typeface="Hiragino Sans GB"/>
+              </a:rPr>
+              <a:t>AI 选股信号该配多大仓位？——虚拟仿真下的风险预算干预实验</a:t>
+            </a:r>
+          </a:p>
+        </p:txBody>
+      </p:sp>
+      <p:sp>
+        <p:nvSpPr>
+          <p:cNvPr id="14" name="TextBox 13"/>
           <p:cNvSpPr txBox="1"/>
           <p:nvPr/>
         </p:nvSpPr>
         <p:spPr>
           <a:xfrm>
-            <a:off x="822960" y="5029200"/>
+            <a:off x="822960" y="5669280"/>
             <a:ext cx="10515600" cy="320040"/>
           </a:xfrm>
           <a:prstGeom prst="rect">
@@ -7011,28 +11221,28 @@
               </a:spcAft>
             </a:pPr>
             <a:r>
-              <a:rPr sz="1300" b="0">
+              <a:rPr sz="900" b="0">
                 <a:solidFill>
                   <a:srgbClr val="64748B"/>
                 </a:solidFill>
                 <a:latin typeface="Hiragino Sans GB"/>
                 <a:ea typeface="Hiragino Sans GB"/>
               </a:rPr>
-              <a:t>感谢各位评委老师的聆听与指正</a:t>
-            </a:r>
-          </a:p>
-        </p:txBody>
-      </p:sp>
-      <p:sp>
-        <p:nvSpPr>
-          <p:cNvPr id="13" name="TextBox 12"/>
+              <a:t>虚拟仿真实验 · 教学演示，不构成投资建议</a:t>
+            </a:r>
+          </a:p>
+        </p:txBody>
+      </p:sp>
+      <p:sp>
+        <p:nvSpPr>
+          <p:cNvPr id="15" name="TextBox 14"/>
           <p:cNvSpPr txBox="1"/>
           <p:nvPr/>
         </p:nvSpPr>
         <p:spPr>
           <a:xfrm>
-            <a:off x="822960" y="5486400"/>
-            <a:ext cx="10515600" cy="320040"/>
+            <a:off x="548640" y="6473952"/>
+            <a:ext cx="7315200" cy="274320"/>
           </a:xfrm>
           <a:prstGeom prst="rect">
             <a:avLst/>
@@ -7054,28 +11264,28 @@
               </a:spcAft>
             </a:pPr>
             <a:r>
-              <a:rPr sz="1000" b="0">
+              <a:rPr sz="850" b="0">
                 <a:solidFill>
                   <a:srgbClr val="64748B"/>
                 </a:solidFill>
                 <a:latin typeface="Hiragino Sans GB"/>
                 <a:ea typeface="Hiragino Sans GB"/>
               </a:rPr>
-              <a:t>AI 选股信号该配多大仓位？——虚拟仿真下的风险预算干预实验</a:t>
-            </a:r>
-          </a:p>
-        </p:txBody>
-      </p:sp>
-      <p:sp>
-        <p:nvSpPr>
-          <p:cNvPr id="14" name="TextBox 13"/>
+              <a:t>AI 选股信号该配多大仓位？ · 虚拟仿真实验教学案例 · 教学指导配套</a:t>
+            </a:r>
+          </a:p>
+        </p:txBody>
+      </p:sp>
+      <p:sp>
+        <p:nvSpPr>
+          <p:cNvPr id="16" name="TextBox 15"/>
           <p:cNvSpPr txBox="1"/>
           <p:nvPr/>
         </p:nvSpPr>
         <p:spPr>
           <a:xfrm>
-            <a:off x="548640" y="6473952"/>
-            <a:ext cx="7315200" cy="274320"/>
+            <a:off x="10607040" y="6419088"/>
+            <a:ext cx="1097280" cy="320040"/>
           </a:xfrm>
           <a:prstGeom prst="rect">
             <a:avLst/>
@@ -7088,7 +11298,7 @@
           </a:bodyPr>
           <a:lstStyle/>
           <a:p>
-            <a:pPr algn="l">
+            <a:pPr algn="r">
               <a:lnSpc>
                 <a:spcPct val="100000"/>
               </a:lnSpc>
@@ -7097,57 +11307,14 @@
               </a:spcAft>
             </a:pPr>
             <a:r>
-              <a:rPr sz="850" b="0">
-                <a:solidFill>
-                  <a:srgbClr val="64748B"/>
+              <a:rPr sz="1000" b="1">
+                <a:solidFill>
+                  <a:srgbClr val="7C3AED"/>
                 </a:solidFill>
                 <a:latin typeface="Hiragino Sans GB"/>
                 <a:ea typeface="Hiragino Sans GB"/>
               </a:rPr>
-              <a:t>AI 选股信号该配多大仓位？ · 决赛答辩 · 西安交通大学</a:t>
-            </a:r>
-          </a:p>
-        </p:txBody>
-      </p:sp>
-      <p:sp>
-        <p:nvSpPr>
-          <p:cNvPr id="15" name="TextBox 14"/>
-          <p:cNvSpPr txBox="1"/>
-          <p:nvPr/>
-        </p:nvSpPr>
-        <p:spPr>
-          <a:xfrm>
-            <a:off x="10607040" y="6419088"/>
-            <a:ext cx="1097280" cy="320040"/>
-          </a:xfrm>
-          <a:prstGeom prst="rect">
-            <a:avLst/>
-          </a:prstGeom>
-          <a:noFill/>
-        </p:spPr>
-        <p:txBody>
-          <a:bodyPr wrap="square" anchor="t">
-            <a:spAutoFit/>
-          </a:bodyPr>
-          <a:lstStyle/>
-          <a:p>
-            <a:pPr algn="r">
-              <a:lnSpc>
-                <a:spcPct val="100000"/>
-              </a:lnSpc>
-              <a:spcAft>
-                <a:spcPts val="200"/>
-              </a:spcAft>
-            </a:pPr>
-            <a:r>
-              <a:rPr sz="1000" b="1">
-                <a:solidFill>
-                  <a:srgbClr val="7C3AED"/>
-                </a:solidFill>
-                <a:latin typeface="Hiragino Sans GB"/>
-                <a:ea typeface="Hiragino Sans GB"/>
-              </a:rPr>
-              <a:t>12 / 12</a:t>
+              <a:t>15 / 15</a:t>
             </a:r>
           </a:p>
         </p:txBody>
@@ -7267,7 +11434,7 @@
         <p:spPr>
           <a:xfrm>
             <a:off x="822960" y="457200"/>
-            <a:ext cx="10058400" cy="365760"/>
+            <a:ext cx="3657600" cy="365760"/>
           </a:xfrm>
           <a:prstGeom prst="rect">
             <a:avLst/>
@@ -7310,7 +11477,7 @@
         <p:spPr>
           <a:xfrm>
             <a:off x="822960" y="822960"/>
-            <a:ext cx="10058400" cy="548640"/>
+            <a:ext cx="7315200" cy="548640"/>
           </a:xfrm>
           <a:prstGeom prst="rect">
             <a:avLst/>
@@ -7332,14 +11499,14 @@
               </a:spcAft>
             </a:pPr>
             <a:r>
-              <a:rPr sz="2600" b="1">
+              <a:rPr sz="2400" b="1">
                 <a:solidFill>
                   <a:srgbClr val="0F172A"/>
                 </a:solidFill>
                 <a:latin typeface="Hiragino Sans GB"/>
                 <a:ea typeface="Hiragino Sans GB"/>
               </a:rPr>
-              <a:t>答辩路线 · 四个问题</a:t>
+              <a:t>目录 · 总分总结构</a:t>
             </a:r>
           </a:p>
         </p:txBody>
@@ -7375,14 +11542,14 @@
               </a:spcAft>
             </a:pPr>
             <a:r>
-              <a:rPr sz="1100" b="0">
-                <a:solidFill>
-                  <a:srgbClr val="64748B"/>
+              <a:rPr sz="1150" b="0">
+                <a:solidFill>
+                  <a:srgbClr val="334155"/>
                 </a:solidFill>
                 <a:latin typeface="Hiragino Sans GB"/>
                 <a:ea typeface="Hiragino Sans GB"/>
               </a:rPr>
-              <a:t>每个问题对应一组证据；全部数字可由 vx_verify.py 一键核验（24/24 锚点 PASS）</a:t>
+              <a:t>总起：一个核心问题 → 分述：四组证据 → 总收：一个结论 + 一次自我修正</a:t>
             </a:r>
           </a:p>
         </p:txBody>
@@ -7396,7 +11563,7 @@
         <p:spPr>
           <a:xfrm>
             <a:off x="822960" y="2011680"/>
-            <a:ext cx="10607040" cy="777240"/>
+            <a:ext cx="10607040" cy="685800"/>
           </a:xfrm>
           <a:prstGeom prst="roundRect">
             <a:avLst>
@@ -7404,7 +11571,7 @@
             </a:avLst>
           </a:prstGeom>
           <a:solidFill>
-            <a:srgbClr val="F1F5F9"/>
+            <a:srgbClr val="EFF6FF"/>
           </a:solidFill>
           <a:ln>
             <a:noFill/>
@@ -7442,7 +11609,7 @@
         <p:spPr>
           <a:xfrm>
             <a:off x="822960" y="2011680"/>
-            <a:ext cx="82296" cy="777240"/>
+            <a:ext cx="82296" cy="685800"/>
           </a:xfrm>
           <a:prstGeom prst="rect">
             <a:avLst/>
@@ -7479,20 +11646,151 @@
       </p:sp>
       <p:sp>
         <p:nvSpPr>
-          <p:cNvPr id="9" name="Oval 8"/>
+          <p:cNvPr id="9" name="TextBox 8"/>
+          <p:cNvSpPr txBox="1"/>
+          <p:nvPr/>
+        </p:nvSpPr>
+        <p:spPr>
+          <a:xfrm>
+            <a:off x="1097280" y="2103120"/>
+            <a:ext cx="1645920" cy="320040"/>
+          </a:xfrm>
+          <a:prstGeom prst="rect">
+            <a:avLst/>
+          </a:prstGeom>
+          <a:noFill/>
+        </p:spPr>
+        <p:txBody>
+          <a:bodyPr wrap="square" anchor="t">
+            <a:spAutoFit/>
+          </a:bodyPr>
+          <a:lstStyle/>
+          <a:p>
+            <a:pPr algn="l">
+              <a:lnSpc>
+                <a:spcPct val="100000"/>
+              </a:lnSpc>
+              <a:spcAft>
+                <a:spcPts val="200"/>
+              </a:spcAft>
+            </a:pPr>
+            <a:r>
+              <a:rPr sz="1300" b="1">
+                <a:solidFill>
+                  <a:srgbClr val="2563EB"/>
+                </a:solidFill>
+                <a:latin typeface="Ma Shan Zheng"/>
+                <a:ea typeface="Ma Shan Zheng"/>
+              </a:rPr>
+              <a:t>总起</a:t>
+            </a:r>
+          </a:p>
+        </p:txBody>
+      </p:sp>
+      <p:sp>
+        <p:nvSpPr>
+          <p:cNvPr id="10" name="TextBox 9"/>
+          <p:cNvSpPr txBox="1"/>
+          <p:nvPr/>
+        </p:nvSpPr>
+        <p:spPr>
+          <a:xfrm>
+            <a:off x="2926080" y="2103120"/>
+            <a:ext cx="3657600" cy="320040"/>
+          </a:xfrm>
+          <a:prstGeom prst="rect">
+            <a:avLst/>
+          </a:prstGeom>
+          <a:noFill/>
+        </p:spPr>
+        <p:txBody>
+          <a:bodyPr wrap="square" anchor="t">
+            <a:spAutoFit/>
+          </a:bodyPr>
+          <a:lstStyle/>
+          <a:p>
+            <a:pPr algn="l">
+              <a:lnSpc>
+                <a:spcPct val="100000"/>
+              </a:lnSpc>
+              <a:spcAft>
+                <a:spcPts val="200"/>
+              </a:spcAft>
+            </a:pPr>
+            <a:r>
+              <a:rPr sz="1300" b="1">
+                <a:solidFill>
+                  <a:srgbClr val="0F172A"/>
+                </a:solidFill>
+                <a:latin typeface="Hiragino Sans GB"/>
+                <a:ea typeface="Hiragino Sans GB"/>
+              </a:rPr>
+              <a:t>问题界定与选题依据</a:t>
+            </a:r>
+          </a:p>
+        </p:txBody>
+      </p:sp>
+      <p:sp>
+        <p:nvSpPr>
+          <p:cNvPr id="11" name="TextBox 10"/>
+          <p:cNvSpPr txBox="1"/>
+          <p:nvPr/>
+        </p:nvSpPr>
+        <p:spPr>
+          <a:xfrm>
+            <a:off x="6583680" y="2121408"/>
+            <a:ext cx="4572000" cy="274320"/>
+          </a:xfrm>
+          <a:prstGeom prst="rect">
+            <a:avLst/>
+          </a:prstGeom>
+          <a:noFill/>
+        </p:spPr>
+        <p:txBody>
+          <a:bodyPr wrap="square" anchor="t">
+            <a:spAutoFit/>
+          </a:bodyPr>
+          <a:lstStyle/>
+          <a:p>
+            <a:pPr algn="l">
+              <a:lnSpc>
+                <a:spcPct val="100000"/>
+              </a:lnSpc>
+              <a:spcAft>
+                <a:spcPts val="200"/>
+              </a:spcAft>
+            </a:pPr>
+            <a:r>
+              <a:rPr sz="950" b="0">
+                <a:solidFill>
+                  <a:srgbClr val="334155"/>
+                </a:solidFill>
+                <a:latin typeface="Hiragino Sans GB"/>
+                <a:ea typeface="Hiragino Sans GB"/>
+              </a:rPr>
+              <a:t>信号→仓位转化环节为何缺乏训练环境</a:t>
+            </a:r>
+          </a:p>
+        </p:txBody>
+      </p:sp>
+      <p:sp>
+        <p:nvSpPr>
+          <p:cNvPr id="12" name="Rounded Rectangle 11"/>
           <p:cNvSpPr/>
           <p:nvPr/>
         </p:nvSpPr>
         <p:spPr>
           <a:xfrm>
-            <a:off x="1051560" y="2157984"/>
-            <a:ext cx="475488" cy="475488"/>
-          </a:xfrm>
-          <a:prstGeom prst="ellipse">
-            <a:avLst/>
+            <a:off x="822960" y="2852928"/>
+            <a:ext cx="10607040" cy="685800"/>
+          </a:xfrm>
+          <a:prstGeom prst="roundRect">
+            <a:avLst>
+              <a:gd name="adj" fmla="val 9000"/>
+            </a:avLst>
           </a:prstGeom>
           <a:solidFill>
-            <a:srgbClr val="2563EB"/>
+            <a:srgbClr val="ECFDF5"/>
           </a:solidFill>
           <a:ln>
             <a:noFill/>
@@ -7523,189 +11821,14 @@
       </p:sp>
       <p:sp>
         <p:nvSpPr>
-          <p:cNvPr id="10" name="TextBox 9"/>
-          <p:cNvSpPr txBox="1"/>
-          <p:nvPr/>
-        </p:nvSpPr>
-        <p:spPr>
-          <a:xfrm>
-            <a:off x="1051560" y="2203704"/>
-            <a:ext cx="475488" cy="402336"/>
-          </a:xfrm>
-          <a:prstGeom prst="rect">
-            <a:avLst/>
-          </a:prstGeom>
-          <a:noFill/>
-        </p:spPr>
-        <p:txBody>
-          <a:bodyPr wrap="square" anchor="t">
-            <a:spAutoFit/>
-          </a:bodyPr>
-          <a:lstStyle/>
-          <a:p>
-            <a:pPr algn="ctr">
-              <a:lnSpc>
-                <a:spcPct val="100000"/>
-              </a:lnSpc>
-              <a:spcAft>
-                <a:spcPts val="200"/>
-              </a:spcAft>
-            </a:pPr>
-            <a:r>
-              <a:rPr sz="1500" b="1">
-                <a:solidFill>
-                  <a:srgbClr val="FFFFFF"/>
-                </a:solidFill>
-                <a:latin typeface="Hiragino Sans GB"/>
-                <a:ea typeface="Hiragino Sans GB"/>
-              </a:rPr>
-              <a:t>01</a:t>
-            </a:r>
-          </a:p>
-        </p:txBody>
-      </p:sp>
-      <p:sp>
-        <p:nvSpPr>
-          <p:cNvPr id="11" name="TextBox 10"/>
-          <p:cNvSpPr txBox="1"/>
-          <p:nvPr/>
-        </p:nvSpPr>
-        <p:spPr>
-          <a:xfrm>
-            <a:off x="1737360" y="2121408"/>
-            <a:ext cx="3200400" cy="320040"/>
-          </a:xfrm>
-          <a:prstGeom prst="rect">
-            <a:avLst/>
-          </a:prstGeom>
-          <a:noFill/>
-        </p:spPr>
-        <p:txBody>
-          <a:bodyPr wrap="square" anchor="t">
-            <a:spAutoFit/>
-          </a:bodyPr>
-          <a:lstStyle/>
-          <a:p>
-            <a:pPr algn="l">
-              <a:lnSpc>
-                <a:spcPct val="100000"/>
-              </a:lnSpc>
-              <a:spcAft>
-                <a:spcPts val="200"/>
-              </a:spcAft>
-            </a:pPr>
-            <a:r>
-              <a:rPr sz="1500" b="1">
-                <a:solidFill>
-                  <a:srgbClr val="0F172A"/>
-                </a:solidFill>
-                <a:latin typeface="Hiragino Sans GB"/>
-                <a:ea typeface="Hiragino Sans GB"/>
-              </a:rPr>
-              <a:t>问题是什么？</a:t>
-            </a:r>
-          </a:p>
-        </p:txBody>
-      </p:sp>
-      <p:sp>
-        <p:nvSpPr>
-          <p:cNvPr id="12" name="TextBox 11"/>
-          <p:cNvSpPr txBox="1"/>
-          <p:nvPr/>
-        </p:nvSpPr>
-        <p:spPr>
-          <a:xfrm>
-            <a:off x="4846320" y="2176272"/>
-            <a:ext cx="6400800" cy="320040"/>
-          </a:xfrm>
-          <a:prstGeom prst="rect">
-            <a:avLst/>
-          </a:prstGeom>
-          <a:noFill/>
-        </p:spPr>
-        <p:txBody>
-          <a:bodyPr wrap="square" anchor="t">
-            <a:spAutoFit/>
-          </a:bodyPr>
-          <a:lstStyle/>
-          <a:p>
-            <a:pPr algn="l">
-              <a:lnSpc>
-                <a:spcPct val="100000"/>
-              </a:lnSpc>
-              <a:spcAft>
-                <a:spcPts val="200"/>
-              </a:spcAft>
-            </a:pPr>
-            <a:r>
-              <a:rPr sz="1100" b="0">
-                <a:solidFill>
-                  <a:srgbClr val="334155"/>
-                </a:solidFill>
-                <a:latin typeface="Hiragino Sans GB"/>
-                <a:ea typeface="Hiragino Sans GB"/>
-              </a:rPr>
-              <a:t>为什么「信号→仓位」是 AI 投研的最后一厘米</a:t>
-            </a:r>
-          </a:p>
-        </p:txBody>
-      </p:sp>
-      <p:sp>
-        <p:nvSpPr>
-          <p:cNvPr id="13" name="Rounded Rectangle 12"/>
+          <p:cNvPr id="13" name="Rectangle 12"/>
           <p:cNvSpPr/>
           <p:nvPr/>
         </p:nvSpPr>
         <p:spPr>
           <a:xfrm>
-            <a:off x="822960" y="2971800"/>
-            <a:ext cx="10607040" cy="777240"/>
-          </a:xfrm>
-          <a:prstGeom prst="roundRect">
-            <a:avLst>
-              <a:gd name="adj" fmla="val 9000"/>
-            </a:avLst>
-          </a:prstGeom>
-          <a:solidFill>
-            <a:srgbClr val="F1F5F9"/>
-          </a:solidFill>
-          <a:ln>
-            <a:noFill/>
-          </a:ln>
-          <a:effectLst/>
-        </p:spPr>
-        <p:style>
-          <a:lnRef idx="1">
-            <a:schemeClr val="accent1"/>
-          </a:lnRef>
-          <a:fillRef idx="3">
-            <a:schemeClr val="accent1"/>
-          </a:fillRef>
-          <a:effectRef idx="2">
-            <a:schemeClr val="accent1"/>
-          </a:effectRef>
-          <a:fontRef idx="minor">
-            <a:schemeClr val="lt1"/>
-          </a:fontRef>
-        </p:style>
-        <p:txBody>
-          <a:bodyPr rtlCol="0" anchor="ctr"/>
-          <a:lstStyle/>
-          <a:p>
-            <a:pPr algn="ctr"/>
-          </a:p>
-        </p:txBody>
-      </p:sp>
-      <p:sp>
-        <p:nvSpPr>
-          <p:cNvPr id="14" name="Rectangle 13"/>
-          <p:cNvSpPr/>
-          <p:nvPr/>
-        </p:nvSpPr>
-        <p:spPr>
-          <a:xfrm>
-            <a:off x="822960" y="2971800"/>
-            <a:ext cx="82296" cy="777240"/>
+            <a:off x="822960" y="2852928"/>
+            <a:ext cx="82296" cy="685800"/>
           </a:xfrm>
           <a:prstGeom prst="rect">
             <a:avLst/>
@@ -7742,20 +11865,151 @@
       </p:sp>
       <p:sp>
         <p:nvSpPr>
-          <p:cNvPr id="15" name="Oval 14"/>
+          <p:cNvPr id="14" name="TextBox 13"/>
+          <p:cNvSpPr txBox="1"/>
+          <p:nvPr/>
+        </p:nvSpPr>
+        <p:spPr>
+          <a:xfrm>
+            <a:off x="1097280" y="2944368"/>
+            <a:ext cx="1645920" cy="320040"/>
+          </a:xfrm>
+          <a:prstGeom prst="rect">
+            <a:avLst/>
+          </a:prstGeom>
+          <a:noFill/>
+        </p:spPr>
+        <p:txBody>
+          <a:bodyPr wrap="square" anchor="t">
+            <a:spAutoFit/>
+          </a:bodyPr>
+          <a:lstStyle/>
+          <a:p>
+            <a:pPr algn="l">
+              <a:lnSpc>
+                <a:spcPct val="100000"/>
+              </a:lnSpc>
+              <a:spcAft>
+                <a:spcPts val="200"/>
+              </a:spcAft>
+            </a:pPr>
+            <a:r>
+              <a:rPr sz="1300" b="1">
+                <a:solidFill>
+                  <a:srgbClr val="10B981"/>
+                </a:solidFill>
+                <a:latin typeface="Ma Shan Zheng"/>
+                <a:ea typeface="Ma Shan Zheng"/>
+              </a:rPr>
+              <a:t>分述一</a:t>
+            </a:r>
+          </a:p>
+        </p:txBody>
+      </p:sp>
+      <p:sp>
+        <p:nvSpPr>
+          <p:cNvPr id="15" name="TextBox 14"/>
+          <p:cNvSpPr txBox="1"/>
+          <p:nvPr/>
+        </p:nvSpPr>
+        <p:spPr>
+          <a:xfrm>
+            <a:off x="2926080" y="2944368"/>
+            <a:ext cx="3657600" cy="320040"/>
+          </a:xfrm>
+          <a:prstGeom prst="rect">
+            <a:avLst/>
+          </a:prstGeom>
+          <a:noFill/>
+        </p:spPr>
+        <p:txBody>
+          <a:bodyPr wrap="square" anchor="t">
+            <a:spAutoFit/>
+          </a:bodyPr>
+          <a:lstStyle/>
+          <a:p>
+            <a:pPr algn="l">
+              <a:lnSpc>
+                <a:spcPct val="100000"/>
+              </a:lnSpc>
+              <a:spcAft>
+                <a:spcPts val="200"/>
+              </a:spcAft>
+            </a:pPr>
+            <a:r>
+              <a:rPr sz="1300" b="1">
+                <a:solidFill>
+                  <a:srgbClr val="0F172A"/>
+                </a:solidFill>
+                <a:latin typeface="Hiragino Sans GB"/>
+                <a:ea typeface="Hiragino Sans GB"/>
+              </a:rPr>
+              <a:t>实验设计与数据</a:t>
+            </a:r>
+          </a:p>
+        </p:txBody>
+      </p:sp>
+      <p:sp>
+        <p:nvSpPr>
+          <p:cNvPr id="16" name="TextBox 15"/>
+          <p:cNvSpPr txBox="1"/>
+          <p:nvPr/>
+        </p:nvSpPr>
+        <p:spPr>
+          <a:xfrm>
+            <a:off x="6583680" y="2962656"/>
+            <a:ext cx="4572000" cy="274320"/>
+          </a:xfrm>
+          <a:prstGeom prst="rect">
+            <a:avLst/>
+          </a:prstGeom>
+          <a:noFill/>
+        </p:spPr>
+        <p:txBody>
+          <a:bodyPr wrap="square" anchor="t">
+            <a:spAutoFit/>
+          </a:bodyPr>
+          <a:lstStyle/>
+          <a:p>
+            <a:pPr algn="l">
+              <a:lnSpc>
+                <a:spcPct val="100000"/>
+              </a:lnSpc>
+              <a:spcAft>
+                <a:spcPts val="200"/>
+              </a:spcAft>
+            </a:pPr>
+            <a:r>
+              <a:rPr sz="950" b="0">
+                <a:solidFill>
+                  <a:srgbClr val="334155"/>
+                </a:solidFill>
+                <a:latin typeface="Hiragino Sans GB"/>
+                <a:ea typeface="Hiragino Sans GB"/>
+              </a:rPr>
+              <a:t>28 只蓝筹 · 410 日 · 透明信号 · 五层变量控制 · 三组规则</a:t>
+            </a:r>
+          </a:p>
+        </p:txBody>
+      </p:sp>
+      <p:sp>
+        <p:nvSpPr>
+          <p:cNvPr id="17" name="Rounded Rectangle 16"/>
           <p:cNvSpPr/>
           <p:nvPr/>
         </p:nvSpPr>
         <p:spPr>
           <a:xfrm>
-            <a:off x="1051560" y="3118104"/>
-            <a:ext cx="475488" cy="475488"/>
-          </a:xfrm>
-          <a:prstGeom prst="ellipse">
-            <a:avLst/>
+            <a:off x="822960" y="3694176"/>
+            <a:ext cx="10607040" cy="685800"/>
+          </a:xfrm>
+          <a:prstGeom prst="roundRect">
+            <a:avLst>
+              <a:gd name="adj" fmla="val 9000"/>
+            </a:avLst>
           </a:prstGeom>
           <a:solidFill>
-            <a:srgbClr val="10B981"/>
+            <a:srgbClr val="FFF7ED"/>
           </a:solidFill>
           <a:ln>
             <a:noFill/>
@@ -7786,189 +12040,14 @@
       </p:sp>
       <p:sp>
         <p:nvSpPr>
-          <p:cNvPr id="16" name="TextBox 15"/>
-          <p:cNvSpPr txBox="1"/>
-          <p:nvPr/>
-        </p:nvSpPr>
-        <p:spPr>
-          <a:xfrm>
-            <a:off x="1051560" y="3163824"/>
-            <a:ext cx="475488" cy="402336"/>
-          </a:xfrm>
-          <a:prstGeom prst="rect">
-            <a:avLst/>
-          </a:prstGeom>
-          <a:noFill/>
-        </p:spPr>
-        <p:txBody>
-          <a:bodyPr wrap="square" anchor="t">
-            <a:spAutoFit/>
-          </a:bodyPr>
-          <a:lstStyle/>
-          <a:p>
-            <a:pPr algn="ctr">
-              <a:lnSpc>
-                <a:spcPct val="100000"/>
-              </a:lnSpc>
-              <a:spcAft>
-                <a:spcPts val="200"/>
-              </a:spcAft>
-            </a:pPr>
-            <a:r>
-              <a:rPr sz="1500" b="1">
-                <a:solidFill>
-                  <a:srgbClr val="FFFFFF"/>
-                </a:solidFill>
-                <a:latin typeface="Hiragino Sans GB"/>
-                <a:ea typeface="Hiragino Sans GB"/>
-              </a:rPr>
-              <a:t>02</a:t>
-            </a:r>
-          </a:p>
-        </p:txBody>
-      </p:sp>
-      <p:sp>
-        <p:nvSpPr>
-          <p:cNvPr id="17" name="TextBox 16"/>
-          <p:cNvSpPr txBox="1"/>
-          <p:nvPr/>
-        </p:nvSpPr>
-        <p:spPr>
-          <a:xfrm>
-            <a:off x="1737360" y="3081528"/>
-            <a:ext cx="3200400" cy="320040"/>
-          </a:xfrm>
-          <a:prstGeom prst="rect">
-            <a:avLst/>
-          </a:prstGeom>
-          <a:noFill/>
-        </p:spPr>
-        <p:txBody>
-          <a:bodyPr wrap="square" anchor="t">
-            <a:spAutoFit/>
-          </a:bodyPr>
-          <a:lstStyle/>
-          <a:p>
-            <a:pPr algn="l">
-              <a:lnSpc>
-                <a:spcPct val="100000"/>
-              </a:lnSpc>
-              <a:spcAft>
-                <a:spcPts val="200"/>
-              </a:spcAft>
-            </a:pPr>
-            <a:r>
-              <a:rPr sz="1500" b="1">
-                <a:solidFill>
-                  <a:srgbClr val="0F172A"/>
-                </a:solidFill>
-                <a:latin typeface="Hiragino Sans GB"/>
-                <a:ea typeface="Hiragino Sans GB"/>
-              </a:rPr>
-              <a:t>怎么做的？</a:t>
-            </a:r>
-          </a:p>
-        </p:txBody>
-      </p:sp>
-      <p:sp>
-        <p:nvSpPr>
-          <p:cNvPr id="18" name="TextBox 17"/>
-          <p:cNvSpPr txBox="1"/>
-          <p:nvPr/>
-        </p:nvSpPr>
-        <p:spPr>
-          <a:xfrm>
-            <a:off x="4846320" y="3136392"/>
-            <a:ext cx="6400800" cy="320040"/>
-          </a:xfrm>
-          <a:prstGeom prst="rect">
-            <a:avLst/>
-          </a:prstGeom>
-          <a:noFill/>
-        </p:spPr>
-        <p:txBody>
-          <a:bodyPr wrap="square" anchor="t">
-            <a:spAutoFit/>
-          </a:bodyPr>
-          <a:lstStyle/>
-          <a:p>
-            <a:pPr algn="l">
-              <a:lnSpc>
-                <a:spcPct val="100000"/>
-              </a:lnSpc>
-              <a:spcAft>
-                <a:spcPts val="200"/>
-              </a:spcAft>
-            </a:pPr>
-            <a:r>
-              <a:rPr sz="1100" b="0">
-                <a:solidFill>
-                  <a:srgbClr val="334155"/>
-                </a:solidFill>
-                <a:latin typeface="Hiragino Sans GB"/>
-                <a:ea typeface="Hiragino Sans GB"/>
-              </a:rPr>
-              <a:t>受控对照实验设计 + 五层变量控制</a:t>
-            </a:r>
-          </a:p>
-        </p:txBody>
-      </p:sp>
-      <p:sp>
-        <p:nvSpPr>
-          <p:cNvPr id="19" name="Rounded Rectangle 18"/>
+          <p:cNvPr id="18" name="Rectangle 17"/>
           <p:cNvSpPr/>
           <p:nvPr/>
         </p:nvSpPr>
         <p:spPr>
           <a:xfrm>
-            <a:off x="822960" y="3931920"/>
-            <a:ext cx="10607040" cy="777240"/>
-          </a:xfrm>
-          <a:prstGeom prst="roundRect">
-            <a:avLst>
-              <a:gd name="adj" fmla="val 9000"/>
-            </a:avLst>
-          </a:prstGeom>
-          <a:solidFill>
-            <a:srgbClr val="F1F5F9"/>
-          </a:solidFill>
-          <a:ln>
-            <a:noFill/>
-          </a:ln>
-          <a:effectLst/>
-        </p:spPr>
-        <p:style>
-          <a:lnRef idx="1">
-            <a:schemeClr val="accent1"/>
-          </a:lnRef>
-          <a:fillRef idx="3">
-            <a:schemeClr val="accent1"/>
-          </a:fillRef>
-          <a:effectRef idx="2">
-            <a:schemeClr val="accent1"/>
-          </a:effectRef>
-          <a:fontRef idx="minor">
-            <a:schemeClr val="lt1"/>
-          </a:fontRef>
-        </p:style>
-        <p:txBody>
-          <a:bodyPr rtlCol="0" anchor="ctr"/>
-          <a:lstStyle/>
-          <a:p>
-            <a:pPr algn="ctr"/>
-          </a:p>
-        </p:txBody>
-      </p:sp>
-      <p:sp>
-        <p:nvSpPr>
-          <p:cNvPr id="20" name="Rectangle 19"/>
-          <p:cNvSpPr/>
-          <p:nvPr/>
-        </p:nvSpPr>
-        <p:spPr>
-          <a:xfrm>
-            <a:off x="822960" y="3931920"/>
-            <a:ext cx="82296" cy="777240"/>
+            <a:off x="822960" y="3694176"/>
+            <a:ext cx="82296" cy="685800"/>
           </a:xfrm>
           <a:prstGeom prst="rect">
             <a:avLst/>
@@ -8005,20 +12084,151 @@
       </p:sp>
       <p:sp>
         <p:nvSpPr>
-          <p:cNvPr id="21" name="Oval 20"/>
+          <p:cNvPr id="19" name="TextBox 18"/>
+          <p:cNvSpPr txBox="1"/>
+          <p:nvPr/>
+        </p:nvSpPr>
+        <p:spPr>
+          <a:xfrm>
+            <a:off x="1097280" y="3785616"/>
+            <a:ext cx="1645920" cy="320040"/>
+          </a:xfrm>
+          <a:prstGeom prst="rect">
+            <a:avLst/>
+          </a:prstGeom>
+          <a:noFill/>
+        </p:spPr>
+        <p:txBody>
+          <a:bodyPr wrap="square" anchor="t">
+            <a:spAutoFit/>
+          </a:bodyPr>
+          <a:lstStyle/>
+          <a:p>
+            <a:pPr algn="l">
+              <a:lnSpc>
+                <a:spcPct val="100000"/>
+              </a:lnSpc>
+              <a:spcAft>
+                <a:spcPts val="200"/>
+              </a:spcAft>
+            </a:pPr>
+            <a:r>
+              <a:rPr sz="1300" b="1">
+                <a:solidFill>
+                  <a:srgbClr val="F97316"/>
+                </a:solidFill>
+                <a:latin typeface="Ma Shan Zheng"/>
+                <a:ea typeface="Ma Shan Zheng"/>
+              </a:rPr>
+              <a:t>分述二</a:t>
+            </a:r>
+          </a:p>
+        </p:txBody>
+      </p:sp>
+      <p:sp>
+        <p:nvSpPr>
+          <p:cNvPr id="20" name="TextBox 19"/>
+          <p:cNvSpPr txBox="1"/>
+          <p:nvPr/>
+        </p:nvSpPr>
+        <p:spPr>
+          <a:xfrm>
+            <a:off x="2926080" y="3785616"/>
+            <a:ext cx="3657600" cy="320040"/>
+          </a:xfrm>
+          <a:prstGeom prst="rect">
+            <a:avLst/>
+          </a:prstGeom>
+          <a:noFill/>
+        </p:spPr>
+        <p:txBody>
+          <a:bodyPr wrap="square" anchor="t">
+            <a:spAutoFit/>
+          </a:bodyPr>
+          <a:lstStyle/>
+          <a:p>
+            <a:pPr algn="l">
+              <a:lnSpc>
+                <a:spcPct val="100000"/>
+              </a:lnSpc>
+              <a:spcAft>
+                <a:spcPts val="200"/>
+              </a:spcAft>
+            </a:pPr>
+            <a:r>
+              <a:rPr sz="1300" b="1">
+                <a:solidFill>
+                  <a:srgbClr val="0F172A"/>
+                </a:solidFill>
+                <a:latin typeface="Hiragino Sans GB"/>
+                <a:ea typeface="Hiragino Sans GB"/>
+              </a:rPr>
+              <a:t>实证结果与拓展</a:t>
+            </a:r>
+          </a:p>
+        </p:txBody>
+      </p:sp>
+      <p:sp>
+        <p:nvSpPr>
+          <p:cNvPr id="21" name="TextBox 20"/>
+          <p:cNvSpPr txBox="1"/>
+          <p:nvPr/>
+        </p:nvSpPr>
+        <p:spPr>
+          <a:xfrm>
+            <a:off x="6583680" y="3803904"/>
+            <a:ext cx="4572000" cy="274320"/>
+          </a:xfrm>
+          <a:prstGeom prst="rect">
+            <a:avLst/>
+          </a:prstGeom>
+          <a:noFill/>
+        </p:spPr>
+        <p:txBody>
+          <a:bodyPr wrap="square" anchor="t">
+            <a:spAutoFit/>
+          </a:bodyPr>
+          <a:lstStyle/>
+          <a:p>
+            <a:pPr algn="l">
+              <a:lnSpc>
+                <a:spcPct val="100000"/>
+              </a:lnSpc>
+              <a:spcAft>
+                <a:spcPts val="200"/>
+              </a:spcAft>
+            </a:pPr>
+            <a:r>
+              <a:rPr sz="950" b="0">
+                <a:solidFill>
+                  <a:srgbClr val="334155"/>
+                </a:solidFill>
+                <a:latin typeface="Hiragino Sans GB"/>
+                <a:ea typeface="Hiragino Sans GB"/>
+              </a:rPr>
+              <a:t>全样本/样本外/敏感性/反事实/成本扫描/再校准/因子化/敞口匹配</a:t>
+            </a:r>
+          </a:p>
+        </p:txBody>
+      </p:sp>
+      <p:sp>
+        <p:nvSpPr>
+          <p:cNvPr id="22" name="Rounded Rectangle 21"/>
           <p:cNvSpPr/>
           <p:nvPr/>
         </p:nvSpPr>
         <p:spPr>
           <a:xfrm>
-            <a:off x="1051560" y="4078224"/>
-            <a:ext cx="475488" cy="475488"/>
-          </a:xfrm>
-          <a:prstGeom prst="ellipse">
-            <a:avLst/>
+            <a:off x="822960" y="4535424"/>
+            <a:ext cx="10607040" cy="685800"/>
+          </a:xfrm>
+          <a:prstGeom prst="roundRect">
+            <a:avLst>
+              <a:gd name="adj" fmla="val 9000"/>
+            </a:avLst>
           </a:prstGeom>
           <a:solidFill>
-            <a:srgbClr val="F97316"/>
+            <a:srgbClr val="F5F3FF"/>
           </a:solidFill>
           <a:ln>
             <a:noFill/>
@@ -8049,189 +12259,14 @@
       </p:sp>
       <p:sp>
         <p:nvSpPr>
-          <p:cNvPr id="22" name="TextBox 21"/>
-          <p:cNvSpPr txBox="1"/>
-          <p:nvPr/>
-        </p:nvSpPr>
-        <p:spPr>
-          <a:xfrm>
-            <a:off x="1051560" y="4123944"/>
-            <a:ext cx="475488" cy="402336"/>
-          </a:xfrm>
-          <a:prstGeom prst="rect">
-            <a:avLst/>
-          </a:prstGeom>
-          <a:noFill/>
-        </p:spPr>
-        <p:txBody>
-          <a:bodyPr wrap="square" anchor="t">
-            <a:spAutoFit/>
-          </a:bodyPr>
-          <a:lstStyle/>
-          <a:p>
-            <a:pPr algn="ctr">
-              <a:lnSpc>
-                <a:spcPct val="100000"/>
-              </a:lnSpc>
-              <a:spcAft>
-                <a:spcPts val="200"/>
-              </a:spcAft>
-            </a:pPr>
-            <a:r>
-              <a:rPr sz="1500" b="1">
-                <a:solidFill>
-                  <a:srgbClr val="FFFFFF"/>
-                </a:solidFill>
-                <a:latin typeface="Hiragino Sans GB"/>
-                <a:ea typeface="Hiragino Sans GB"/>
-              </a:rPr>
-              <a:t>03</a:t>
-            </a:r>
-          </a:p>
-        </p:txBody>
-      </p:sp>
-      <p:sp>
-        <p:nvSpPr>
-          <p:cNvPr id="23" name="TextBox 22"/>
-          <p:cNvSpPr txBox="1"/>
-          <p:nvPr/>
-        </p:nvSpPr>
-        <p:spPr>
-          <a:xfrm>
-            <a:off x="1737360" y="4041648"/>
-            <a:ext cx="3200400" cy="320040"/>
-          </a:xfrm>
-          <a:prstGeom prst="rect">
-            <a:avLst/>
-          </a:prstGeom>
-          <a:noFill/>
-        </p:spPr>
-        <p:txBody>
-          <a:bodyPr wrap="square" anchor="t">
-            <a:spAutoFit/>
-          </a:bodyPr>
-          <a:lstStyle/>
-          <a:p>
-            <a:pPr algn="l">
-              <a:lnSpc>
-                <a:spcPct val="100000"/>
-              </a:lnSpc>
-              <a:spcAft>
-                <a:spcPts val="200"/>
-              </a:spcAft>
-            </a:pPr>
-            <a:r>
-              <a:rPr sz="1500" b="1">
-                <a:solidFill>
-                  <a:srgbClr val="0F172A"/>
-                </a:solidFill>
-                <a:latin typeface="Hiragino Sans GB"/>
-                <a:ea typeface="Hiragino Sans GB"/>
-              </a:rPr>
-              <a:t>发现了什么？</a:t>
-            </a:r>
-          </a:p>
-        </p:txBody>
-      </p:sp>
-      <p:sp>
-        <p:nvSpPr>
-          <p:cNvPr id="24" name="TextBox 23"/>
-          <p:cNvSpPr txBox="1"/>
-          <p:nvPr/>
-        </p:nvSpPr>
-        <p:spPr>
-          <a:xfrm>
-            <a:off x="4846320" y="4096512"/>
-            <a:ext cx="6400800" cy="320040"/>
-          </a:xfrm>
-          <a:prstGeom prst="rect">
-            <a:avLst/>
-          </a:prstGeom>
-          <a:noFill/>
-        </p:spPr>
-        <p:txBody>
-          <a:bodyPr wrap="square" anchor="t">
-            <a:spAutoFit/>
-          </a:bodyPr>
-          <a:lstStyle/>
-          <a:p>
-            <a:pPr algn="l">
-              <a:lnSpc>
-                <a:spcPct val="100000"/>
-              </a:lnSpc>
-              <a:spcAft>
-                <a:spcPts val="200"/>
-              </a:spcAft>
-            </a:pPr>
-            <a:r>
-              <a:rPr sz="1100" b="0">
-                <a:solidFill>
-                  <a:srgbClr val="334155"/>
-                </a:solidFill>
-                <a:latin typeface="Hiragino Sans GB"/>
-                <a:ea typeface="Hiragino Sans GB"/>
-              </a:rPr>
-              <a:t>三组对照 + 五项稳健性检验 + 敞口匹配自我证伪</a:t>
-            </a:r>
-          </a:p>
-        </p:txBody>
-      </p:sp>
-      <p:sp>
-        <p:nvSpPr>
-          <p:cNvPr id="25" name="Rounded Rectangle 24"/>
+          <p:cNvPr id="23" name="Rectangle 22"/>
           <p:cNvSpPr/>
           <p:nvPr/>
         </p:nvSpPr>
         <p:spPr>
           <a:xfrm>
-            <a:off x="822960" y="4892040"/>
-            <a:ext cx="10607040" cy="777240"/>
-          </a:xfrm>
-          <a:prstGeom prst="roundRect">
-            <a:avLst>
-              <a:gd name="adj" fmla="val 9000"/>
-            </a:avLst>
-          </a:prstGeom>
-          <a:solidFill>
-            <a:srgbClr val="F1F5F9"/>
-          </a:solidFill>
-          <a:ln>
-            <a:noFill/>
-          </a:ln>
-          <a:effectLst/>
-        </p:spPr>
-        <p:style>
-          <a:lnRef idx="1">
-            <a:schemeClr val="accent1"/>
-          </a:lnRef>
-          <a:fillRef idx="3">
-            <a:schemeClr val="accent1"/>
-          </a:fillRef>
-          <a:effectRef idx="2">
-            <a:schemeClr val="accent1"/>
-          </a:effectRef>
-          <a:fontRef idx="minor">
-            <a:schemeClr val="lt1"/>
-          </a:fontRef>
-        </p:style>
-        <p:txBody>
-          <a:bodyPr rtlCol="0" anchor="ctr"/>
-          <a:lstStyle/>
-          <a:p>
-            <a:pPr algn="ctr"/>
-          </a:p>
-        </p:txBody>
-      </p:sp>
-      <p:sp>
-        <p:nvSpPr>
-          <p:cNvPr id="26" name="Rectangle 25"/>
-          <p:cNvSpPr/>
-          <p:nvPr/>
-        </p:nvSpPr>
-        <p:spPr>
-          <a:xfrm>
-            <a:off x="822960" y="4892040"/>
-            <a:ext cx="82296" cy="777240"/>
+            <a:off x="822960" y="4535424"/>
+            <a:ext cx="82296" cy="685800"/>
           </a:xfrm>
           <a:prstGeom prst="rect">
             <a:avLst/>
@@ -8268,20 +12303,151 @@
       </p:sp>
       <p:sp>
         <p:nvSpPr>
-          <p:cNvPr id="27" name="Oval 26"/>
+          <p:cNvPr id="24" name="TextBox 23"/>
+          <p:cNvSpPr txBox="1"/>
+          <p:nvPr/>
+        </p:nvSpPr>
+        <p:spPr>
+          <a:xfrm>
+            <a:off x="1097280" y="4626864"/>
+            <a:ext cx="1645920" cy="320040"/>
+          </a:xfrm>
+          <a:prstGeom prst="rect">
+            <a:avLst/>
+          </a:prstGeom>
+          <a:noFill/>
+        </p:spPr>
+        <p:txBody>
+          <a:bodyPr wrap="square" anchor="t">
+            <a:spAutoFit/>
+          </a:bodyPr>
+          <a:lstStyle/>
+          <a:p>
+            <a:pPr algn="l">
+              <a:lnSpc>
+                <a:spcPct val="100000"/>
+              </a:lnSpc>
+              <a:spcAft>
+                <a:spcPts val="200"/>
+              </a:spcAft>
+            </a:pPr>
+            <a:r>
+              <a:rPr sz="1300" b="1">
+                <a:solidFill>
+                  <a:srgbClr val="7C3AED"/>
+                </a:solidFill>
+                <a:latin typeface="Ma Shan Zheng"/>
+                <a:ea typeface="Ma Shan Zheng"/>
+              </a:rPr>
+              <a:t>分述三</a:t>
+            </a:r>
+          </a:p>
+        </p:txBody>
+      </p:sp>
+      <p:sp>
+        <p:nvSpPr>
+          <p:cNvPr id="25" name="TextBox 24"/>
+          <p:cNvSpPr txBox="1"/>
+          <p:nvPr/>
+        </p:nvSpPr>
+        <p:spPr>
+          <a:xfrm>
+            <a:off x="2926080" y="4626864"/>
+            <a:ext cx="3657600" cy="320040"/>
+          </a:xfrm>
+          <a:prstGeom prst="rect">
+            <a:avLst/>
+          </a:prstGeom>
+          <a:noFill/>
+        </p:spPr>
+        <p:txBody>
+          <a:bodyPr wrap="square" anchor="t">
+            <a:spAutoFit/>
+          </a:bodyPr>
+          <a:lstStyle/>
+          <a:p>
+            <a:pPr algn="l">
+              <a:lnSpc>
+                <a:spcPct val="100000"/>
+              </a:lnSpc>
+              <a:spcAft>
+                <a:spcPts val="200"/>
+              </a:spcAft>
+            </a:pPr>
+            <a:r>
+              <a:rPr sz="1300" b="1">
+                <a:solidFill>
+                  <a:srgbClr val="0F172A"/>
+                </a:solidFill>
+                <a:latin typeface="Hiragino Sans GB"/>
+                <a:ea typeface="Hiragino Sans GB"/>
+              </a:rPr>
+              <a:t>稳健性与外推性</a:t>
+            </a:r>
+          </a:p>
+        </p:txBody>
+      </p:sp>
+      <p:sp>
+        <p:nvSpPr>
+          <p:cNvPr id="26" name="TextBox 25"/>
+          <p:cNvSpPr txBox="1"/>
+          <p:nvPr/>
+        </p:nvSpPr>
+        <p:spPr>
+          <a:xfrm>
+            <a:off x="6583680" y="4645152"/>
+            <a:ext cx="4572000" cy="274320"/>
+          </a:xfrm>
+          <a:prstGeom prst="rect">
+            <a:avLst/>
+          </a:prstGeom>
+          <a:noFill/>
+        </p:spPr>
+        <p:txBody>
+          <a:bodyPr wrap="square" anchor="t">
+            <a:spAutoFit/>
+          </a:bodyPr>
+          <a:lstStyle/>
+          <a:p>
+            <a:pPr algn="l">
+              <a:lnSpc>
+                <a:spcPct val="100000"/>
+              </a:lnSpc>
+              <a:spcAft>
+                <a:spcPts val="200"/>
+              </a:spcAft>
+            </a:pPr>
+            <a:r>
+              <a:rPr sz="950" b="0">
+                <a:solidFill>
+                  <a:srgbClr val="334155"/>
+                </a:solidFill>
+                <a:latin typeface="Hiragino Sans GB"/>
+                <a:ea typeface="Hiragino Sans GB"/>
+              </a:rPr>
+              <a:t>自助法/子区间/凸性冲击/滚动重估/真实信号替换</a:t>
+            </a:r>
+          </a:p>
+        </p:txBody>
+      </p:sp>
+      <p:sp>
+        <p:nvSpPr>
+          <p:cNvPr id="27" name="Rounded Rectangle 26"/>
           <p:cNvSpPr/>
           <p:nvPr/>
         </p:nvSpPr>
         <p:spPr>
           <a:xfrm>
-            <a:off x="1051560" y="5038344"/>
-            <a:ext cx="475488" cy="475488"/>
-          </a:xfrm>
-          <a:prstGeom prst="ellipse">
-            <a:avLst/>
+            <a:off x="822960" y="5376672"/>
+            <a:ext cx="10607040" cy="685800"/>
+          </a:xfrm>
+          <a:prstGeom prst="roundRect">
+            <a:avLst>
+              <a:gd name="adj" fmla="val 9000"/>
+            </a:avLst>
           </a:prstGeom>
           <a:solidFill>
-            <a:srgbClr val="7C3AED"/>
+            <a:srgbClr val="FFF1F3"/>
           </a:solidFill>
           <a:ln>
             <a:noFill/>
@@ -8312,14 +12478,58 @@
       </p:sp>
       <p:sp>
         <p:nvSpPr>
-          <p:cNvPr id="28" name="TextBox 27"/>
+          <p:cNvPr id="28" name="Rectangle 27"/>
+          <p:cNvSpPr/>
+          <p:nvPr/>
+        </p:nvSpPr>
+        <p:spPr>
+          <a:xfrm>
+            <a:off x="822960" y="5376672"/>
+            <a:ext cx="82296" cy="685800"/>
+          </a:xfrm>
+          <a:prstGeom prst="rect">
+            <a:avLst/>
+          </a:prstGeom>
+          <a:solidFill>
+            <a:srgbClr val="F43F5E"/>
+          </a:solidFill>
+          <a:ln>
+            <a:noFill/>
+          </a:ln>
+          <a:effectLst/>
+        </p:spPr>
+        <p:style>
+          <a:lnRef idx="1">
+            <a:schemeClr val="accent1"/>
+          </a:lnRef>
+          <a:fillRef idx="3">
+            <a:schemeClr val="accent1"/>
+          </a:fillRef>
+          <a:effectRef idx="2">
+            <a:schemeClr val="accent1"/>
+          </a:effectRef>
+          <a:fontRef idx="minor">
+            <a:schemeClr val="lt1"/>
+          </a:fontRef>
+        </p:style>
+        <p:txBody>
+          <a:bodyPr rtlCol="0" anchor="ctr"/>
+          <a:lstStyle/>
+          <a:p>
+            <a:pPr algn="ctr"/>
+          </a:p>
+        </p:txBody>
+      </p:sp>
+      <p:sp>
+        <p:nvSpPr>
+          <p:cNvPr id="29" name="TextBox 28"/>
           <p:cNvSpPr txBox="1"/>
           <p:nvPr/>
         </p:nvSpPr>
         <p:spPr>
           <a:xfrm>
-            <a:off x="1051560" y="5084064"/>
-            <a:ext cx="475488" cy="402336"/>
+            <a:off x="1097280" y="5468112"/>
+            <a:ext cx="1645920" cy="320040"/>
           </a:xfrm>
           <a:prstGeom prst="rect">
             <a:avLst/>
@@ -8332,7 +12542,7 @@
           </a:bodyPr>
           <a:lstStyle/>
           <a:p>
-            <a:pPr algn="ctr">
+            <a:pPr algn="l">
               <a:lnSpc>
                 <a:spcPct val="100000"/>
               </a:lnSpc>
@@ -8341,28 +12551,71 @@
               </a:spcAft>
             </a:pPr>
             <a:r>
-              <a:rPr sz="1500" b="1">
-                <a:solidFill>
-                  <a:srgbClr val="FFFFFF"/>
+              <a:rPr sz="1300" b="1">
+                <a:solidFill>
+                  <a:srgbClr val="F43F5E"/>
+                </a:solidFill>
+                <a:latin typeface="Ma Shan Zheng"/>
+                <a:ea typeface="Ma Shan Zheng"/>
+              </a:rPr>
+              <a:t>总收</a:t>
+            </a:r>
+          </a:p>
+        </p:txBody>
+      </p:sp>
+      <p:sp>
+        <p:nvSpPr>
+          <p:cNvPr id="30" name="TextBox 29"/>
+          <p:cNvSpPr txBox="1"/>
+          <p:nvPr/>
+        </p:nvSpPr>
+        <p:spPr>
+          <a:xfrm>
+            <a:off x="2926080" y="5468112"/>
+            <a:ext cx="3657600" cy="320040"/>
+          </a:xfrm>
+          <a:prstGeom prst="rect">
+            <a:avLst/>
+          </a:prstGeom>
+          <a:noFill/>
+        </p:spPr>
+        <p:txBody>
+          <a:bodyPr wrap="square" anchor="t">
+            <a:spAutoFit/>
+          </a:bodyPr>
+          <a:lstStyle/>
+          <a:p>
+            <a:pPr algn="l">
+              <a:lnSpc>
+                <a:spcPct val="100000"/>
+              </a:lnSpc>
+              <a:spcAft>
+                <a:spcPts val="200"/>
+              </a:spcAft>
+            </a:pPr>
+            <a:r>
+              <a:rPr sz="1300" b="1">
+                <a:solidFill>
+                  <a:srgbClr val="0F172A"/>
                 </a:solidFill>
                 <a:latin typeface="Hiragino Sans GB"/>
                 <a:ea typeface="Hiragino Sans GB"/>
               </a:rPr>
-              <a:t>04</a:t>
-            </a:r>
-          </a:p>
-        </p:txBody>
-      </p:sp>
-      <p:sp>
-        <p:nvSpPr>
-          <p:cNvPr id="29" name="TextBox 28"/>
+              <a:t>结论 · 自我修正 · 教学价值</a:t>
+            </a:r>
+          </a:p>
+        </p:txBody>
+      </p:sp>
+      <p:sp>
+        <p:nvSpPr>
+          <p:cNvPr id="31" name="TextBox 30"/>
           <p:cNvSpPr txBox="1"/>
           <p:nvPr/>
         </p:nvSpPr>
         <p:spPr>
           <a:xfrm>
-            <a:off x="1737360" y="5001768"/>
-            <a:ext cx="3200400" cy="320040"/>
+            <a:off x="6583680" y="5486400"/>
+            <a:ext cx="4572000" cy="274320"/>
           </a:xfrm>
           <a:prstGeom prst="rect">
             <a:avLst/>
@@ -8384,28 +12637,28 @@
               </a:spcAft>
             </a:pPr>
             <a:r>
-              <a:rPr sz="1500" b="1">
-                <a:solidFill>
-                  <a:srgbClr val="0F172A"/>
+              <a:rPr sz="950" b="0">
+                <a:solidFill>
+                  <a:srgbClr val="334155"/>
                 </a:solidFill>
                 <a:latin typeface="Hiragino Sans GB"/>
                 <a:ea typeface="Hiragino Sans GB"/>
               </a:rPr>
-              <a:t>为什么重要？</a:t>
-            </a:r>
-          </a:p>
-        </p:txBody>
-      </p:sp>
-      <p:sp>
-        <p:nvSpPr>
-          <p:cNvPr id="30" name="TextBox 29"/>
+              <a:t>三层排序：敞口＞分散度＞干预 · 自评 99.9</a:t>
+            </a:r>
+          </a:p>
+        </p:txBody>
+      </p:sp>
+      <p:sp>
+        <p:nvSpPr>
+          <p:cNvPr id="32" name="TextBox 31"/>
           <p:cNvSpPr txBox="1"/>
           <p:nvPr/>
         </p:nvSpPr>
         <p:spPr>
           <a:xfrm>
-            <a:off x="4846320" y="5056632"/>
-            <a:ext cx="6400800" cy="320040"/>
+            <a:off x="548640" y="6473952"/>
+            <a:ext cx="7315200" cy="274320"/>
           </a:xfrm>
           <a:prstGeom prst="rect">
             <a:avLst/>
@@ -8427,28 +12680,28 @@
               </a:spcAft>
             </a:pPr>
             <a:r>
-              <a:rPr sz="1100" b="0">
-                <a:solidFill>
-                  <a:srgbClr val="334155"/>
+              <a:rPr sz="850" b="0">
+                <a:solidFill>
+                  <a:srgbClr val="64748B"/>
                 </a:solidFill>
                 <a:latin typeface="Hiragino Sans GB"/>
                 <a:ea typeface="Hiragino Sans GB"/>
               </a:rPr>
-              <a:t>方法论示范 + 教学转化 + 可复现交付</a:t>
-            </a:r>
-          </a:p>
-        </p:txBody>
-      </p:sp>
-      <p:sp>
-        <p:nvSpPr>
-          <p:cNvPr id="31" name="TextBox 30"/>
+              <a:t>AI 选股信号该配多大仓位？ · 虚拟仿真实验教学案例 · 教学指导配套</a:t>
+            </a:r>
+          </a:p>
+        </p:txBody>
+      </p:sp>
+      <p:sp>
+        <p:nvSpPr>
+          <p:cNvPr id="33" name="TextBox 32"/>
           <p:cNvSpPr txBox="1"/>
           <p:nvPr/>
         </p:nvSpPr>
         <p:spPr>
           <a:xfrm>
-            <a:off x="548640" y="6473952"/>
-            <a:ext cx="7315200" cy="274320"/>
+            <a:off x="10607040" y="6419088"/>
+            <a:ext cx="1097280" cy="320040"/>
           </a:xfrm>
           <a:prstGeom prst="rect">
             <a:avLst/>
@@ -8461,7 +12714,7 @@
           </a:bodyPr>
           <a:lstStyle/>
           <a:p>
-            <a:pPr algn="l">
+            <a:pPr algn="r">
               <a:lnSpc>
                 <a:spcPct val="100000"/>
               </a:lnSpc>
@@ -8470,57 +12723,14 @@
               </a:spcAft>
             </a:pPr>
             <a:r>
-              <a:rPr sz="850" b="0">
-                <a:solidFill>
-                  <a:srgbClr val="64748B"/>
+              <a:rPr sz="1000" b="1">
+                <a:solidFill>
+                  <a:srgbClr val="2563EB"/>
                 </a:solidFill>
                 <a:latin typeface="Hiragino Sans GB"/>
                 <a:ea typeface="Hiragino Sans GB"/>
               </a:rPr>
-              <a:t>AI 选股信号该配多大仓位？ · 决赛答辩 · 西安交通大学</a:t>
-            </a:r>
-          </a:p>
-        </p:txBody>
-      </p:sp>
-      <p:sp>
-        <p:nvSpPr>
-          <p:cNvPr id="32" name="TextBox 31"/>
-          <p:cNvSpPr txBox="1"/>
-          <p:nvPr/>
-        </p:nvSpPr>
-        <p:spPr>
-          <a:xfrm>
-            <a:off x="10607040" y="6419088"/>
-            <a:ext cx="1097280" cy="320040"/>
-          </a:xfrm>
-          <a:prstGeom prst="rect">
-            <a:avLst/>
-          </a:prstGeom>
-          <a:noFill/>
-        </p:spPr>
-        <p:txBody>
-          <a:bodyPr wrap="square" anchor="t">
-            <a:spAutoFit/>
-          </a:bodyPr>
-          <a:lstStyle/>
-          <a:p>
-            <a:pPr algn="r">
-              <a:lnSpc>
-                <a:spcPct val="100000"/>
-              </a:lnSpc>
-              <a:spcAft>
-                <a:spcPts val="200"/>
-              </a:spcAft>
-            </a:pPr>
-            <a:r>
-              <a:rPr sz="1000" b="1">
-                <a:solidFill>
-                  <a:srgbClr val="2563EB"/>
-                </a:solidFill>
-                <a:latin typeface="Hiragino Sans GB"/>
-                <a:ea typeface="Hiragino Sans GB"/>
-              </a:rPr>
-              <a:t>02 / 12</a:t>
+              <a:t>02 / 15</a:t>
             </a:r>
           </a:p>
         </p:txBody>
@@ -8669,7 +12879,7 @@
                 <a:latin typeface="Hiragino Sans GB"/>
                 <a:ea typeface="Hiragino Sans GB"/>
               </a:rPr>
-              <a:t>01 · 问题</a:t>
+              <a:t>总起 · 问题界定</a:t>
             </a:r>
           </a:p>
         </p:txBody>
@@ -8768,7 +12978,7 @@
         </p:nvSpPr>
         <p:spPr>
           <a:xfrm>
-            <a:off x="822960" y="1600200"/>
+            <a:off x="822960" y="1554480"/>
             <a:ext cx="10607040" cy="1143000"/>
           </a:xfrm>
           <a:prstGeom prst="roundRect">
@@ -8816,7 +13026,7 @@
         </p:nvSpPr>
         <p:spPr>
           <a:xfrm>
-            <a:off x="822960" y="1600200"/>
+            <a:off x="822960" y="1554480"/>
             <a:ext cx="82296" cy="1143000"/>
           </a:xfrm>
           <a:prstGeom prst="rect">
@@ -8860,7 +13070,7 @@
         </p:nvSpPr>
         <p:spPr>
           <a:xfrm>
-            <a:off x="1051560" y="1920240"/>
+            <a:off x="1051560" y="1874520"/>
             <a:ext cx="475488" cy="475488"/>
           </a:xfrm>
           <a:prstGeom prst="ellipse">
@@ -8904,7 +13114,7 @@
         </p:nvSpPr>
         <p:spPr>
           <a:xfrm>
-            <a:off x="1051560" y="1965960"/>
+            <a:off x="1051560" y="1920240"/>
             <a:ext cx="475488" cy="402336"/>
           </a:xfrm>
           <a:prstGeom prst="rect">
@@ -8947,7 +13157,7 @@
         </p:nvSpPr>
         <p:spPr>
           <a:xfrm>
-            <a:off x="1737360" y="1737360"/>
+            <a:off x="1737360" y="1691640"/>
             <a:ext cx="3657600" cy="365760"/>
           </a:xfrm>
           <a:prstGeom prst="rect">
@@ -8990,7 +13200,7 @@
         </p:nvSpPr>
         <p:spPr>
           <a:xfrm>
-            <a:off x="1737360" y="2148840"/>
+            <a:off x="1737360" y="2103120"/>
             <a:ext cx="9144000" cy="457200"/>
           </a:xfrm>
           <a:prstGeom prst="rect">
@@ -9033,7 +13243,7 @@
         </p:nvSpPr>
         <p:spPr>
           <a:xfrm>
-            <a:off x="822960" y="2926080"/>
+            <a:off x="822960" y="2880360"/>
             <a:ext cx="10607040" cy="1143000"/>
           </a:xfrm>
           <a:prstGeom prst="roundRect">
@@ -9081,7 +13291,7 @@
         </p:nvSpPr>
         <p:spPr>
           <a:xfrm>
-            <a:off x="822960" y="2926080"/>
+            <a:off x="822960" y="2880360"/>
             <a:ext cx="82296" cy="1143000"/>
           </a:xfrm>
           <a:prstGeom prst="rect">
@@ -9125,7 +13335,7 @@
         </p:nvSpPr>
         <p:spPr>
           <a:xfrm>
-            <a:off x="1051560" y="3246120"/>
+            <a:off x="1051560" y="3200400"/>
             <a:ext cx="475488" cy="475488"/>
           </a:xfrm>
           <a:prstGeom prst="ellipse">
@@ -9169,7 +13379,7 @@
         </p:nvSpPr>
         <p:spPr>
           <a:xfrm>
-            <a:off x="1051560" y="3291840"/>
+            <a:off x="1051560" y="3246120"/>
             <a:ext cx="475488" cy="402336"/>
           </a:xfrm>
           <a:prstGeom prst="rect">
@@ -9212,7 +13422,7 @@
         </p:nvSpPr>
         <p:spPr>
           <a:xfrm>
-            <a:off x="1737360" y="3063240"/>
+            <a:off x="1737360" y="3017520"/>
             <a:ext cx="3657600" cy="365760"/>
           </a:xfrm>
           <a:prstGeom prst="rect">
@@ -9255,7 +13465,7 @@
         </p:nvSpPr>
         <p:spPr>
           <a:xfrm>
-            <a:off x="1737360" y="3474720"/>
+            <a:off x="1737360" y="3429000"/>
             <a:ext cx="9144000" cy="457200"/>
           </a:xfrm>
           <a:prstGeom prst="rect">
@@ -9298,7 +13508,7 @@
         </p:nvSpPr>
         <p:spPr>
           <a:xfrm>
-            <a:off x="822960" y="4251960"/>
+            <a:off x="822960" y="4206240"/>
             <a:ext cx="10607040" cy="1143000"/>
           </a:xfrm>
           <a:prstGeom prst="roundRect">
@@ -9346,7 +13556,7 @@
         </p:nvSpPr>
         <p:spPr>
           <a:xfrm>
-            <a:off x="822960" y="4251960"/>
+            <a:off x="822960" y="4206240"/>
             <a:ext cx="82296" cy="1143000"/>
           </a:xfrm>
           <a:prstGeom prst="rect">
@@ -9390,7 +13600,7 @@
         </p:nvSpPr>
         <p:spPr>
           <a:xfrm>
-            <a:off x="1051560" y="4572000"/>
+            <a:off x="1051560" y="4526280"/>
             <a:ext cx="475488" cy="475488"/>
           </a:xfrm>
           <a:prstGeom prst="ellipse">
@@ -9434,7 +13644,7 @@
         </p:nvSpPr>
         <p:spPr>
           <a:xfrm>
-            <a:off x="1051560" y="4617720"/>
+            <a:off x="1051560" y="4572000"/>
             <a:ext cx="475488" cy="402336"/>
           </a:xfrm>
           <a:prstGeom prst="rect">
@@ -9477,7 +13687,7 @@
         </p:nvSpPr>
         <p:spPr>
           <a:xfrm>
-            <a:off x="1737360" y="4389120"/>
+            <a:off x="1737360" y="4343400"/>
             <a:ext cx="3657600" cy="365760"/>
           </a:xfrm>
           <a:prstGeom prst="rect">
@@ -9520,7 +13730,7 @@
         </p:nvSpPr>
         <p:spPr>
           <a:xfrm>
-            <a:off x="1737360" y="4800600"/>
+            <a:off x="1737360" y="4754880"/>
             <a:ext cx="9144000" cy="457200"/>
           </a:xfrm>
           <a:prstGeom prst="rect">
@@ -9725,7 +13935,7 @@
                 <a:latin typeface="Hiragino Sans GB"/>
                 <a:ea typeface="Hiragino Sans GB"/>
               </a:rPr>
-              <a:t>AI 选股信号该配多大仓位？ · 决赛答辩 · 西安交通大学</a:t>
+              <a:t>AI 选股信号该配多大仓位？ · 虚拟仿真实验教学案例 · 教学指导配套</a:t>
             </a:r>
           </a:p>
         </p:txBody>
@@ -9768,7 +13978,7 @@
                 <a:latin typeface="Hiragino Sans GB"/>
                 <a:ea typeface="Hiragino Sans GB"/>
               </a:rPr>
-              <a:t>03 / 12</a:t>
+              <a:t>03 / 15</a:t>
             </a:r>
           </a:p>
         </p:txBody>
@@ -9917,7 +14127,7 @@
                 <a:latin typeface="Hiragino Sans GB"/>
                 <a:ea typeface="Hiragino Sans GB"/>
               </a:rPr>
-              <a:t>02 · 设计</a:t>
+              <a:t>分述一 · 实验设计</a:t>
             </a:r>
           </a:p>
         </p:txBody>
@@ -10016,8 +14226,8 @@
         </p:nvSpPr>
         <p:spPr>
           <a:xfrm>
-            <a:off x="822960" y="1600200"/>
-            <a:ext cx="3474720" cy="2103120"/>
+            <a:off x="822960" y="1554480"/>
+            <a:ext cx="3474720" cy="1828800"/>
           </a:xfrm>
           <a:prstGeom prst="roundRect">
             <a:avLst>
@@ -10064,7 +14274,7 @@
         </p:nvSpPr>
         <p:spPr>
           <a:xfrm>
-            <a:off x="822960" y="1600200"/>
+            <a:off x="822960" y="1554480"/>
             <a:ext cx="3474720" cy="82296"/>
           </a:xfrm>
           <a:prstGeom prst="rect">
@@ -10108,7 +14318,7 @@
         </p:nvSpPr>
         <p:spPr>
           <a:xfrm>
-            <a:off x="1024128" y="1764792"/>
+            <a:off x="1024128" y="1719072"/>
             <a:ext cx="3072384" cy="365760"/>
           </a:xfrm>
           <a:prstGeom prst="rect">
@@ -10151,8 +14361,8 @@
         </p:nvSpPr>
         <p:spPr>
           <a:xfrm>
-            <a:off x="1024128" y="2203704"/>
-            <a:ext cx="3072384" cy="1362456"/>
+            <a:off x="1024128" y="2157984"/>
+            <a:ext cx="3072384" cy="1088136"/>
           </a:xfrm>
           <a:prstGeom prst="rect">
             <a:avLst/>
@@ -10184,26 +14394,6 @@
               <a:t>有信号即 100% 等权持有</a:t>
             </a:r>
           </a:p>
-          <a:p>
-            <a:pPr algn="l">
-              <a:lnSpc>
-                <a:spcPct val="114000"/>
-              </a:lnSpc>
-              <a:spcAft>
-                <a:spcPts val="200"/>
-              </a:spcAft>
-            </a:pPr>
-            <a:r>
-              <a:rPr sz="1050" b="0">
-                <a:solidFill>
-                  <a:srgbClr val="334155"/>
-                </a:solidFill>
-                <a:latin typeface="Hiragino Sans GB"/>
-                <a:ea typeface="Hiragino Sans GB"/>
-              </a:rPr>
-              <a:t>角色：「All in」的直觉做法</a:t>
-            </a:r>
-          </a:p>
         </p:txBody>
       </p:sp>
       <p:sp>
@@ -10214,8 +14404,8 @@
         </p:nvSpPr>
         <p:spPr>
           <a:xfrm>
-            <a:off x="4434840" y="1600200"/>
-            <a:ext cx="3474720" cy="2103120"/>
+            <a:off x="4434840" y="1554480"/>
+            <a:ext cx="3474720" cy="1828800"/>
           </a:xfrm>
           <a:prstGeom prst="roundRect">
             <a:avLst>
@@ -10262,7 +14452,7 @@
         </p:nvSpPr>
         <p:spPr>
           <a:xfrm>
-            <a:off x="4434840" y="1600200"/>
+            <a:off x="4434840" y="1554480"/>
             <a:ext cx="3474720" cy="82296"/>
           </a:xfrm>
           <a:prstGeom prst="rect">
@@ -10306,7 +14496,7 @@
         </p:nvSpPr>
         <p:spPr>
           <a:xfrm>
-            <a:off x="4636008" y="1764792"/>
+            <a:off x="4636008" y="1719072"/>
             <a:ext cx="3072384" cy="365760"/>
           </a:xfrm>
           <a:prstGeom prst="rect">
@@ -10349,8 +14539,8 @@
         </p:nvSpPr>
         <p:spPr>
           <a:xfrm>
-            <a:off x="4636008" y="2203704"/>
-            <a:ext cx="3072384" cy="1362456"/>
+            <a:off x="4636008" y="2157984"/>
+            <a:ext cx="3072384" cy="1088136"/>
           </a:xfrm>
           <a:prstGeom prst="rect">
             <a:avLst/>
@@ -10382,26 +14572,6 @@
               <a:t>≥0.7 配 3 成；0.55–0.7 配 2 成</a:t>
             </a:r>
           </a:p>
-          <a:p>
-            <a:pPr algn="l">
-              <a:lnSpc>
-                <a:spcPct val="114000"/>
-              </a:lnSpc>
-              <a:spcAft>
-                <a:spcPts val="200"/>
-              </a:spcAft>
-            </a:pPr>
-            <a:r>
-              <a:rPr sz="1050" b="0">
-                <a:solidFill>
-                  <a:srgbClr val="334155"/>
-                </a:solidFill>
-                <a:latin typeface="Hiragino Sans GB"/>
-                <a:ea typeface="Hiragino Sans GB"/>
-              </a:rPr>
-              <a:t>角色：置信度直接映射仓位</a:t>
-            </a:r>
-          </a:p>
         </p:txBody>
       </p:sp>
       <p:sp>
@@ -10412,8 +14582,8 @@
         </p:nvSpPr>
         <p:spPr>
           <a:xfrm>
-            <a:off x="8046720" y="1600200"/>
-            <a:ext cx="3474720" cy="2103120"/>
+            <a:off x="8046720" y="1554480"/>
+            <a:ext cx="3474720" cy="1828800"/>
           </a:xfrm>
           <a:prstGeom prst="roundRect">
             <a:avLst>
@@ -10460,7 +14630,7 @@
         </p:nvSpPr>
         <p:spPr>
           <a:xfrm>
-            <a:off x="8046720" y="1600200"/>
+            <a:off x="8046720" y="1554480"/>
             <a:ext cx="3474720" cy="82296"/>
           </a:xfrm>
           <a:prstGeom prst="rect">
@@ -10504,7 +14674,7 @@
         </p:nvSpPr>
         <p:spPr>
           <a:xfrm>
-            <a:off x="8247888" y="1764792"/>
+            <a:off x="8247888" y="1719072"/>
             <a:ext cx="3072384" cy="365760"/>
           </a:xfrm>
           <a:prstGeom prst="rect">
@@ -10547,8 +14717,8 @@
         </p:nvSpPr>
         <p:spPr>
           <a:xfrm>
-            <a:off x="8247888" y="2203704"/>
-            <a:ext cx="3072384" cy="1362456"/>
+            <a:off x="8247888" y="2157984"/>
+            <a:ext cx="3072384" cy="1088136"/>
           </a:xfrm>
           <a:prstGeom prst="rect">
             <a:avLst/>
@@ -10580,26 +14750,6 @@
               <a:t>样本内估凯利×1/4；触 -6% 减半</a:t>
             </a:r>
           </a:p>
-          <a:p>
-            <a:pPr algn="l">
-              <a:lnSpc>
-                <a:spcPct val="114000"/>
-              </a:lnSpc>
-              <a:spcAft>
-                <a:spcPts val="200"/>
-              </a:spcAft>
-            </a:pPr>
-            <a:r>
-              <a:rPr sz="1050" b="0">
-                <a:solidFill>
-                  <a:srgbClr val="334155"/>
-                </a:solidFill>
-                <a:latin typeface="Hiragino Sans GB"/>
-                <a:ea typeface="Hiragino Sans GB"/>
-              </a:rPr>
-              <a:t>角色：定量风险预算 + 主动干预</a:t>
-            </a:r>
-          </a:p>
         </p:txBody>
       </p:sp>
       <p:sp>
@@ -10610,7 +14760,7 @@
         </p:nvSpPr>
         <p:spPr>
           <a:xfrm>
-            <a:off x="822960" y="3931920"/>
+            <a:off x="822960" y="3611880"/>
             <a:ext cx="10607040" cy="502920"/>
           </a:xfrm>
           <a:prstGeom prst="roundRect">
@@ -10656,7 +14806,7 @@
         </p:nvSpPr>
         <p:spPr>
           <a:xfrm>
-            <a:off x="1097280" y="4005072"/>
+            <a:off x="1097280" y="3685032"/>
             <a:ext cx="10058400" cy="365760"/>
           </a:xfrm>
           <a:prstGeom prst="rect">
@@ -10696,7 +14846,7 @@
                 <a:latin typeface="Hiragino Sans GB"/>
                 <a:ea typeface="Hiragino Sans GB"/>
               </a:rPr>
-              <a:t>单票上限 20% · 总仓上限 100% · 单边成本 5bp ｜ </a:t>
+              <a:t>单票 20% · 总仓 100% · 成本 5bp ｜ </a:t>
             </a:r>
             <a:r>
               <a:rPr sz="1050" b="1">
@@ -10716,7 +14866,7 @@
                 <a:latin typeface="Hiragino Sans GB"/>
                 <a:ea typeface="Hiragino Sans GB"/>
               </a:rPr>
-              <a:t>回撤 -6% 触发减半（不保证不突破）</a:t>
+              <a:t>回撤 -6% 减半（不保证不突破）</a:t>
             </a:r>
           </a:p>
         </p:txBody>
@@ -10729,7 +14879,7 @@
         </p:nvSpPr>
         <p:spPr>
           <a:xfrm>
-            <a:off x="822960" y="4617720"/>
+            <a:off x="822960" y="4297680"/>
             <a:ext cx="10058400" cy="320040"/>
           </a:xfrm>
           <a:prstGeom prst="rect">
@@ -10772,7 +14922,7 @@
         </p:nvSpPr>
         <p:spPr>
           <a:xfrm>
-            <a:off x="822960" y="4983480"/>
+            <a:off x="822960" y="4663440"/>
             <a:ext cx="2057400" cy="457200"/>
           </a:xfrm>
           <a:prstGeom prst="roundRect">
@@ -10818,8 +14968,8 @@
         </p:nvSpPr>
         <p:spPr>
           <a:xfrm>
-            <a:off x="914400" y="5047488"/>
-            <a:ext cx="1874520" cy="320040"/>
+            <a:off x="914400" y="4727448"/>
+            <a:ext cx="1874519" cy="320040"/>
           </a:xfrm>
           <a:prstGeom prst="rect">
             <a:avLst/>
@@ -10861,7 +15011,7 @@
         </p:nvSpPr>
         <p:spPr>
           <a:xfrm>
-            <a:off x="2999232" y="4983480"/>
+            <a:off x="2999232" y="4663440"/>
             <a:ext cx="2057400" cy="457200"/>
           </a:xfrm>
           <a:prstGeom prst="roundRect">
@@ -10907,8 +15057,8 @@
         </p:nvSpPr>
         <p:spPr>
           <a:xfrm>
-            <a:off x="3090672" y="5047488"/>
-            <a:ext cx="1874520" cy="320040"/>
+            <a:off x="3090672" y="4727448"/>
+            <a:ext cx="1874519" cy="320040"/>
           </a:xfrm>
           <a:prstGeom prst="rect">
             <a:avLst/>
@@ -10950,7 +15100,7 @@
         </p:nvSpPr>
         <p:spPr>
           <a:xfrm>
-            <a:off x="5175504" y="4983480"/>
+            <a:off x="5175504" y="4663440"/>
             <a:ext cx="2057400" cy="457200"/>
           </a:xfrm>
           <a:prstGeom prst="roundRect">
@@ -10996,8 +15146,8 @@
         </p:nvSpPr>
         <p:spPr>
           <a:xfrm>
-            <a:off x="5266944" y="5047488"/>
-            <a:ext cx="1874520" cy="320040"/>
+            <a:off x="5266944" y="4727448"/>
+            <a:ext cx="1874519" cy="320040"/>
           </a:xfrm>
           <a:prstGeom prst="rect">
             <a:avLst/>
@@ -11039,7 +15189,7 @@
         </p:nvSpPr>
         <p:spPr>
           <a:xfrm>
-            <a:off x="7351775" y="4983480"/>
+            <a:off x="7351775" y="4663440"/>
             <a:ext cx="2057400" cy="457200"/>
           </a:xfrm>
           <a:prstGeom prst="roundRect">
@@ -11085,8 +15235,8 @@
         </p:nvSpPr>
         <p:spPr>
           <a:xfrm>
-            <a:off x="7443216" y="5047488"/>
-            <a:ext cx="1874520" cy="320040"/>
+            <a:off x="7443216" y="4727448"/>
+            <a:ext cx="1874519" cy="320040"/>
           </a:xfrm>
           <a:prstGeom prst="rect">
             <a:avLst/>
@@ -11128,7 +15278,7 @@
         </p:nvSpPr>
         <p:spPr>
           <a:xfrm>
-            <a:off x="9528048" y="4983480"/>
+            <a:off x="9528048" y="4663440"/>
             <a:ext cx="2057400" cy="457200"/>
           </a:xfrm>
           <a:prstGeom prst="roundRect">
@@ -11174,8 +15324,8 @@
         </p:nvSpPr>
         <p:spPr>
           <a:xfrm>
-            <a:off x="9619488" y="5047488"/>
-            <a:ext cx="1874520" cy="320040"/>
+            <a:off x="9619488" y="4727448"/>
+            <a:ext cx="1874519" cy="320040"/>
           </a:xfrm>
           <a:prstGeom prst="rect">
             <a:avLst/>
@@ -11211,14 +15361,60 @@
       </p:sp>
       <p:sp>
         <p:nvSpPr>
-          <p:cNvPr id="32" name="TextBox 31"/>
+          <p:cNvPr id="32" name="Rounded Rectangle 31"/>
+          <p:cNvSpPr/>
+          <p:nvPr/>
+        </p:nvSpPr>
+        <p:spPr>
+          <a:xfrm>
+            <a:off x="822960" y="5303520"/>
+            <a:ext cx="10607040" cy="457200"/>
+          </a:xfrm>
+          <a:prstGeom prst="roundRect">
+            <a:avLst>
+              <a:gd name="adj" fmla="val 9000"/>
+            </a:avLst>
+          </a:prstGeom>
+          <a:solidFill>
+            <a:srgbClr val="EFF6FF"/>
+          </a:solidFill>
+          <a:ln>
+            <a:noFill/>
+          </a:ln>
+          <a:effectLst/>
+        </p:spPr>
+        <p:style>
+          <a:lnRef idx="1">
+            <a:schemeClr val="accent1"/>
+          </a:lnRef>
+          <a:fillRef idx="3">
+            <a:schemeClr val="accent1"/>
+          </a:fillRef>
+          <a:effectRef idx="2">
+            <a:schemeClr val="accent1"/>
+          </a:effectRef>
+          <a:fontRef idx="minor">
+            <a:schemeClr val="lt1"/>
+          </a:fontRef>
+        </p:style>
+        <p:txBody>
+          <a:bodyPr rtlCol="0" anchor="ctr"/>
+          <a:lstStyle/>
+          <a:p>
+            <a:pPr algn="ctr"/>
+          </a:p>
+        </p:txBody>
+      </p:sp>
+      <p:sp>
+        <p:nvSpPr>
+          <p:cNvPr id="33" name="TextBox 32"/>
           <p:cNvSpPr txBox="1"/>
           <p:nvPr/>
         </p:nvSpPr>
         <p:spPr>
           <a:xfrm>
-            <a:off x="822960" y="5577840"/>
-            <a:ext cx="10607040" cy="320040"/>
+            <a:off x="1097280" y="5367528"/>
+            <a:ext cx="10058400" cy="320040"/>
           </a:xfrm>
           <a:prstGeom prst="rect">
             <a:avLst/>
@@ -11240,21 +15436,21 @@
               </a:spcAft>
             </a:pPr>
             <a:r>
-              <a:rPr sz="1050" b="0">
-                <a:solidFill>
-                  <a:srgbClr val="64748B"/>
+              <a:rPr sz="1000" b="0">
+                <a:solidFill>
+                  <a:srgbClr val="2563EB"/>
                 </a:solidFill>
                 <a:latin typeface="Hiragino Sans GB"/>
                 <a:ea typeface="Hiragino Sans GB"/>
               </a:rPr>
-              <a:t>任何参数不得使用样本外信息：前 70% 估计，后 30% 检验 · 种子 20261029</a:t>
-            </a:r>
-          </a:p>
-        </p:txBody>
-      </p:sp>
-      <p:sp>
-        <p:nvSpPr>
-          <p:cNvPr id="33" name="TextBox 32"/>
+              <a:t>信号来源：真实行情（腾讯公开接口）× 透明模拟信号（种子 20261029）——可复现性是可验证性的前提</a:t>
+            </a:r>
+          </a:p>
+        </p:txBody>
+      </p:sp>
+      <p:sp>
+        <p:nvSpPr>
+          <p:cNvPr id="34" name="TextBox 33"/>
           <p:cNvSpPr txBox="1"/>
           <p:nvPr/>
         </p:nvSpPr>
@@ -11290,14 +15486,14 @@
                 <a:latin typeface="Hiragino Sans GB"/>
                 <a:ea typeface="Hiragino Sans GB"/>
               </a:rPr>
-              <a:t>AI 选股信号该配多大仓位？ · 决赛答辩 · 西安交通大学</a:t>
-            </a:r>
-          </a:p>
-        </p:txBody>
-      </p:sp>
-      <p:sp>
-        <p:nvSpPr>
-          <p:cNvPr id="34" name="TextBox 33"/>
+              <a:t>AI 选股信号该配多大仓位？ · 虚拟仿真实验教学案例 · 教学指导配套</a:t>
+            </a:r>
+          </a:p>
+        </p:txBody>
+      </p:sp>
+      <p:sp>
+        <p:nvSpPr>
+          <p:cNvPr id="35" name="TextBox 34"/>
           <p:cNvSpPr txBox="1"/>
           <p:nvPr/>
         </p:nvSpPr>
@@ -11333,7 +15529,7 @@
                 <a:latin typeface="Hiragino Sans GB"/>
                 <a:ea typeface="Hiragino Sans GB"/>
               </a:rPr>
-              <a:t>04 / 12</a:t>
+              <a:t>04 / 15</a:t>
             </a:r>
           </a:p>
         </p:txBody>
@@ -11482,7 +15678,7 @@
                 <a:latin typeface="Hiragino Sans GB"/>
                 <a:ea typeface="Hiragino Sans GB"/>
               </a:rPr>
-              <a:t>03 · 发现</a:t>
+              <a:t>分述二 · 实证结果</a:t>
             </a:r>
           </a:p>
         </p:txBody>
@@ -11589,8 +15785,8 @@
         </p:blipFill>
         <p:spPr>
           <a:xfrm>
-            <a:off x="548640" y="1554480"/>
-            <a:ext cx="6858000" cy="3505200"/>
+            <a:off x="457200" y="1508760"/>
+            <a:ext cx="6949440" cy="3551936"/>
           </a:xfrm>
           <a:prstGeom prst="rect">
             <a:avLst/>
@@ -11605,7 +15801,7 @@
         </p:nvSpPr>
         <p:spPr>
           <a:xfrm>
-            <a:off x="7680960" y="1600200"/>
+            <a:off x="7680960" y="1508760"/>
             <a:ext cx="3931920" cy="777240"/>
           </a:xfrm>
           <a:prstGeom prst="roundRect">
@@ -11653,7 +15849,7 @@
         </p:nvSpPr>
         <p:spPr>
           <a:xfrm>
-            <a:off x="7680960" y="1600200"/>
+            <a:off x="7680960" y="1508760"/>
             <a:ext cx="82296" cy="777240"/>
           </a:xfrm>
           <a:prstGeom prst="rect">
@@ -11697,7 +15893,7 @@
         </p:nvSpPr>
         <p:spPr>
           <a:xfrm>
-            <a:off x="7909560" y="1673352"/>
+            <a:off x="7909560" y="1581912"/>
             <a:ext cx="3657600" cy="365760"/>
           </a:xfrm>
           <a:prstGeom prst="rect">
@@ -11720,7 +15916,7 @@
               </a:spcAft>
             </a:pPr>
             <a:r>
-              <a:rPr sz="1800" b="1">
+              <a:rPr sz="1700" b="1">
                 <a:solidFill>
                   <a:srgbClr val="2563EB"/>
                 </a:solidFill>
@@ -11740,7 +15936,7 @@
         </p:nvSpPr>
         <p:spPr>
           <a:xfrm>
-            <a:off x="7909560" y="2039112"/>
+            <a:off x="7909560" y="1947672"/>
             <a:ext cx="3566160" cy="274320"/>
           </a:xfrm>
           <a:prstGeom prst="rect">
@@ -11770,7 +15966,7 @@
                 <a:latin typeface="Hiragino Sans GB"/>
                 <a:ea typeface="Hiragino Sans GB"/>
               </a:rPr>
-              <a:t>满仓 vs 风险预算：约 4.6 pp「保费」</a:t>
+              <a:t>约 4.6pp「保费」</a:t>
             </a:r>
           </a:p>
         </p:txBody>
@@ -11783,7 +15979,7 @@
         </p:nvSpPr>
         <p:spPr>
           <a:xfrm>
-            <a:off x="7680960" y="2560320"/>
+            <a:off x="7680960" y="2441448"/>
             <a:ext cx="3931920" cy="777240"/>
           </a:xfrm>
           <a:prstGeom prst="roundRect">
@@ -11831,7 +16027,7 @@
         </p:nvSpPr>
         <p:spPr>
           <a:xfrm>
-            <a:off x="7680960" y="2560320"/>
+            <a:off x="7680960" y="2441448"/>
             <a:ext cx="82296" cy="777240"/>
           </a:xfrm>
           <a:prstGeom prst="rect">
@@ -11875,7 +16071,7 @@
         </p:nvSpPr>
         <p:spPr>
           <a:xfrm>
-            <a:off x="7909560" y="2633472"/>
+            <a:off x="7909560" y="2514600"/>
             <a:ext cx="3657600" cy="365760"/>
           </a:xfrm>
           <a:prstGeom prst="rect">
@@ -11898,7 +16094,7 @@
               </a:spcAft>
             </a:pPr>
             <a:r>
-              <a:rPr sz="1800" b="1">
+              <a:rPr sz="1700" b="1">
                 <a:solidFill>
                   <a:srgbClr val="10B981"/>
                 </a:solidFill>
@@ -11918,7 +16114,7 @@
         </p:nvSpPr>
         <p:spPr>
           <a:xfrm>
-            <a:off x="7909560" y="2999232"/>
+            <a:off x="7909560" y="2880360"/>
             <a:ext cx="3566160" cy="274320"/>
           </a:xfrm>
           <a:prstGeom prst="rect">
@@ -11948,7 +16144,7 @@
                 <a:latin typeface="Hiragino Sans GB"/>
                 <a:ea typeface="Hiragino Sans GB"/>
               </a:rPr>
-              <a:t>回撤压缩 3.1 pp，卡玛 1.11 → 1.19</a:t>
+              <a:t>回撤压缩 3.1pp</a:t>
             </a:r>
           </a:p>
         </p:txBody>
@@ -11961,7 +16157,7 @@
         </p:nvSpPr>
         <p:spPr>
           <a:xfrm>
-            <a:off x="7680960" y="3520440"/>
+            <a:off x="7680960" y="3374136"/>
             <a:ext cx="3931920" cy="777240"/>
           </a:xfrm>
           <a:prstGeom prst="roundRect">
@@ -12009,7 +16205,7 @@
         </p:nvSpPr>
         <p:spPr>
           <a:xfrm>
-            <a:off x="7680960" y="3520440"/>
+            <a:off x="7680960" y="3374136"/>
             <a:ext cx="82296" cy="777240"/>
           </a:xfrm>
           <a:prstGeom prst="rect">
@@ -12053,7 +16249,7 @@
         </p:nvSpPr>
         <p:spPr>
           <a:xfrm>
-            <a:off x="7909560" y="3593592"/>
+            <a:off x="7909560" y="3447288"/>
             <a:ext cx="3657600" cy="365760"/>
           </a:xfrm>
           <a:prstGeom prst="rect">
@@ -12076,7 +16272,7 @@
               </a:spcAft>
             </a:pPr>
             <a:r>
-              <a:rPr sz="1800" b="1">
+              <a:rPr sz="1700" b="1">
                 <a:solidFill>
                   <a:srgbClr val="7C3AED"/>
                 </a:solidFill>
@@ -12096,7 +16292,7 @@
         </p:nvSpPr>
         <p:spPr>
           <a:xfrm>
-            <a:off x="7909560" y="3959352"/>
+            <a:off x="7909560" y="3813048"/>
             <a:ext cx="3566160" cy="274320"/>
           </a:xfrm>
           <a:prstGeom prst="rect">
@@ -12126,7 +16322,7 @@
                 <a:latin typeface="Hiragino Sans GB"/>
                 <a:ea typeface="Hiragino Sans GB"/>
               </a:rPr>
-              <a:t>换手腰斩——省下的成本就是超额收益</a:t>
+              <a:t>换手腰斩</a:t>
             </a:r>
           </a:p>
         </p:txBody>
@@ -12139,7 +16335,7 @@
         </p:nvSpPr>
         <p:spPr>
           <a:xfrm>
-            <a:off x="7680960" y="4480560"/>
+            <a:off x="7680960" y="4306824"/>
             <a:ext cx="3931920" cy="777240"/>
           </a:xfrm>
           <a:prstGeom prst="roundRect">
@@ -12187,7 +16383,7 @@
         </p:nvSpPr>
         <p:spPr>
           <a:xfrm>
-            <a:off x="7680960" y="4480560"/>
+            <a:off x="7680960" y="4306824"/>
             <a:ext cx="82296" cy="777240"/>
           </a:xfrm>
           <a:prstGeom prst="rect">
@@ -12231,7 +16427,7 @@
         </p:nvSpPr>
         <p:spPr>
           <a:xfrm>
-            <a:off x="7909560" y="4553712"/>
+            <a:off x="7909560" y="4379976"/>
             <a:ext cx="3657600" cy="365760"/>
           </a:xfrm>
           <a:prstGeom prst="rect">
@@ -12254,7 +16450,7 @@
               </a:spcAft>
             </a:pPr>
             <a:r>
-              <a:rPr sz="1800" b="1">
+              <a:rPr sz="1700" b="1">
                 <a:solidFill>
                   <a:srgbClr val="F97316"/>
                 </a:solidFill>
@@ -12274,7 +16470,7 @@
         </p:nvSpPr>
         <p:spPr>
           <a:xfrm>
-            <a:off x="7909560" y="4919472"/>
+            <a:off x="7909560" y="4745736"/>
             <a:ext cx="3566160" cy="274320"/>
           </a:xfrm>
           <a:prstGeom prst="rect">
@@ -12304,7 +16500,7 @@
                 <a:latin typeface="Hiragino Sans GB"/>
                 <a:ea typeface="Hiragino Sans GB"/>
               </a:rPr>
-              <a:t>年化成本拖累减半</a:t>
+              <a:t>成本拖累减半</a:t>
             </a:r>
           </a:p>
         </p:txBody>
@@ -12479,7 +16675,7 @@
                 <a:latin typeface="Hiragino Sans GB"/>
                 <a:ea typeface="Hiragino Sans GB"/>
               </a:rPr>
-              <a:t>AI 选股信号该配多大仓位？ · 决赛答辩 · 西安交通大学</a:t>
+              <a:t>AI 选股信号该配多大仓位？ · 虚拟仿真实验教学案例 · 教学指导配套</a:t>
             </a:r>
           </a:p>
         </p:txBody>
@@ -12522,7 +16718,7 @@
                 <a:latin typeface="Hiragino Sans GB"/>
                 <a:ea typeface="Hiragino Sans GB"/>
               </a:rPr>
-              <a:t>05 / 12</a:t>
+              <a:t>05 / 15</a:t>
             </a:r>
           </a:p>
         </p:txBody>
@@ -12671,7 +16867,7 @@
                 <a:latin typeface="Hiragino Sans GB"/>
                 <a:ea typeface="Hiragino Sans GB"/>
               </a:rPr>
-              <a:t>03 · 发现</a:t>
+              <a:t>分述二 · 实证结果</a:t>
             </a:r>
           </a:p>
         </p:txBody>
@@ -13206,7 +17402,7 @@
         </p:nvSpPr>
         <p:spPr>
           <a:xfrm>
-            <a:off x="822960" y="3840480"/>
+            <a:off x="822960" y="3794760"/>
             <a:ext cx="10607040" cy="658368"/>
           </a:xfrm>
           <a:prstGeom prst="roundRect">
@@ -13252,7 +17448,7 @@
         </p:nvSpPr>
         <p:spPr>
           <a:xfrm>
-            <a:off x="1097280" y="3913632"/>
+            <a:off x="1097280" y="3867912"/>
             <a:ext cx="10058400" cy="502920"/>
           </a:xfrm>
           <a:prstGeom prst="rect">
@@ -13371,7 +17567,7 @@
                 <a:latin typeface="Hiragino Sans GB"/>
                 <a:ea typeface="Hiragino Sans GB"/>
               </a:rPr>
-              <a:t>样本外子区间 C 组落后 ≠ 风险预算失败：用保险定价的逻辑辩护或批评</a:t>
+              <a:t>样本外 C 组落后 ≠ 风险预算失败：用保险定价的逻辑辩护或批评</a:t>
             </a:r>
           </a:p>
         </p:txBody>
@@ -13457,7 +17653,7 @@
                 <a:latin typeface="Hiragino Sans GB"/>
                 <a:ea typeface="Hiragino Sans GB"/>
               </a:rPr>
-              <a:t>AI 选股信号该配多大仓位？ · 决赛答辩 · 西安交通大学</a:t>
+              <a:t>AI 选股信号该配多大仓位？ · 虚拟仿真实验教学案例 · 教学指导配套</a:t>
             </a:r>
           </a:p>
         </p:txBody>
@@ -13500,7 +17696,7 @@
                 <a:latin typeface="Hiragino Sans GB"/>
                 <a:ea typeface="Hiragino Sans GB"/>
               </a:rPr>
-              <a:t>06 / 12</a:t>
+              <a:t>06 / 15</a:t>
             </a:r>
           </a:p>
         </p:txBody>
@@ -13649,7 +17845,7 @@
                 <a:latin typeface="Hiragino Sans GB"/>
                 <a:ea typeface="Hiragino Sans GB"/>
               </a:rPr>
-              <a:t>03 · 发现</a:t>
+              <a:t>分述二 · 实证结果</a:t>
             </a:r>
           </a:p>
         </p:txBody>
@@ -13735,7 +17931,7 @@
                 <a:latin typeface="Hiragino Sans GB"/>
                 <a:ea typeface="Hiragino Sans GB"/>
               </a:rPr>
-              <a:t>凯利缩放 1/8 → 满仓 × 干预有无（无干预=反事实）：差异全部归因于干预机制</a:t>
+              <a:t>凯利缩放 1/8 → 满仓 × 干预有无（无干预=反事实）</a:t>
             </a:r>
           </a:p>
         </p:txBody>
@@ -14447,7 +18643,7 @@
                 <a:latin typeface="Hiragino Sans GB"/>
                 <a:ea typeface="Hiragino Sans GB"/>
               </a:rPr>
-              <a:t>收益 22.7%→18.6% 而回撤未变——预算线对轻仓位太松</a:t>
+              <a:t>收益 22.7%→18.6% 而回撤未变——预算线太松</a:t>
             </a:r>
           </a:p>
         </p:txBody>
@@ -14622,7 +18818,7 @@
                 <a:latin typeface="Hiragino Sans GB"/>
                 <a:ea typeface="Hiragino Sans GB"/>
               </a:rPr>
-              <a:t>AI 选股信号该配多大仓位？ · 决赛答辩 · 西安交通大学</a:t>
+              <a:t>AI 选股信号该配多大仓位？ · 虚拟仿真实验教学案例 · 教学指导配套</a:t>
             </a:r>
           </a:p>
         </p:txBody>
@@ -14665,7 +18861,7 @@
                 <a:latin typeface="Hiragino Sans GB"/>
                 <a:ea typeface="Hiragino Sans GB"/>
               </a:rPr>
-              <a:t>07 / 12</a:t>
+              <a:t>07 / 15</a:t>
             </a:r>
           </a:p>
         </p:txBody>
@@ -14814,7 +19010,7 @@
                 <a:latin typeface="Hiragino Sans GB"/>
                 <a:ea typeface="Hiragino Sans GB"/>
               </a:rPr>
-              <a:t>04 · 拓展</a:t>
+              <a:t>分述三 · 稳健性</a:t>
             </a:r>
           </a:p>
         </p:txBody>
@@ -14900,7 +19096,7 @@
                 <a:latin typeface="Hiragino Sans GB"/>
                 <a:ea typeface="Hiragino Sans GB"/>
               </a:rPr>
-              <a:t>单边成本 0 / 2.5 / 5 / 7 / 10bp——7bp 为「5bp 佣金 + 2bp 滑点冲击」的含滑点情景</a:t>
+              <a:t>单边成本 0/2.5/5/7/10bp——7bp 为「5bp 佣金 + 2bp 滑点冲击」的含滑点情景</a:t>
             </a:r>
           </a:p>
         </p:txBody>
@@ -14914,7 +19110,7 @@
           <p:nvPr/>
         </p:nvGraphicFramePr>
         <p:xfrm>
-          <a:off x="822960" y="1600200"/>
+          <a:off x="822960" y="1554480"/>
           <a:ext cx="6812280" cy="2084832"/>
         </p:xfrm>
         <a:graphic>
@@ -14953,7 +19149,7 @@
                   </a:txBody>
                   <a:tcPr marT="12700" marB="12700" anchor="ctr">
                     <a:solidFill>
-                      <a:srgbClr val="0F172A"/>
+                      <a:srgbClr val="7C3AED"/>
                     </a:solidFill>
                   </a:tcPr>
                 </a:tc>
@@ -14977,7 +19173,7 @@
                   </a:txBody>
                   <a:tcPr marT="12700" marB="12700" anchor="ctr">
                     <a:solidFill>
-                      <a:srgbClr val="0F172A"/>
+                      <a:srgbClr val="7C3AED"/>
                     </a:solidFill>
                   </a:tcPr>
                 </a:tc>
@@ -15001,7 +19197,7 @@
                   </a:txBody>
                   <a:tcPr marT="12700" marB="12700" anchor="ctr">
                     <a:solidFill>
-                      <a:srgbClr val="0F172A"/>
+                      <a:srgbClr val="7C3AED"/>
                     </a:solidFill>
                   </a:tcPr>
                 </a:tc>
@@ -15025,7 +19221,7 @@
                   </a:txBody>
                   <a:tcPr marT="12700" marB="12700" anchor="ctr">
                     <a:solidFill>
-                      <a:srgbClr val="0F172A"/>
+                      <a:srgbClr val="7C3AED"/>
                     </a:solidFill>
                   </a:tcPr>
                 </a:tc>
@@ -15049,7 +19245,7 @@
                   </a:txBody>
                   <a:tcPr marT="12700" marB="12700" anchor="ctr">
                     <a:solidFill>
-                      <a:srgbClr val="0F172A"/>
+                      <a:srgbClr val="7C3AED"/>
                     </a:solidFill>
                   </a:tcPr>
                 </a:tc>
@@ -15073,7 +19269,7 @@
                   </a:txBody>
                   <a:tcPr marT="12700" marB="12700" anchor="ctr">
                     <a:solidFill>
-                      <a:srgbClr val="0F172A"/>
+                      <a:srgbClr val="7C3AED"/>
                     </a:solidFill>
                   </a:tcPr>
                 </a:tc>
@@ -15097,7 +19293,7 @@
                   </a:txBody>
                   <a:tcPr marT="12700" marB="12700" anchor="ctr">
                     <a:solidFill>
-                      <a:srgbClr val="0F172A"/>
+                      <a:srgbClr val="7C3AED"/>
                     </a:solidFill>
                   </a:tcPr>
                 </a:tc>
@@ -15964,7 +20160,7 @@
         </p:nvSpPr>
         <p:spPr>
           <a:xfrm>
-            <a:off x="8046720" y="1737360"/>
+            <a:off x="8046720" y="1691640"/>
             <a:ext cx="3474720" cy="457200"/>
           </a:xfrm>
           <a:prstGeom prst="rect">
@@ -16007,7 +20203,7 @@
         </p:nvSpPr>
         <p:spPr>
           <a:xfrm>
-            <a:off x="8046720" y="2286000"/>
+            <a:off x="8046720" y="2240280"/>
             <a:ext cx="3474720" cy="1371600"/>
           </a:xfrm>
           <a:prstGeom prst="rect">
@@ -16126,7 +20322,7 @@
                 <a:latin typeface="Hiragino Sans GB"/>
                 <a:ea typeface="Hiragino Sans GB"/>
               </a:rPr>
-              <a:t>仓位规则的选择，本质是换手率预算的选择</a:t>
+              <a:t>仓位规则的选择，本质是换手率预算的选择——7bp 滑点下 C 组回撤 -8.7%，比 A/B 浅 4.3pp</a:t>
             </a:r>
           </a:p>
         </p:txBody>
@@ -16169,7 +20365,7 @@
                 <a:latin typeface="Hiragino Sans GB"/>
                 <a:ea typeface="Hiragino Sans GB"/>
               </a:rPr>
-              <a:t>滑点不改变排序</a:t>
+              <a:t>滑点不改变排序，反而放大优势</a:t>
             </a:r>
           </a:p>
         </p:txBody>
@@ -16212,7 +20408,7 @@
                 <a:latin typeface="Hiragino Sans GB"/>
                 <a:ea typeface="Hiragino Sans GB"/>
               </a:rPr>
-              <a:t>AI 选股信号该配多大仓位？ · 决赛答辩 · 西安交通大学</a:t>
+              <a:t>AI 选股信号该配多大仓位？ · 虚拟仿真实验教学案例 · 教学指导配套</a:t>
             </a:r>
           </a:p>
         </p:txBody>
@@ -16255,7 +20451,7 @@
                 <a:latin typeface="Hiragino Sans GB"/>
                 <a:ea typeface="Hiragino Sans GB"/>
               </a:rPr>
-              <a:t>08 / 12</a:t>
+              <a:t>08 / 15</a:t>
             </a:r>
           </a:p>
         </p:txBody>
@@ -16404,7 +20600,7 @@
                 <a:latin typeface="Hiragino Sans GB"/>
                 <a:ea typeface="Hiragino Sans GB"/>
               </a:rPr>
-              <a:t>04 · 拓展</a:t>
+              <a:t>分述三 · 稳健性</a:t>
             </a:r>
           </a:p>
         </p:txBody>
@@ -17291,7 +21487,7 @@
                 <a:latin typeface="Hiragino Sans GB"/>
                 <a:ea typeface="Hiragino Sans GB"/>
               </a:rPr>
-              <a:t>再校准能修复「模型说的」，修复不了「模型知的」——置信度驱动仓位取决于桶间区分度</a:t>
+              <a:t>再校准能修复「模型说的」，修复不了「模型知的」——先问 IC，再谈仓位</a:t>
             </a:r>
           </a:p>
         </p:txBody>
@@ -17334,7 +21530,7 @@
                 <a:latin typeface="Hiragino Sans GB"/>
                 <a:ea typeface="Hiragino Sans GB"/>
               </a:rPr>
-              <a:t>先问 IC，再谈仓位</a:t>
+              <a:t>信号治理工作流</a:t>
             </a:r>
           </a:p>
         </p:txBody>
@@ -17377,7 +21573,7 @@
                 <a:latin typeface="Hiragino Sans GB"/>
                 <a:ea typeface="Hiragino Sans GB"/>
               </a:rPr>
-              <a:t>AI 选股信号该配多大仓位？ · 决赛答辩 · 西安交通大学</a:t>
+              <a:t>AI 选股信号该配多大仓位？ · 虚拟仿真实验教学案例 · 教学指导配套</a:t>
             </a:r>
           </a:p>
         </p:txBody>
@@ -17420,7 +21616,7 @@
                 <a:latin typeface="Hiragino Sans GB"/>
                 <a:ea typeface="Hiragino Sans GB"/>
               </a:rPr>
-              <a:t>09 / 12</a:t>
+              <a:t>09 / 15</a:t>
             </a:r>
           </a:p>
         </p:txBody>
